--- a/docs/content/05-teaching-resources/slides/specialism/10-designing-data-assets-and-integration.pptx
+++ b/docs/content/05-teaching-resources/slides/specialism/10-designing-data-assets-and-integration.pptx
@@ -11,10 +11,16 @@
     <p:sldId id="259" r:id="rId10"/>
     <p:sldId id="260" r:id="rId11"/>
     <p:sldId id="261" r:id="rId12"/>
-    <p:sldId id="262" r:id="rId13"/>
+    <p:sldId id="262" r:id="rId14"/>
     <p:sldId id="263" r:id="rId15"/>
     <p:sldId id="264" r:id="rId16"/>
     <p:sldId id="265" r:id="rId17"/>
+    <p:sldId id="266" r:id="rId18"/>
+    <p:sldId id="267" r:id="rId19"/>
+    <p:sldId id="268" r:id="rId20"/>
+    <p:sldId id="269" r:id="rId21"/>
+    <p:sldId id="270" r:id="rId22"/>
+    <p:sldId id="271" r:id="rId23"/>
   </p:sldIdLst>
   <p:sldSz cx="12191695" cy="6858000" type="screen4x3"/>
   <p:notesSz cx="6858000" cy="9144000"/>
@@ -511,7 +517,22 @@
           <a:lstStyle/>
           <a:p>
             <a:r>
-              <a:t>Give students a few minutes to answer on mini whiteboards or paper, then reveal the answers on the next slide.</a:t>
+              <a:t>Answers:</a:t>
+            </a:r>
+          </a:p>
+          <a:p>
+            <a:r>
+              <a:t>1. E.g. file type, size, compression, quality, bandwidth.</a:t>
+            </a:r>
+          </a:p>
+          <a:p>
+            <a:r>
+              <a:t>2. Large files load slowly on limited bandwidth.</a:t>
+            </a:r>
+          </a:p>
+          <a:p>
+            <a:r>
+              <a:t>3. Licences, ownership and quality.</a:t>
             </a:r>
           </a:p>
         </p:txBody>
@@ -581,7 +602,22 @@
           <a:lstStyle/>
           <a:p>
             <a:r>
-              <a:t>Talk through any answers the class found difficult.</a:t>
+              <a:t>Answers:</a:t>
+            </a:r>
+          </a:p>
+          <a:p>
+            <a:r>
+              <a:t>1. A list of every field with its type and rules.</a:t>
+            </a:r>
+          </a:p>
+          <a:p>
+            <a:r>
+              <a:t>2. Duplicated data.</a:t>
+            </a:r>
+          </a:p>
+          <a:p>
+            <a:r>
+              <a:t>3. A field linking to the primary key of another table.</a:t>
             </a:r>
           </a:p>
         </p:txBody>
@@ -607,6 +643,231 @@
 </file>
 
 <file path=ppt/notesSlides/notesSlide3.xml><?xml version="1.0" encoding="utf-8"?>
+<p:notes xmlns:a="http://schemas.openxmlformats.org/drawingml/2006/main" xmlns:p="http://schemas.openxmlformats.org/presentationml/2006/main" xmlns:r="http://schemas.openxmlformats.org/officeDocument/2006/relationships">
+  <p:cSld>
+    <p:spTree>
+      <p:nvGrpSpPr>
+        <p:cNvPr id="1" name=""/>
+        <p:cNvGrpSpPr/>
+        <p:nvPr/>
+      </p:nvGrpSpPr>
+      <p:grpSpPr>
+        <a:xfrm>
+          <a:off x="0" y="0"/>
+          <a:ext cx="0" cy="0"/>
+          <a:chOff x="0" y="0"/>
+          <a:chExt cx="0" cy="0"/>
+        </a:xfrm>
+      </p:grpSpPr>
+      <p:sp>
+        <p:nvSpPr>
+          <p:cNvPr id="2" name="Slide Image Placeholder 1"/>
+          <p:cNvSpPr>
+            <a:spLocks noGrp="1"/>
+          </p:cNvSpPr>
+          <p:nvPr>
+            <p:ph type="sldImg" idx="2"/>
+          </p:nvPr>
+        </p:nvSpPr>
+        <p:spPr/>
+      </p:sp>
+      <p:sp>
+        <p:nvSpPr>
+          <p:cNvPr id="3" name="Notes Placeholder 2"/>
+          <p:cNvSpPr>
+            <a:spLocks noGrp="1"/>
+          </p:cNvSpPr>
+          <p:nvPr>
+            <p:ph type="body" idx="3" sz="quarter"/>
+          </p:nvPr>
+        </p:nvSpPr>
+        <p:spPr/>
+        <p:txBody>
+          <a:bodyPr/>
+          <a:lstStyle/>
+          <a:p>
+            <a:r>
+              <a:t>Answers:</a:t>
+            </a:r>
+          </a:p>
+          <a:p>
+            <a:r>
+              <a:t>1. E.g. the player's own input.</a:t>
+            </a:r>
+          </a:p>
+          <a:p>
+            <a:r>
+              <a:t>2. Where your system ends and external systems begin.</a:t>
+            </a:r>
+          </a:p>
+          <a:p>
+            <a:r>
+              <a:t>3. E.g. a sports-data feed or payment provider.</a:t>
+            </a:r>
+          </a:p>
+        </p:txBody>
+      </p:sp>
+      <p:sp>
+        <p:nvSpPr>
+          <p:cNvPr id="4" name="Slide Number Placeholder 3"/>
+          <p:cNvSpPr>
+            <a:spLocks noGrp="1"/>
+          </p:cNvSpPr>
+          <p:nvPr>
+            <p:ph type="sldNum" idx="5" sz="quarter"/>
+          </p:nvPr>
+        </p:nvSpPr>
+        <p:spPr/>
+      </p:sp>
+    </p:spTree>
+  </p:cSld>
+  <p:clrMapOvr>
+    <a:masterClrMapping/>
+  </p:clrMapOvr>
+</p:notes>
+</file>
+
+<file path=ppt/notesSlides/notesSlide4.xml><?xml version="1.0" encoding="utf-8"?>
+<p:notes xmlns:a="http://schemas.openxmlformats.org/drawingml/2006/main" xmlns:p="http://schemas.openxmlformats.org/presentationml/2006/main" xmlns:r="http://schemas.openxmlformats.org/officeDocument/2006/relationships">
+  <p:cSld>
+    <p:spTree>
+      <p:nvGrpSpPr>
+        <p:cNvPr id="1" name=""/>
+        <p:cNvGrpSpPr/>
+        <p:nvPr/>
+      </p:nvGrpSpPr>
+      <p:grpSpPr>
+        <a:xfrm>
+          <a:off x="0" y="0"/>
+          <a:ext cx="0" cy="0"/>
+          <a:chOff x="0" y="0"/>
+          <a:chExt cx="0" cy="0"/>
+        </a:xfrm>
+      </p:grpSpPr>
+      <p:sp>
+        <p:nvSpPr>
+          <p:cNvPr id="2" name="Slide Image Placeholder 1"/>
+          <p:cNvSpPr>
+            <a:spLocks noGrp="1"/>
+          </p:cNvSpPr>
+          <p:nvPr>
+            <p:ph type="sldImg" idx="2"/>
+          </p:nvPr>
+        </p:nvSpPr>
+        <p:spPr/>
+      </p:sp>
+      <p:sp>
+        <p:nvSpPr>
+          <p:cNvPr id="3" name="Notes Placeholder 2"/>
+          <p:cNvSpPr>
+            <a:spLocks noGrp="1"/>
+          </p:cNvSpPr>
+          <p:nvPr>
+            <p:ph type="body" idx="3" sz="quarter"/>
+          </p:nvPr>
+        </p:nvSpPr>
+        <p:spPr/>
+        <p:txBody>
+          <a:bodyPr/>
+          <a:lstStyle/>
+          <a:p>
+            <a:r>
+              <a:t>Give students a few minutes to answer on mini whiteboards or paper, then reveal the answers on the next slide.</a:t>
+            </a:r>
+          </a:p>
+        </p:txBody>
+      </p:sp>
+      <p:sp>
+        <p:nvSpPr>
+          <p:cNvPr id="4" name="Slide Number Placeholder 3"/>
+          <p:cNvSpPr>
+            <a:spLocks noGrp="1"/>
+          </p:cNvSpPr>
+          <p:nvPr>
+            <p:ph type="sldNum" idx="5" sz="quarter"/>
+          </p:nvPr>
+        </p:nvSpPr>
+        <p:spPr/>
+      </p:sp>
+    </p:spTree>
+  </p:cSld>
+  <p:clrMapOvr>
+    <a:masterClrMapping/>
+  </p:clrMapOvr>
+</p:notes>
+</file>
+
+<file path=ppt/notesSlides/notesSlide5.xml><?xml version="1.0" encoding="utf-8"?>
+<p:notes xmlns:a="http://schemas.openxmlformats.org/drawingml/2006/main" xmlns:p="http://schemas.openxmlformats.org/presentationml/2006/main" xmlns:r="http://schemas.openxmlformats.org/officeDocument/2006/relationships">
+  <p:cSld>
+    <p:spTree>
+      <p:nvGrpSpPr>
+        <p:cNvPr id="1" name=""/>
+        <p:cNvGrpSpPr/>
+        <p:nvPr/>
+      </p:nvGrpSpPr>
+      <p:grpSpPr>
+        <a:xfrm>
+          <a:off x="0" y="0"/>
+          <a:ext cx="0" cy="0"/>
+          <a:chOff x="0" y="0"/>
+          <a:chExt cx="0" cy="0"/>
+        </a:xfrm>
+      </p:grpSpPr>
+      <p:sp>
+        <p:nvSpPr>
+          <p:cNvPr id="2" name="Slide Image Placeholder 1"/>
+          <p:cNvSpPr>
+            <a:spLocks noGrp="1"/>
+          </p:cNvSpPr>
+          <p:nvPr>
+            <p:ph type="sldImg" idx="2"/>
+          </p:nvPr>
+        </p:nvSpPr>
+        <p:spPr/>
+      </p:sp>
+      <p:sp>
+        <p:nvSpPr>
+          <p:cNvPr id="3" name="Notes Placeholder 2"/>
+          <p:cNvSpPr>
+            <a:spLocks noGrp="1"/>
+          </p:cNvSpPr>
+          <p:nvPr>
+            <p:ph type="body" idx="3" sz="quarter"/>
+          </p:nvPr>
+        </p:nvSpPr>
+        <p:spPr/>
+        <p:txBody>
+          <a:bodyPr/>
+          <a:lstStyle/>
+          <a:p>
+            <a:r>
+              <a:t>Talk through any answers the class found difficult.</a:t>
+            </a:r>
+          </a:p>
+        </p:txBody>
+      </p:sp>
+      <p:sp>
+        <p:nvSpPr>
+          <p:cNvPr id="4" name="Slide Number Placeholder 3"/>
+          <p:cNvSpPr>
+            <a:spLocks noGrp="1"/>
+          </p:cNvSpPr>
+          <p:nvPr>
+            <p:ph type="sldNum" idx="5" sz="quarter"/>
+          </p:nvPr>
+        </p:nvSpPr>
+        <p:spPr/>
+      </p:sp>
+    </p:spTree>
+  </p:cSld>
+  <p:clrMapOvr>
+    <a:masterClrMapping/>
+  </p:clrMapOvr>
+</p:notes>
+</file>
+
+<file path=ppt/notesSlides/notesSlide6.xml><?xml version="1.0" encoding="utf-8"?>
 <p:notes xmlns:a="http://schemas.openxmlformats.org/drawingml/2006/main" xmlns:p="http://schemas.openxmlformats.org/presentationml/2006/main" xmlns:r="http://schemas.openxmlformats.org/officeDocument/2006/relationships">
   <p:cSld>
     <p:spTree>
@@ -3982,6 +4243,3473 @@
     <p:bg>
       <p:bgPr>
         <a:solidFill>
+          <a:srgbClr val="FFFFFF"/>
+        </a:solidFill>
+        <a:effectLst/>
+      </p:bgPr>
+    </p:bg>
+    <p:spTree>
+      <p:nvGrpSpPr>
+        <p:cNvPr id="1" name=""/>
+        <p:cNvGrpSpPr/>
+        <p:nvPr/>
+      </p:nvGrpSpPr>
+      <p:grpSpPr/>
+      <p:sp>
+        <p:nvSpPr>
+          <p:cNvPr id="2" name="TextBox 1"/>
+          <p:cNvSpPr txBox="1"/>
+          <p:nvPr/>
+        </p:nvSpPr>
+        <p:spPr>
+          <a:xfrm>
+            <a:off x="548640" y="320040"/>
+            <a:ext cx="11094415" cy="274320"/>
+          </a:xfrm>
+          <a:prstGeom prst="rect">
+            <a:avLst/>
+          </a:prstGeom>
+          <a:noFill/>
+        </p:spPr>
+        <p:txBody>
+          <a:bodyPr wrap="square" anchor="t" lIns="0" rIns="0" tIns="0" bIns="0"/>
+          <a:lstStyle/>
+          <a:p>
+            <a:pPr algn="l"/>
+            <a:r>
+              <a:rPr sz="1100" b="1" i="0">
+                <a:solidFill>
+                  <a:srgbClr val="54595D"/>
+                </a:solidFill>
+                <a:latin typeface="Calibri"/>
+              </a:rPr>
+              <a:t>OCCUPATIONAL SPECIALISM  ·  Specialism Content Area 4</a:t>
+            </a:r>
+          </a:p>
+        </p:txBody>
+      </p:sp>
+      <p:sp>
+        <p:nvSpPr>
+          <p:cNvPr id="3" name="TextBox 2"/>
+          <p:cNvSpPr txBox="1"/>
+          <p:nvPr/>
+        </p:nvSpPr>
+        <p:spPr>
+          <a:xfrm>
+            <a:off x="548640" y="566928"/>
+            <a:ext cx="11094415" cy="822960"/>
+          </a:xfrm>
+          <a:prstGeom prst="rect">
+            <a:avLst/>
+          </a:prstGeom>
+          <a:noFill/>
+        </p:spPr>
+        <p:txBody>
+          <a:bodyPr wrap="square" anchor="ctr" lIns="0" rIns="0" tIns="0" bIns="0"/>
+          <a:lstStyle/>
+          <a:p>
+            <a:pPr algn="l"/>
+            <a:r>
+              <a:rPr sz="3200" b="1" i="0">
+                <a:solidFill>
+                  <a:srgbClr val="03306E"/>
+                </a:solidFill>
+                <a:latin typeface="Cambria"/>
+              </a:rPr>
+              <a:t>Platforms and integration</a:t>
+            </a:r>
+          </a:p>
+        </p:txBody>
+      </p:sp>
+      <p:sp>
+        <p:nvSpPr>
+          <p:cNvPr id="4" name="TextBox 3"/>
+          <p:cNvSpPr txBox="1"/>
+          <p:nvPr/>
+        </p:nvSpPr>
+        <p:spPr>
+          <a:xfrm>
+            <a:off x="548640" y="6446520"/>
+            <a:ext cx="8229600" cy="274320"/>
+          </a:xfrm>
+          <a:prstGeom prst="rect">
+            <a:avLst/>
+          </a:prstGeom>
+          <a:noFill/>
+        </p:spPr>
+        <p:txBody>
+          <a:bodyPr wrap="square" anchor="t" lIns="0" rIns="0" tIns="0" bIns="0"/>
+          <a:lstStyle/>
+          <a:p>
+            <a:pPr algn="l"/>
+            <a:r>
+              <a:rPr sz="1000" b="0" i="0">
+                <a:solidFill>
+                  <a:srgbClr val="54595D"/>
+                </a:solidFill>
+                <a:latin typeface="Calibri"/>
+              </a:rPr>
+              <a:t>Digital Software Development T Level  ·  Designing Data, Assets and Integration</a:t>
+            </a:r>
+          </a:p>
+        </p:txBody>
+      </p:sp>
+      <p:sp>
+        <p:nvSpPr>
+          <p:cNvPr id="5" name="TextBox 4"/>
+          <p:cNvSpPr txBox="1"/>
+          <p:nvPr/>
+        </p:nvSpPr>
+        <p:spPr>
+          <a:xfrm>
+            <a:off x="10728655" y="6446520"/>
+            <a:ext cx="914400" cy="274320"/>
+          </a:xfrm>
+          <a:prstGeom prst="rect">
+            <a:avLst/>
+          </a:prstGeom>
+          <a:noFill/>
+        </p:spPr>
+        <p:txBody>
+          <a:bodyPr wrap="square" anchor="t" lIns="0" rIns="0" tIns="0" bIns="0"/>
+          <a:lstStyle/>
+          <a:p>
+            <a:pPr algn="r"/>
+            <a:r>
+              <a:rPr sz="1000" b="0" i="0">
+                <a:solidFill>
+                  <a:srgbClr val="54595D"/>
+                </a:solidFill>
+                <a:latin typeface="Calibri"/>
+              </a:rPr>
+              <a:t>10</a:t>
+            </a:r>
+          </a:p>
+        </p:txBody>
+      </p:sp>
+      <p:sp>
+        <p:nvSpPr>
+          <p:cNvPr id="6" name="TextBox 5"/>
+          <p:cNvSpPr txBox="1"/>
+          <p:nvPr/>
+        </p:nvSpPr>
+        <p:spPr>
+          <a:xfrm>
+            <a:off x="548640" y="1554480"/>
+            <a:ext cx="6720840" cy="4617720"/>
+          </a:xfrm>
+          <a:prstGeom prst="rect">
+            <a:avLst/>
+          </a:prstGeom>
+          <a:noFill/>
+        </p:spPr>
+        <p:txBody>
+          <a:bodyPr wrap="square" lIns="0" rIns="0" tIns="0" bIns="0">
+            <a:spAutoFit/>
+          </a:bodyPr>
+          <a:lstStyle/>
+          <a:p>
+            <a:pPr>
+              <a:spcAft>
+                <a:spcPts val="1320"/>
+              </a:spcAft>
+            </a:pPr>
+            <a:r>
+              <a:rPr sz="2200" b="1">
+                <a:solidFill>
+                  <a:srgbClr val="202122"/>
+                </a:solidFill>
+                <a:latin typeface="Calibri"/>
+              </a:rPr>
+              <a:t>Target platforms shape design:</a:t>
+            </a:r>
+            <a:r>
+              <a:rPr sz="2200" b="0">
+                <a:solidFill>
+                  <a:srgbClr val="202122"/>
+                </a:solidFill>
+                <a:latin typeface="Calibri"/>
+              </a:rPr>
+              <a:t> the operating system, file system, physical or virtual servers, the language stack, and whether it's a mobile or web app.</a:t>
+            </a:r>
+          </a:p>
+          <a:p>
+            <a:pPr>
+              <a:spcAft>
+                <a:spcPts val="1320"/>
+              </a:spcAft>
+            </a:pPr>
+            <a:r>
+              <a:rPr sz="2200" b="0">
+                <a:solidFill>
+                  <a:srgbClr val="202122"/>
+                </a:solidFill>
+                <a:latin typeface="Calibri"/>
+              </a:rPr>
+              <a:t>Network integration asks which data is processed locally (such as a player's input in a game) and which remotely (such as all players' positions in a multiplayer game), how data moves between them (such as remote system calls), how the systems connect, where the system's boundaries are, and which external systems to integrate with.</a:t>
+            </a:r>
+          </a:p>
+        </p:txBody>
+      </p:sp>
+      <p:sp>
+        <p:nvSpPr>
+          <p:cNvPr id="7" name="Rounded Rectangle 6"/>
+          <p:cNvSpPr/>
+          <p:nvPr/>
+        </p:nvSpPr>
+        <p:spPr>
+          <a:xfrm>
+            <a:off x="7772400" y="1554480"/>
+            <a:ext cx="3867912" cy="4526280"/>
+          </a:xfrm>
+          <a:prstGeom prst="roundRect">
+            <a:avLst>
+              <a:gd name="adj" fmla="val 8000"/>
+            </a:avLst>
+          </a:prstGeom>
+          <a:solidFill>
+            <a:srgbClr val="03306E"/>
+          </a:solidFill>
+          <a:ln>
+            <a:noFill/>
+          </a:ln>
+          <a:effectLst/>
+        </p:spPr>
+        <p:style>
+          <a:lnRef idx="1">
+            <a:schemeClr val="accent1"/>
+          </a:lnRef>
+          <a:fillRef idx="3">
+            <a:schemeClr val="accent1"/>
+          </a:fillRef>
+          <a:effectRef idx="2">
+            <a:schemeClr val="accent1"/>
+          </a:effectRef>
+          <a:fontRef idx="minor">
+            <a:schemeClr val="lt1"/>
+          </a:fontRef>
+        </p:style>
+        <p:txBody>
+          <a:bodyPr rtlCol="0" anchor="ctr"/>
+          <a:lstStyle/>
+          <a:p/>
+        </p:txBody>
+      </p:sp>
+      <p:sp>
+        <p:nvSpPr>
+          <p:cNvPr id="8" name="Oval 7"/>
+          <p:cNvSpPr/>
+          <p:nvPr/>
+        </p:nvSpPr>
+        <p:spPr>
+          <a:xfrm>
+            <a:off x="8046720" y="1828800"/>
+            <a:ext cx="548640" cy="548640"/>
+          </a:xfrm>
+          <a:prstGeom prst="ellipse">
+            <a:avLst/>
+          </a:prstGeom>
+          <a:solidFill>
+            <a:srgbClr val="33C17A"/>
+          </a:solidFill>
+          <a:ln>
+            <a:noFill/>
+          </a:ln>
+          <a:effectLst/>
+        </p:spPr>
+        <p:style>
+          <a:lnRef idx="1">
+            <a:schemeClr val="accent1"/>
+          </a:lnRef>
+          <a:fillRef idx="3">
+            <a:schemeClr val="accent1"/>
+          </a:fillRef>
+          <a:effectRef idx="2">
+            <a:schemeClr val="accent1"/>
+          </a:effectRef>
+          <a:fontRef idx="minor">
+            <a:schemeClr val="lt1"/>
+          </a:fontRef>
+        </p:style>
+        <p:txBody>
+          <a:bodyPr rtlCol="0" anchor="ctr" lIns="0" rIns="0" tIns="0" bIns="0"/>
+          <a:lstStyle/>
+          <a:p>
+            <a:pPr algn="ctr"/>
+            <a:r>
+              <a:rPr sz="1300" b="1">
+                <a:solidFill>
+                  <a:srgbClr val="202122"/>
+                </a:solidFill>
+                <a:latin typeface="Calibri"/>
+              </a:rPr>
+              <a:t>e.g.</a:t>
+            </a:r>
+          </a:p>
+        </p:txBody>
+      </p:sp>
+      <p:sp>
+        <p:nvSpPr>
+          <p:cNvPr id="9" name="TextBox 8"/>
+          <p:cNvSpPr txBox="1"/>
+          <p:nvPr/>
+        </p:nvSpPr>
+        <p:spPr>
+          <a:xfrm>
+            <a:off x="8046720" y="2560320"/>
+            <a:ext cx="3291840" cy="365760"/>
+          </a:xfrm>
+          <a:prstGeom prst="rect">
+            <a:avLst/>
+          </a:prstGeom>
+          <a:noFill/>
+        </p:spPr>
+        <p:txBody>
+          <a:bodyPr wrap="square" anchor="t" lIns="0" rIns="0" tIns="0" bIns="0"/>
+          <a:lstStyle/>
+          <a:p>
+            <a:pPr algn="l"/>
+            <a:r>
+              <a:rPr sz="1300" b="1" i="0">
+                <a:solidFill>
+                  <a:srgbClr val="A9C8F0"/>
+                </a:solidFill>
+                <a:latin typeface="Calibri"/>
+              </a:rPr>
+              <a:t>EXAMPLE</a:t>
+            </a:r>
+          </a:p>
+        </p:txBody>
+      </p:sp>
+      <p:sp>
+        <p:nvSpPr>
+          <p:cNvPr id="10" name="TextBox 9"/>
+          <p:cNvSpPr txBox="1"/>
+          <p:nvPr/>
+        </p:nvSpPr>
+        <p:spPr>
+          <a:xfrm>
+            <a:off x="8046720" y="2971800"/>
+            <a:ext cx="3291840" cy="2971800"/>
+          </a:xfrm>
+          <a:prstGeom prst="rect">
+            <a:avLst/>
+          </a:prstGeom>
+          <a:noFill/>
+        </p:spPr>
+        <p:txBody>
+          <a:bodyPr wrap="square" anchor="t" lIns="0" rIns="0" tIns="0" bIns="0"/>
+          <a:lstStyle/>
+          <a:p>
+            <a:pPr algn="l"/>
+            <a:r>
+              <a:rPr sz="1900" b="0" i="0">
+                <a:solidFill>
+                  <a:srgbClr val="FFFFFF"/>
+                </a:solidFill>
+                <a:latin typeface="Cambria"/>
+              </a:rPr>
+              <a:t>A fantasy football app processes team selection on the phone, stores teams on its server, and pulls live scores from an external sports-data feed.</a:t>
+            </a:r>
+          </a:p>
+        </p:txBody>
+      </p:sp>
+    </p:spTree>
+  </p:cSld>
+  <p:clrMapOvr>
+    <a:masterClrMapping/>
+  </p:clrMapOvr>
+</p:sld>
+</file>
+
+<file path=ppt/slides/slide11.xml><?xml version="1.0" encoding="utf-8"?>
+<p:sld xmlns:a="http://schemas.openxmlformats.org/drawingml/2006/main" xmlns:p="http://schemas.openxmlformats.org/presentationml/2006/main" xmlns:r="http://schemas.openxmlformats.org/officeDocument/2006/relationships">
+  <p:cSld>
+    <p:bg>
+      <p:bgPr>
+        <a:solidFill>
+          <a:srgbClr val="FFFFFF"/>
+        </a:solidFill>
+        <a:effectLst/>
+      </p:bgPr>
+    </p:bg>
+    <p:spTree>
+      <p:nvGrpSpPr>
+        <p:cNvPr id="1" name=""/>
+        <p:cNvGrpSpPr/>
+        <p:nvPr/>
+      </p:nvGrpSpPr>
+      <p:grpSpPr/>
+      <p:sp>
+        <p:nvSpPr>
+          <p:cNvPr id="2" name="TextBox 1"/>
+          <p:cNvSpPr txBox="1"/>
+          <p:nvPr/>
+        </p:nvSpPr>
+        <p:spPr>
+          <a:xfrm>
+            <a:off x="548640" y="320040"/>
+            <a:ext cx="11094415" cy="274320"/>
+          </a:xfrm>
+          <a:prstGeom prst="rect">
+            <a:avLst/>
+          </a:prstGeom>
+          <a:noFill/>
+        </p:spPr>
+        <p:txBody>
+          <a:bodyPr wrap="square" anchor="t" lIns="0" rIns="0" tIns="0" bIns="0"/>
+          <a:lstStyle/>
+          <a:p>
+            <a:pPr algn="l"/>
+            <a:r>
+              <a:rPr sz="1100" b="1" i="0">
+                <a:solidFill>
+                  <a:srgbClr val="54595D"/>
+                </a:solidFill>
+                <a:latin typeface="Calibri"/>
+              </a:rPr>
+              <a:t>OCCUPATIONAL SPECIALISM  ·  Specialism Content Area 4</a:t>
+            </a:r>
+          </a:p>
+        </p:txBody>
+      </p:sp>
+      <p:sp>
+        <p:nvSpPr>
+          <p:cNvPr id="3" name="TextBox 2"/>
+          <p:cNvSpPr txBox="1"/>
+          <p:nvPr/>
+        </p:nvSpPr>
+        <p:spPr>
+          <a:xfrm>
+            <a:off x="548640" y="566928"/>
+            <a:ext cx="11094415" cy="822960"/>
+          </a:xfrm>
+          <a:prstGeom prst="rect">
+            <a:avLst/>
+          </a:prstGeom>
+          <a:noFill/>
+        </p:spPr>
+        <p:txBody>
+          <a:bodyPr wrap="square" anchor="ctr" lIns="0" rIns="0" tIns="0" bIns="0"/>
+          <a:lstStyle/>
+          <a:p>
+            <a:pPr algn="l"/>
+            <a:r>
+              <a:rPr sz="3200" b="1" i="0">
+                <a:solidFill>
+                  <a:srgbClr val="03306E"/>
+                </a:solidFill>
+                <a:latin typeface="Cambria"/>
+              </a:rPr>
+              <a:t>Platforms and integration</a:t>
+            </a:r>
+          </a:p>
+        </p:txBody>
+      </p:sp>
+      <p:sp>
+        <p:nvSpPr>
+          <p:cNvPr id="4" name="TextBox 3"/>
+          <p:cNvSpPr txBox="1"/>
+          <p:nvPr/>
+        </p:nvSpPr>
+        <p:spPr>
+          <a:xfrm>
+            <a:off x="548640" y="6446520"/>
+            <a:ext cx="8229600" cy="274320"/>
+          </a:xfrm>
+          <a:prstGeom prst="rect">
+            <a:avLst/>
+          </a:prstGeom>
+          <a:noFill/>
+        </p:spPr>
+        <p:txBody>
+          <a:bodyPr wrap="square" anchor="t" lIns="0" rIns="0" tIns="0" bIns="0"/>
+          <a:lstStyle/>
+          <a:p>
+            <a:pPr algn="l"/>
+            <a:r>
+              <a:rPr sz="1000" b="0" i="0">
+                <a:solidFill>
+                  <a:srgbClr val="54595D"/>
+                </a:solidFill>
+                <a:latin typeface="Calibri"/>
+              </a:rPr>
+              <a:t>Digital Software Development T Level  ·  Designing Data, Assets and Integration</a:t>
+            </a:r>
+          </a:p>
+        </p:txBody>
+      </p:sp>
+      <p:sp>
+        <p:nvSpPr>
+          <p:cNvPr id="5" name="TextBox 4"/>
+          <p:cNvSpPr txBox="1"/>
+          <p:nvPr/>
+        </p:nvSpPr>
+        <p:spPr>
+          <a:xfrm>
+            <a:off x="10728655" y="6446520"/>
+            <a:ext cx="914400" cy="274320"/>
+          </a:xfrm>
+          <a:prstGeom prst="rect">
+            <a:avLst/>
+          </a:prstGeom>
+          <a:noFill/>
+        </p:spPr>
+        <p:txBody>
+          <a:bodyPr wrap="square" anchor="t" lIns="0" rIns="0" tIns="0" bIns="0"/>
+          <a:lstStyle/>
+          <a:p>
+            <a:pPr algn="r"/>
+            <a:r>
+              <a:rPr sz="1000" b="0" i="0">
+                <a:solidFill>
+                  <a:srgbClr val="54595D"/>
+                </a:solidFill>
+                <a:latin typeface="Calibri"/>
+              </a:rPr>
+              <a:t>11</a:t>
+            </a:r>
+          </a:p>
+        </p:txBody>
+      </p:sp>
+      <p:sp>
+        <p:nvSpPr>
+          <p:cNvPr id="6" name="Rounded Rectangle 5"/>
+          <p:cNvSpPr/>
+          <p:nvPr/>
+        </p:nvSpPr>
+        <p:spPr>
+          <a:xfrm>
+            <a:off x="548640" y="1600200"/>
+            <a:ext cx="5410047" cy="2148840"/>
+          </a:xfrm>
+          <a:prstGeom prst="roundRect">
+            <a:avLst>
+              <a:gd name="adj" fmla="val 6000"/>
+            </a:avLst>
+          </a:prstGeom>
+          <a:solidFill>
+            <a:srgbClr val="EAF3FF"/>
+          </a:solidFill>
+          <a:ln>
+            <a:noFill/>
+          </a:ln>
+          <a:effectLst/>
+        </p:spPr>
+        <p:style>
+          <a:lnRef idx="1">
+            <a:schemeClr val="accent1"/>
+          </a:lnRef>
+          <a:fillRef idx="3">
+            <a:schemeClr val="accent1"/>
+          </a:fillRef>
+          <a:effectRef idx="2">
+            <a:schemeClr val="accent1"/>
+          </a:effectRef>
+          <a:fontRef idx="minor">
+            <a:schemeClr val="lt1"/>
+          </a:fontRef>
+        </p:style>
+        <p:txBody>
+          <a:bodyPr rtlCol="0" anchor="ctr"/>
+          <a:lstStyle/>
+          <a:p/>
+        </p:txBody>
+      </p:sp>
+      <p:sp>
+        <p:nvSpPr>
+          <p:cNvPr id="7" name="Oval 6"/>
+          <p:cNvSpPr/>
+          <p:nvPr/>
+        </p:nvSpPr>
+        <p:spPr>
+          <a:xfrm>
+            <a:off x="777240" y="1828800"/>
+            <a:ext cx="457200" cy="457200"/>
+          </a:xfrm>
+          <a:prstGeom prst="ellipse">
+            <a:avLst/>
+          </a:prstGeom>
+          <a:solidFill>
+            <a:srgbClr val="33C17A"/>
+          </a:solidFill>
+          <a:ln>
+            <a:noFill/>
+          </a:ln>
+          <a:effectLst/>
+        </p:spPr>
+        <p:style>
+          <a:lnRef idx="1">
+            <a:schemeClr val="accent1"/>
+          </a:lnRef>
+          <a:fillRef idx="3">
+            <a:schemeClr val="accent1"/>
+          </a:fillRef>
+          <a:effectRef idx="2">
+            <a:schemeClr val="accent1"/>
+          </a:effectRef>
+          <a:fontRef idx="minor">
+            <a:schemeClr val="lt1"/>
+          </a:fontRef>
+        </p:style>
+        <p:txBody>
+          <a:bodyPr rtlCol="0" anchor="ctr" lIns="0" rIns="0" tIns="0" bIns="0"/>
+          <a:lstStyle/>
+          <a:p>
+            <a:pPr algn="ctr"/>
+            <a:r>
+              <a:rPr sz="1500" b="1">
+                <a:solidFill>
+                  <a:srgbClr val="202122"/>
+                </a:solidFill>
+                <a:latin typeface="Calibri"/>
+              </a:rPr>
+              <a:t>1</a:t>
+            </a:r>
+          </a:p>
+        </p:txBody>
+      </p:sp>
+      <p:sp>
+        <p:nvSpPr>
+          <p:cNvPr id="8" name="TextBox 7"/>
+          <p:cNvSpPr txBox="1"/>
+          <p:nvPr/>
+        </p:nvSpPr>
+        <p:spPr>
+          <a:xfrm>
+            <a:off x="1371600" y="1801368"/>
+            <a:ext cx="4404207" cy="512064"/>
+          </a:xfrm>
+          <a:prstGeom prst="rect">
+            <a:avLst/>
+          </a:prstGeom>
+          <a:noFill/>
+        </p:spPr>
+        <p:txBody>
+          <a:bodyPr wrap="square" anchor="ctr" lIns="0" rIns="0" tIns="0" bIns="0"/>
+          <a:lstStyle/>
+          <a:p>
+            <a:pPr algn="l"/>
+            <a:r>
+              <a:rPr sz="1900" b="1" i="0">
+                <a:solidFill>
+                  <a:srgbClr val="03306E"/>
+                </a:solidFill>
+                <a:latin typeface="Calibri"/>
+              </a:rPr>
+              <a:t>Target platforms</a:t>
+            </a:r>
+          </a:p>
+        </p:txBody>
+      </p:sp>
+      <p:sp>
+        <p:nvSpPr>
+          <p:cNvPr id="9" name="TextBox 8"/>
+          <p:cNvSpPr txBox="1"/>
+          <p:nvPr/>
+        </p:nvSpPr>
+        <p:spPr>
+          <a:xfrm>
+            <a:off x="777240" y="2468880"/>
+            <a:ext cx="4952847" cy="1143000"/>
+          </a:xfrm>
+          <a:prstGeom prst="rect">
+            <a:avLst/>
+          </a:prstGeom>
+          <a:noFill/>
+        </p:spPr>
+        <p:txBody>
+          <a:bodyPr wrap="square" anchor="t" lIns="0" rIns="0" tIns="0" bIns="0"/>
+          <a:lstStyle/>
+          <a:p>
+            <a:pPr algn="l"/>
+            <a:r>
+              <a:rPr sz="2000" b="0" i="0">
+                <a:solidFill>
+                  <a:srgbClr val="202122"/>
+                </a:solidFill>
+                <a:latin typeface="Calibri"/>
+              </a:rPr>
+              <a:t>OS, file system, physical or virtual servers, language stack, mobile or web.</a:t>
+            </a:r>
+          </a:p>
+        </p:txBody>
+      </p:sp>
+      <p:sp>
+        <p:nvSpPr>
+          <p:cNvPr id="10" name="Rounded Rectangle 9"/>
+          <p:cNvSpPr/>
+          <p:nvPr/>
+        </p:nvSpPr>
+        <p:spPr>
+          <a:xfrm>
+            <a:off x="6233007" y="1600200"/>
+            <a:ext cx="5410047" cy="2148840"/>
+          </a:xfrm>
+          <a:prstGeom prst="roundRect">
+            <a:avLst>
+              <a:gd name="adj" fmla="val 6000"/>
+            </a:avLst>
+          </a:prstGeom>
+          <a:solidFill>
+            <a:srgbClr val="EAF3FF"/>
+          </a:solidFill>
+          <a:ln>
+            <a:noFill/>
+          </a:ln>
+          <a:effectLst/>
+        </p:spPr>
+        <p:style>
+          <a:lnRef idx="1">
+            <a:schemeClr val="accent1"/>
+          </a:lnRef>
+          <a:fillRef idx="3">
+            <a:schemeClr val="accent1"/>
+          </a:fillRef>
+          <a:effectRef idx="2">
+            <a:schemeClr val="accent1"/>
+          </a:effectRef>
+          <a:fontRef idx="minor">
+            <a:schemeClr val="lt1"/>
+          </a:fontRef>
+        </p:style>
+        <p:txBody>
+          <a:bodyPr rtlCol="0" anchor="ctr"/>
+          <a:lstStyle/>
+          <a:p/>
+        </p:txBody>
+      </p:sp>
+      <p:sp>
+        <p:nvSpPr>
+          <p:cNvPr id="11" name="Oval 10"/>
+          <p:cNvSpPr/>
+          <p:nvPr/>
+        </p:nvSpPr>
+        <p:spPr>
+          <a:xfrm>
+            <a:off x="6461607" y="1828800"/>
+            <a:ext cx="457200" cy="457200"/>
+          </a:xfrm>
+          <a:prstGeom prst="ellipse">
+            <a:avLst/>
+          </a:prstGeom>
+          <a:solidFill>
+            <a:srgbClr val="33C17A"/>
+          </a:solidFill>
+          <a:ln>
+            <a:noFill/>
+          </a:ln>
+          <a:effectLst/>
+        </p:spPr>
+        <p:style>
+          <a:lnRef idx="1">
+            <a:schemeClr val="accent1"/>
+          </a:lnRef>
+          <a:fillRef idx="3">
+            <a:schemeClr val="accent1"/>
+          </a:fillRef>
+          <a:effectRef idx="2">
+            <a:schemeClr val="accent1"/>
+          </a:effectRef>
+          <a:fontRef idx="minor">
+            <a:schemeClr val="lt1"/>
+          </a:fontRef>
+        </p:style>
+        <p:txBody>
+          <a:bodyPr rtlCol="0" anchor="ctr" lIns="0" rIns="0" tIns="0" bIns="0"/>
+          <a:lstStyle/>
+          <a:p>
+            <a:pPr algn="ctr"/>
+            <a:r>
+              <a:rPr sz="1500" b="1">
+                <a:solidFill>
+                  <a:srgbClr val="202122"/>
+                </a:solidFill>
+                <a:latin typeface="Calibri"/>
+              </a:rPr>
+              <a:t>2</a:t>
+            </a:r>
+          </a:p>
+        </p:txBody>
+      </p:sp>
+      <p:sp>
+        <p:nvSpPr>
+          <p:cNvPr id="12" name="TextBox 11"/>
+          <p:cNvSpPr txBox="1"/>
+          <p:nvPr/>
+        </p:nvSpPr>
+        <p:spPr>
+          <a:xfrm>
+            <a:off x="7055967" y="1801368"/>
+            <a:ext cx="4404207" cy="512064"/>
+          </a:xfrm>
+          <a:prstGeom prst="rect">
+            <a:avLst/>
+          </a:prstGeom>
+          <a:noFill/>
+        </p:spPr>
+        <p:txBody>
+          <a:bodyPr wrap="square" anchor="ctr" lIns="0" rIns="0" tIns="0" bIns="0"/>
+          <a:lstStyle/>
+          <a:p>
+            <a:pPr algn="l"/>
+            <a:r>
+              <a:rPr sz="1900" b="1" i="0">
+                <a:solidFill>
+                  <a:srgbClr val="03306E"/>
+                </a:solidFill>
+                <a:latin typeface="Calibri"/>
+              </a:rPr>
+              <a:t>Local or remote</a:t>
+            </a:r>
+          </a:p>
+        </p:txBody>
+      </p:sp>
+      <p:sp>
+        <p:nvSpPr>
+          <p:cNvPr id="13" name="TextBox 12"/>
+          <p:cNvSpPr txBox="1"/>
+          <p:nvPr/>
+        </p:nvSpPr>
+        <p:spPr>
+          <a:xfrm>
+            <a:off x="6461607" y="2468880"/>
+            <a:ext cx="4952847" cy="1143000"/>
+          </a:xfrm>
+          <a:prstGeom prst="rect">
+            <a:avLst/>
+          </a:prstGeom>
+          <a:noFill/>
+        </p:spPr>
+        <p:txBody>
+          <a:bodyPr wrap="square" anchor="t" lIns="0" rIns="0" tIns="0" bIns="0"/>
+          <a:lstStyle/>
+          <a:p>
+            <a:pPr algn="l"/>
+            <a:r>
+              <a:rPr sz="2000" b="0" i="0">
+                <a:solidFill>
+                  <a:srgbClr val="202122"/>
+                </a:solidFill>
+                <a:latin typeface="Calibri"/>
+              </a:rPr>
+              <a:t>What runs on the device, what runs on the server.</a:t>
+            </a:r>
+          </a:p>
+        </p:txBody>
+      </p:sp>
+      <p:sp>
+        <p:nvSpPr>
+          <p:cNvPr id="14" name="Rounded Rectangle 13"/>
+          <p:cNvSpPr/>
+          <p:nvPr/>
+        </p:nvSpPr>
+        <p:spPr>
+          <a:xfrm>
+            <a:off x="548640" y="4023360"/>
+            <a:ext cx="5410047" cy="2148840"/>
+          </a:xfrm>
+          <a:prstGeom prst="roundRect">
+            <a:avLst>
+              <a:gd name="adj" fmla="val 6000"/>
+            </a:avLst>
+          </a:prstGeom>
+          <a:solidFill>
+            <a:srgbClr val="EAF3FF"/>
+          </a:solidFill>
+          <a:ln>
+            <a:noFill/>
+          </a:ln>
+          <a:effectLst/>
+        </p:spPr>
+        <p:style>
+          <a:lnRef idx="1">
+            <a:schemeClr val="accent1"/>
+          </a:lnRef>
+          <a:fillRef idx="3">
+            <a:schemeClr val="accent1"/>
+          </a:fillRef>
+          <a:effectRef idx="2">
+            <a:schemeClr val="accent1"/>
+          </a:effectRef>
+          <a:fontRef idx="minor">
+            <a:schemeClr val="lt1"/>
+          </a:fontRef>
+        </p:style>
+        <p:txBody>
+          <a:bodyPr rtlCol="0" anchor="ctr"/>
+          <a:lstStyle/>
+          <a:p/>
+        </p:txBody>
+      </p:sp>
+      <p:sp>
+        <p:nvSpPr>
+          <p:cNvPr id="15" name="Oval 14"/>
+          <p:cNvSpPr/>
+          <p:nvPr/>
+        </p:nvSpPr>
+        <p:spPr>
+          <a:xfrm>
+            <a:off x="777240" y="4251960"/>
+            <a:ext cx="457200" cy="457200"/>
+          </a:xfrm>
+          <a:prstGeom prst="ellipse">
+            <a:avLst/>
+          </a:prstGeom>
+          <a:solidFill>
+            <a:srgbClr val="33C17A"/>
+          </a:solidFill>
+          <a:ln>
+            <a:noFill/>
+          </a:ln>
+          <a:effectLst/>
+        </p:spPr>
+        <p:style>
+          <a:lnRef idx="1">
+            <a:schemeClr val="accent1"/>
+          </a:lnRef>
+          <a:fillRef idx="3">
+            <a:schemeClr val="accent1"/>
+          </a:fillRef>
+          <a:effectRef idx="2">
+            <a:schemeClr val="accent1"/>
+          </a:effectRef>
+          <a:fontRef idx="minor">
+            <a:schemeClr val="lt1"/>
+          </a:fontRef>
+        </p:style>
+        <p:txBody>
+          <a:bodyPr rtlCol="0" anchor="ctr" lIns="0" rIns="0" tIns="0" bIns="0"/>
+          <a:lstStyle/>
+          <a:p>
+            <a:pPr algn="ctr"/>
+            <a:r>
+              <a:rPr sz="1500" b="1">
+                <a:solidFill>
+                  <a:srgbClr val="202122"/>
+                </a:solidFill>
+                <a:latin typeface="Calibri"/>
+              </a:rPr>
+              <a:t>3</a:t>
+            </a:r>
+          </a:p>
+        </p:txBody>
+      </p:sp>
+      <p:sp>
+        <p:nvSpPr>
+          <p:cNvPr id="16" name="TextBox 15"/>
+          <p:cNvSpPr txBox="1"/>
+          <p:nvPr/>
+        </p:nvSpPr>
+        <p:spPr>
+          <a:xfrm>
+            <a:off x="1371600" y="4224528"/>
+            <a:ext cx="4404207" cy="512064"/>
+          </a:xfrm>
+          <a:prstGeom prst="rect">
+            <a:avLst/>
+          </a:prstGeom>
+          <a:noFill/>
+        </p:spPr>
+        <p:txBody>
+          <a:bodyPr wrap="square" anchor="ctr" lIns="0" rIns="0" tIns="0" bIns="0"/>
+          <a:lstStyle/>
+          <a:p>
+            <a:pPr algn="l"/>
+            <a:r>
+              <a:rPr sz="1900" b="1" i="0">
+                <a:solidFill>
+                  <a:srgbClr val="03306E"/>
+                </a:solidFill>
+                <a:latin typeface="Calibri"/>
+              </a:rPr>
+              <a:t>Connections</a:t>
+            </a:r>
+          </a:p>
+        </p:txBody>
+      </p:sp>
+      <p:sp>
+        <p:nvSpPr>
+          <p:cNvPr id="17" name="TextBox 16"/>
+          <p:cNvSpPr txBox="1"/>
+          <p:nvPr/>
+        </p:nvSpPr>
+        <p:spPr>
+          <a:xfrm>
+            <a:off x="777240" y="4892040"/>
+            <a:ext cx="4952847" cy="1143000"/>
+          </a:xfrm>
+          <a:prstGeom prst="rect">
+            <a:avLst/>
+          </a:prstGeom>
+          <a:noFill/>
+        </p:spPr>
+        <p:txBody>
+          <a:bodyPr wrap="square" anchor="t" lIns="0" rIns="0" tIns="0" bIns="0"/>
+          <a:lstStyle/>
+          <a:p>
+            <a:pPr algn="l"/>
+            <a:r>
+              <a:rPr sz="2000" b="0" i="0">
+                <a:solidFill>
+                  <a:srgbClr val="202122"/>
+                </a:solidFill>
+                <a:latin typeface="Calibri"/>
+              </a:rPr>
+              <a:t>How data moves, e.g. remote system calls; system boundaries.</a:t>
+            </a:r>
+          </a:p>
+        </p:txBody>
+      </p:sp>
+      <p:sp>
+        <p:nvSpPr>
+          <p:cNvPr id="18" name="Rounded Rectangle 17"/>
+          <p:cNvSpPr/>
+          <p:nvPr/>
+        </p:nvSpPr>
+        <p:spPr>
+          <a:xfrm>
+            <a:off x="6233007" y="4023360"/>
+            <a:ext cx="5410047" cy="2148840"/>
+          </a:xfrm>
+          <a:prstGeom prst="roundRect">
+            <a:avLst>
+              <a:gd name="adj" fmla="val 6000"/>
+            </a:avLst>
+          </a:prstGeom>
+          <a:solidFill>
+            <a:srgbClr val="EAF3FF"/>
+          </a:solidFill>
+          <a:ln>
+            <a:noFill/>
+          </a:ln>
+          <a:effectLst/>
+        </p:spPr>
+        <p:style>
+          <a:lnRef idx="1">
+            <a:schemeClr val="accent1"/>
+          </a:lnRef>
+          <a:fillRef idx="3">
+            <a:schemeClr val="accent1"/>
+          </a:fillRef>
+          <a:effectRef idx="2">
+            <a:schemeClr val="accent1"/>
+          </a:effectRef>
+          <a:fontRef idx="minor">
+            <a:schemeClr val="lt1"/>
+          </a:fontRef>
+        </p:style>
+        <p:txBody>
+          <a:bodyPr rtlCol="0" anchor="ctr"/>
+          <a:lstStyle/>
+          <a:p/>
+        </p:txBody>
+      </p:sp>
+      <p:sp>
+        <p:nvSpPr>
+          <p:cNvPr id="19" name="Oval 18"/>
+          <p:cNvSpPr/>
+          <p:nvPr/>
+        </p:nvSpPr>
+        <p:spPr>
+          <a:xfrm>
+            <a:off x="6461607" y="4251960"/>
+            <a:ext cx="457200" cy="457200"/>
+          </a:xfrm>
+          <a:prstGeom prst="ellipse">
+            <a:avLst/>
+          </a:prstGeom>
+          <a:solidFill>
+            <a:srgbClr val="33C17A"/>
+          </a:solidFill>
+          <a:ln>
+            <a:noFill/>
+          </a:ln>
+          <a:effectLst/>
+        </p:spPr>
+        <p:style>
+          <a:lnRef idx="1">
+            <a:schemeClr val="accent1"/>
+          </a:lnRef>
+          <a:fillRef idx="3">
+            <a:schemeClr val="accent1"/>
+          </a:fillRef>
+          <a:effectRef idx="2">
+            <a:schemeClr val="accent1"/>
+          </a:effectRef>
+          <a:fontRef idx="minor">
+            <a:schemeClr val="lt1"/>
+          </a:fontRef>
+        </p:style>
+        <p:txBody>
+          <a:bodyPr rtlCol="0" anchor="ctr" lIns="0" rIns="0" tIns="0" bIns="0"/>
+          <a:lstStyle/>
+          <a:p>
+            <a:pPr algn="ctr"/>
+            <a:r>
+              <a:rPr sz="1500" b="1">
+                <a:solidFill>
+                  <a:srgbClr val="202122"/>
+                </a:solidFill>
+                <a:latin typeface="Calibri"/>
+              </a:rPr>
+              <a:t>4</a:t>
+            </a:r>
+          </a:p>
+        </p:txBody>
+      </p:sp>
+      <p:sp>
+        <p:nvSpPr>
+          <p:cNvPr id="20" name="TextBox 19"/>
+          <p:cNvSpPr txBox="1"/>
+          <p:nvPr/>
+        </p:nvSpPr>
+        <p:spPr>
+          <a:xfrm>
+            <a:off x="7055967" y="4224528"/>
+            <a:ext cx="4404207" cy="512064"/>
+          </a:xfrm>
+          <a:prstGeom prst="rect">
+            <a:avLst/>
+          </a:prstGeom>
+          <a:noFill/>
+        </p:spPr>
+        <p:txBody>
+          <a:bodyPr wrap="square" anchor="ctr" lIns="0" rIns="0" tIns="0" bIns="0"/>
+          <a:lstStyle/>
+          <a:p>
+            <a:pPr algn="l"/>
+            <a:r>
+              <a:rPr sz="1900" b="1" i="0">
+                <a:solidFill>
+                  <a:srgbClr val="03306E"/>
+                </a:solidFill>
+                <a:latin typeface="Calibri"/>
+              </a:rPr>
+              <a:t>External systems</a:t>
+            </a:r>
+          </a:p>
+        </p:txBody>
+      </p:sp>
+      <p:sp>
+        <p:nvSpPr>
+          <p:cNvPr id="21" name="TextBox 20"/>
+          <p:cNvSpPr txBox="1"/>
+          <p:nvPr/>
+        </p:nvSpPr>
+        <p:spPr>
+          <a:xfrm>
+            <a:off x="6461607" y="4892040"/>
+            <a:ext cx="4952847" cy="1143000"/>
+          </a:xfrm>
+          <a:prstGeom prst="rect">
+            <a:avLst/>
+          </a:prstGeom>
+          <a:noFill/>
+        </p:spPr>
+        <p:txBody>
+          <a:bodyPr wrap="square" anchor="t" lIns="0" rIns="0" tIns="0" bIns="0"/>
+          <a:lstStyle/>
+          <a:p>
+            <a:pPr algn="l"/>
+            <a:r>
+              <a:rPr sz="2000" b="0" i="0">
+                <a:solidFill>
+                  <a:srgbClr val="202122"/>
+                </a:solidFill>
+                <a:latin typeface="Calibri"/>
+              </a:rPr>
+              <a:t>Third-party feeds such as sports data.</a:t>
+            </a:r>
+          </a:p>
+        </p:txBody>
+      </p:sp>
+    </p:spTree>
+  </p:cSld>
+  <p:clrMapOvr>
+    <a:masterClrMapping/>
+  </p:clrMapOvr>
+</p:sld>
+</file>
+
+<file path=ppt/slides/slide12.xml><?xml version="1.0" encoding="utf-8"?>
+<p:sld xmlns:a="http://schemas.openxmlformats.org/drawingml/2006/main" xmlns:p="http://schemas.openxmlformats.org/presentationml/2006/main" xmlns:r="http://schemas.openxmlformats.org/officeDocument/2006/relationships">
+  <p:cSld>
+    <p:bg>
+      <p:bgPr>
+        <a:solidFill>
+          <a:srgbClr val="FFFFFF"/>
+        </a:solidFill>
+        <a:effectLst/>
+      </p:bgPr>
+    </p:bg>
+    <p:spTree>
+      <p:nvGrpSpPr>
+        <p:cNvPr id="1" name=""/>
+        <p:cNvGrpSpPr/>
+        <p:nvPr/>
+      </p:nvGrpSpPr>
+      <p:grpSpPr/>
+      <p:sp>
+        <p:nvSpPr>
+          <p:cNvPr id="2" name="TextBox 1"/>
+          <p:cNvSpPr txBox="1"/>
+          <p:nvPr/>
+        </p:nvSpPr>
+        <p:spPr>
+          <a:xfrm>
+            <a:off x="548640" y="320040"/>
+            <a:ext cx="11094415" cy="274320"/>
+          </a:xfrm>
+          <a:prstGeom prst="rect">
+            <a:avLst/>
+          </a:prstGeom>
+          <a:noFill/>
+        </p:spPr>
+        <p:txBody>
+          <a:bodyPr wrap="square" anchor="t" lIns="0" rIns="0" tIns="0" bIns="0"/>
+          <a:lstStyle/>
+          <a:p>
+            <a:pPr algn="l"/>
+            <a:r>
+              <a:rPr sz="1100" b="1" i="0">
+                <a:solidFill>
+                  <a:srgbClr val="54595D"/>
+                </a:solidFill>
+                <a:latin typeface="Calibri"/>
+              </a:rPr>
+              <a:t>OCCUPATIONAL SPECIALISM  ·  Specialism Content Area 4</a:t>
+            </a:r>
+          </a:p>
+        </p:txBody>
+      </p:sp>
+      <p:sp>
+        <p:nvSpPr>
+          <p:cNvPr id="3" name="TextBox 2"/>
+          <p:cNvSpPr txBox="1"/>
+          <p:nvPr/>
+        </p:nvSpPr>
+        <p:spPr>
+          <a:xfrm>
+            <a:off x="548640" y="566928"/>
+            <a:ext cx="11094415" cy="822960"/>
+          </a:xfrm>
+          <a:prstGeom prst="rect">
+            <a:avLst/>
+          </a:prstGeom>
+          <a:noFill/>
+        </p:spPr>
+        <p:txBody>
+          <a:bodyPr wrap="square" anchor="ctr" lIns="0" rIns="0" tIns="0" bIns="0"/>
+          <a:lstStyle/>
+          <a:p>
+            <a:pPr algn="l"/>
+            <a:r>
+              <a:rPr sz="3200" b="1" i="0">
+                <a:solidFill>
+                  <a:srgbClr val="03306E"/>
+                </a:solidFill>
+                <a:latin typeface="Cambria"/>
+              </a:rPr>
+              <a:t>Quick check: Platforms and integration</a:t>
+            </a:r>
+          </a:p>
+        </p:txBody>
+      </p:sp>
+      <p:sp>
+        <p:nvSpPr>
+          <p:cNvPr id="4" name="TextBox 3"/>
+          <p:cNvSpPr txBox="1"/>
+          <p:nvPr/>
+        </p:nvSpPr>
+        <p:spPr>
+          <a:xfrm>
+            <a:off x="548640" y="6446520"/>
+            <a:ext cx="8229600" cy="274320"/>
+          </a:xfrm>
+          <a:prstGeom prst="rect">
+            <a:avLst/>
+          </a:prstGeom>
+          <a:noFill/>
+        </p:spPr>
+        <p:txBody>
+          <a:bodyPr wrap="square" anchor="t" lIns="0" rIns="0" tIns="0" bIns="0"/>
+          <a:lstStyle/>
+          <a:p>
+            <a:pPr algn="l"/>
+            <a:r>
+              <a:rPr sz="1000" b="0" i="0">
+                <a:solidFill>
+                  <a:srgbClr val="54595D"/>
+                </a:solidFill>
+                <a:latin typeface="Calibri"/>
+              </a:rPr>
+              <a:t>Digital Software Development T Level  ·  Designing Data, Assets and Integration</a:t>
+            </a:r>
+          </a:p>
+        </p:txBody>
+      </p:sp>
+      <p:sp>
+        <p:nvSpPr>
+          <p:cNvPr id="5" name="TextBox 4"/>
+          <p:cNvSpPr txBox="1"/>
+          <p:nvPr/>
+        </p:nvSpPr>
+        <p:spPr>
+          <a:xfrm>
+            <a:off x="10728655" y="6446520"/>
+            <a:ext cx="914400" cy="274320"/>
+          </a:xfrm>
+          <a:prstGeom prst="rect">
+            <a:avLst/>
+          </a:prstGeom>
+          <a:noFill/>
+        </p:spPr>
+        <p:txBody>
+          <a:bodyPr wrap="square" anchor="t" lIns="0" rIns="0" tIns="0" bIns="0"/>
+          <a:lstStyle/>
+          <a:p>
+            <a:pPr algn="r"/>
+            <a:r>
+              <a:rPr sz="1000" b="0" i="0">
+                <a:solidFill>
+                  <a:srgbClr val="54595D"/>
+                </a:solidFill>
+                <a:latin typeface="Calibri"/>
+              </a:rPr>
+              <a:t>12</a:t>
+            </a:r>
+          </a:p>
+        </p:txBody>
+      </p:sp>
+      <p:sp>
+        <p:nvSpPr>
+          <p:cNvPr id="6" name="Oval 5"/>
+          <p:cNvSpPr/>
+          <p:nvPr/>
+        </p:nvSpPr>
+        <p:spPr>
+          <a:xfrm>
+            <a:off x="548640" y="1691640"/>
+            <a:ext cx="502920" cy="502920"/>
+          </a:xfrm>
+          <a:prstGeom prst="ellipse">
+            <a:avLst/>
+          </a:prstGeom>
+          <a:solidFill>
+            <a:srgbClr val="33C17A"/>
+          </a:solidFill>
+          <a:ln>
+            <a:noFill/>
+          </a:ln>
+          <a:effectLst/>
+        </p:spPr>
+        <p:style>
+          <a:lnRef idx="1">
+            <a:schemeClr val="accent1"/>
+          </a:lnRef>
+          <a:fillRef idx="3">
+            <a:schemeClr val="accent1"/>
+          </a:fillRef>
+          <a:effectRef idx="2">
+            <a:schemeClr val="accent1"/>
+          </a:effectRef>
+          <a:fontRef idx="minor">
+            <a:schemeClr val="lt1"/>
+          </a:fontRef>
+        </p:style>
+        <p:txBody>
+          <a:bodyPr rtlCol="0" anchor="ctr" lIns="0" rIns="0" tIns="0" bIns="0"/>
+          <a:lstStyle/>
+          <a:p>
+            <a:pPr algn="ctr"/>
+            <a:r>
+              <a:rPr sz="1600" b="1">
+                <a:solidFill>
+                  <a:srgbClr val="202122"/>
+                </a:solidFill>
+                <a:latin typeface="Calibri"/>
+              </a:rPr>
+              <a:t>1</a:t>
+            </a:r>
+          </a:p>
+        </p:txBody>
+      </p:sp>
+      <p:sp>
+        <p:nvSpPr>
+          <p:cNvPr id="7" name="TextBox 6"/>
+          <p:cNvSpPr txBox="1"/>
+          <p:nvPr/>
+        </p:nvSpPr>
+        <p:spPr>
+          <a:xfrm>
+            <a:off x="1371600" y="1645920"/>
+            <a:ext cx="10271455" cy="1188720"/>
+          </a:xfrm>
+          <a:prstGeom prst="rect">
+            <a:avLst/>
+          </a:prstGeom>
+          <a:noFill/>
+        </p:spPr>
+        <p:txBody>
+          <a:bodyPr wrap="square" anchor="t" lIns="0" rIns="0" tIns="0" bIns="0"/>
+          <a:lstStyle/>
+          <a:p>
+            <a:pPr algn="l"/>
+            <a:r>
+              <a:rPr sz="2400" b="0" i="0">
+                <a:solidFill>
+                  <a:srgbClr val="202122"/>
+                </a:solidFill>
+                <a:latin typeface="Calibri"/>
+              </a:rPr>
+              <a:t>What is processed locally in a multiplayer game?</a:t>
+            </a:r>
+          </a:p>
+        </p:txBody>
+      </p:sp>
+      <p:sp>
+        <p:nvSpPr>
+          <p:cNvPr id="8" name="Oval 7"/>
+          <p:cNvSpPr/>
+          <p:nvPr/>
+        </p:nvSpPr>
+        <p:spPr>
+          <a:xfrm>
+            <a:off x="548640" y="3108960"/>
+            <a:ext cx="502920" cy="502920"/>
+          </a:xfrm>
+          <a:prstGeom prst="ellipse">
+            <a:avLst/>
+          </a:prstGeom>
+          <a:solidFill>
+            <a:srgbClr val="33C17A"/>
+          </a:solidFill>
+          <a:ln>
+            <a:noFill/>
+          </a:ln>
+          <a:effectLst/>
+        </p:spPr>
+        <p:style>
+          <a:lnRef idx="1">
+            <a:schemeClr val="accent1"/>
+          </a:lnRef>
+          <a:fillRef idx="3">
+            <a:schemeClr val="accent1"/>
+          </a:fillRef>
+          <a:effectRef idx="2">
+            <a:schemeClr val="accent1"/>
+          </a:effectRef>
+          <a:fontRef idx="minor">
+            <a:schemeClr val="lt1"/>
+          </a:fontRef>
+        </p:style>
+        <p:txBody>
+          <a:bodyPr rtlCol="0" anchor="ctr" lIns="0" rIns="0" tIns="0" bIns="0"/>
+          <a:lstStyle/>
+          <a:p>
+            <a:pPr algn="ctr"/>
+            <a:r>
+              <a:rPr sz="1600" b="1">
+                <a:solidFill>
+                  <a:srgbClr val="202122"/>
+                </a:solidFill>
+                <a:latin typeface="Calibri"/>
+              </a:rPr>
+              <a:t>2</a:t>
+            </a:r>
+          </a:p>
+        </p:txBody>
+      </p:sp>
+      <p:sp>
+        <p:nvSpPr>
+          <p:cNvPr id="9" name="TextBox 8"/>
+          <p:cNvSpPr txBox="1"/>
+          <p:nvPr/>
+        </p:nvSpPr>
+        <p:spPr>
+          <a:xfrm>
+            <a:off x="1371600" y="3063240"/>
+            <a:ext cx="10271455" cy="1188720"/>
+          </a:xfrm>
+          <a:prstGeom prst="rect">
+            <a:avLst/>
+          </a:prstGeom>
+          <a:noFill/>
+        </p:spPr>
+        <p:txBody>
+          <a:bodyPr wrap="square" anchor="t" lIns="0" rIns="0" tIns="0" bIns="0"/>
+          <a:lstStyle/>
+          <a:p>
+            <a:pPr algn="l"/>
+            <a:r>
+              <a:rPr sz="2400" b="0" i="0">
+                <a:solidFill>
+                  <a:srgbClr val="202122"/>
+                </a:solidFill>
+                <a:latin typeface="Calibri"/>
+              </a:rPr>
+              <a:t>What is a system boundary?</a:t>
+            </a:r>
+          </a:p>
+        </p:txBody>
+      </p:sp>
+      <p:sp>
+        <p:nvSpPr>
+          <p:cNvPr id="10" name="Oval 9"/>
+          <p:cNvSpPr/>
+          <p:nvPr/>
+        </p:nvSpPr>
+        <p:spPr>
+          <a:xfrm>
+            <a:off x="548640" y="4526280"/>
+            <a:ext cx="502920" cy="502920"/>
+          </a:xfrm>
+          <a:prstGeom prst="ellipse">
+            <a:avLst/>
+          </a:prstGeom>
+          <a:solidFill>
+            <a:srgbClr val="33C17A"/>
+          </a:solidFill>
+          <a:ln>
+            <a:noFill/>
+          </a:ln>
+          <a:effectLst/>
+        </p:spPr>
+        <p:style>
+          <a:lnRef idx="1">
+            <a:schemeClr val="accent1"/>
+          </a:lnRef>
+          <a:fillRef idx="3">
+            <a:schemeClr val="accent1"/>
+          </a:fillRef>
+          <a:effectRef idx="2">
+            <a:schemeClr val="accent1"/>
+          </a:effectRef>
+          <a:fontRef idx="minor">
+            <a:schemeClr val="lt1"/>
+          </a:fontRef>
+        </p:style>
+        <p:txBody>
+          <a:bodyPr rtlCol="0" anchor="ctr" lIns="0" rIns="0" tIns="0" bIns="0"/>
+          <a:lstStyle/>
+          <a:p>
+            <a:pPr algn="ctr"/>
+            <a:r>
+              <a:rPr sz="1600" b="1">
+                <a:solidFill>
+                  <a:srgbClr val="202122"/>
+                </a:solidFill>
+                <a:latin typeface="Calibri"/>
+              </a:rPr>
+              <a:t>3</a:t>
+            </a:r>
+          </a:p>
+        </p:txBody>
+      </p:sp>
+      <p:sp>
+        <p:nvSpPr>
+          <p:cNvPr id="11" name="TextBox 10"/>
+          <p:cNvSpPr txBox="1"/>
+          <p:nvPr/>
+        </p:nvSpPr>
+        <p:spPr>
+          <a:xfrm>
+            <a:off x="1371600" y="4480560"/>
+            <a:ext cx="10271455" cy="1188720"/>
+          </a:xfrm>
+          <a:prstGeom prst="rect">
+            <a:avLst/>
+          </a:prstGeom>
+          <a:noFill/>
+        </p:spPr>
+        <p:txBody>
+          <a:bodyPr wrap="square" anchor="t" lIns="0" rIns="0" tIns="0" bIns="0"/>
+          <a:lstStyle/>
+          <a:p>
+            <a:pPr algn="l"/>
+            <a:r>
+              <a:rPr sz="2400" b="0" i="0">
+                <a:solidFill>
+                  <a:srgbClr val="202122"/>
+                </a:solidFill>
+                <a:latin typeface="Calibri"/>
+              </a:rPr>
+              <a:t>Give an example of an external system to integrate with.</a:t>
+            </a:r>
+          </a:p>
+        </p:txBody>
+      </p:sp>
+      <p:sp>
+        <p:nvSpPr>
+          <p:cNvPr id="12" name="TextBox 11"/>
+          <p:cNvSpPr txBox="1"/>
+          <p:nvPr/>
+        </p:nvSpPr>
+        <p:spPr>
+          <a:xfrm>
+            <a:off x="548640" y="5852160"/>
+            <a:ext cx="11094415" cy="365760"/>
+          </a:xfrm>
+          <a:prstGeom prst="rect">
+            <a:avLst/>
+          </a:prstGeom>
+          <a:noFill/>
+        </p:spPr>
+        <p:txBody>
+          <a:bodyPr wrap="square" anchor="t" lIns="0" rIns="0" tIns="0" bIns="0"/>
+          <a:lstStyle/>
+          <a:p>
+            <a:pPr algn="l"/>
+            <a:r>
+              <a:rPr sz="1300" b="0" i="1">
+                <a:solidFill>
+                  <a:srgbClr val="54595D"/>
+                </a:solidFill>
+                <a:latin typeface="Calibri"/>
+              </a:rPr>
+              <a:t>Answer on mini whiteboards or in your book. Answers are in the speaker notes.</a:t>
+            </a:r>
+          </a:p>
+        </p:txBody>
+      </p:sp>
+    </p:spTree>
+  </p:cSld>
+  <p:clrMapOvr>
+    <a:masterClrMapping/>
+  </p:clrMapOvr>
+</p:sld>
+</file>
+
+<file path=ppt/slides/slide13.xml><?xml version="1.0" encoding="utf-8"?>
+<p:sld xmlns:a="http://schemas.openxmlformats.org/drawingml/2006/main" xmlns:p="http://schemas.openxmlformats.org/presentationml/2006/main" xmlns:r="http://schemas.openxmlformats.org/officeDocument/2006/relationships">
+  <p:cSld>
+    <p:bg>
+      <p:bgPr>
+        <a:solidFill>
+          <a:srgbClr val="FFFFFF"/>
+        </a:solidFill>
+        <a:effectLst/>
+      </p:bgPr>
+    </p:bg>
+    <p:spTree>
+      <p:nvGrpSpPr>
+        <p:cNvPr id="1" name=""/>
+        <p:cNvGrpSpPr/>
+        <p:nvPr/>
+      </p:nvGrpSpPr>
+      <p:grpSpPr/>
+      <p:sp>
+        <p:nvSpPr>
+          <p:cNvPr id="2" name="TextBox 1"/>
+          <p:cNvSpPr txBox="1"/>
+          <p:nvPr/>
+        </p:nvSpPr>
+        <p:spPr>
+          <a:xfrm>
+            <a:off x="548640" y="320040"/>
+            <a:ext cx="11094415" cy="274320"/>
+          </a:xfrm>
+          <a:prstGeom prst="rect">
+            <a:avLst/>
+          </a:prstGeom>
+          <a:noFill/>
+        </p:spPr>
+        <p:txBody>
+          <a:bodyPr wrap="square" anchor="t" lIns="0" rIns="0" tIns="0" bIns="0"/>
+          <a:lstStyle/>
+          <a:p>
+            <a:pPr algn="l"/>
+            <a:r>
+              <a:rPr sz="1100" b="1" i="0">
+                <a:solidFill>
+                  <a:srgbClr val="54595D"/>
+                </a:solidFill>
+                <a:latin typeface="Calibri"/>
+              </a:rPr>
+              <a:t>OCCUPATIONAL SPECIALISM  ·  Specialism Content Area 4</a:t>
+            </a:r>
+          </a:p>
+        </p:txBody>
+      </p:sp>
+      <p:sp>
+        <p:nvSpPr>
+          <p:cNvPr id="3" name="TextBox 2"/>
+          <p:cNvSpPr txBox="1"/>
+          <p:nvPr/>
+        </p:nvSpPr>
+        <p:spPr>
+          <a:xfrm>
+            <a:off x="548640" y="566928"/>
+            <a:ext cx="11094415" cy="822960"/>
+          </a:xfrm>
+          <a:prstGeom prst="rect">
+            <a:avLst/>
+          </a:prstGeom>
+          <a:noFill/>
+        </p:spPr>
+        <p:txBody>
+          <a:bodyPr wrap="square" anchor="ctr" lIns="0" rIns="0" tIns="0" bIns="0"/>
+          <a:lstStyle/>
+          <a:p>
+            <a:pPr algn="l"/>
+            <a:r>
+              <a:rPr sz="3200" b="1" i="0">
+                <a:solidFill>
+                  <a:srgbClr val="03306E"/>
+                </a:solidFill>
+                <a:latin typeface="Cambria"/>
+              </a:rPr>
+              <a:t>Check your understanding</a:t>
+            </a:r>
+          </a:p>
+        </p:txBody>
+      </p:sp>
+      <p:sp>
+        <p:nvSpPr>
+          <p:cNvPr id="4" name="TextBox 3"/>
+          <p:cNvSpPr txBox="1"/>
+          <p:nvPr/>
+        </p:nvSpPr>
+        <p:spPr>
+          <a:xfrm>
+            <a:off x="548640" y="6446520"/>
+            <a:ext cx="8229600" cy="274320"/>
+          </a:xfrm>
+          <a:prstGeom prst="rect">
+            <a:avLst/>
+          </a:prstGeom>
+          <a:noFill/>
+        </p:spPr>
+        <p:txBody>
+          <a:bodyPr wrap="square" anchor="t" lIns="0" rIns="0" tIns="0" bIns="0"/>
+          <a:lstStyle/>
+          <a:p>
+            <a:pPr algn="l"/>
+            <a:r>
+              <a:rPr sz="1000" b="0" i="0">
+                <a:solidFill>
+                  <a:srgbClr val="54595D"/>
+                </a:solidFill>
+                <a:latin typeface="Calibri"/>
+              </a:rPr>
+              <a:t>Digital Software Development T Level  ·  Designing Data, Assets and Integration</a:t>
+            </a:r>
+          </a:p>
+        </p:txBody>
+      </p:sp>
+      <p:sp>
+        <p:nvSpPr>
+          <p:cNvPr id="5" name="TextBox 4"/>
+          <p:cNvSpPr txBox="1"/>
+          <p:nvPr/>
+        </p:nvSpPr>
+        <p:spPr>
+          <a:xfrm>
+            <a:off x="10728655" y="6446520"/>
+            <a:ext cx="914400" cy="274320"/>
+          </a:xfrm>
+          <a:prstGeom prst="rect">
+            <a:avLst/>
+          </a:prstGeom>
+          <a:noFill/>
+        </p:spPr>
+        <p:txBody>
+          <a:bodyPr wrap="square" anchor="t" lIns="0" rIns="0" tIns="0" bIns="0"/>
+          <a:lstStyle/>
+          <a:p>
+            <a:pPr algn="r"/>
+            <a:r>
+              <a:rPr sz="1000" b="0" i="0">
+                <a:solidFill>
+                  <a:srgbClr val="54595D"/>
+                </a:solidFill>
+                <a:latin typeface="Calibri"/>
+              </a:rPr>
+              <a:t>13</a:t>
+            </a:r>
+          </a:p>
+        </p:txBody>
+      </p:sp>
+      <p:sp>
+        <p:nvSpPr>
+          <p:cNvPr id="6" name="Oval 5"/>
+          <p:cNvSpPr/>
+          <p:nvPr/>
+        </p:nvSpPr>
+        <p:spPr>
+          <a:xfrm>
+            <a:off x="548640" y="1618488"/>
+            <a:ext cx="411480" cy="411480"/>
+          </a:xfrm>
+          <a:prstGeom prst="ellipse">
+            <a:avLst/>
+          </a:prstGeom>
+          <a:solidFill>
+            <a:srgbClr val="33C17A"/>
+          </a:solidFill>
+          <a:ln>
+            <a:noFill/>
+          </a:ln>
+          <a:effectLst/>
+        </p:spPr>
+        <p:style>
+          <a:lnRef idx="1">
+            <a:schemeClr val="accent1"/>
+          </a:lnRef>
+          <a:fillRef idx="3">
+            <a:schemeClr val="accent1"/>
+          </a:fillRef>
+          <a:effectRef idx="2">
+            <a:schemeClr val="accent1"/>
+          </a:effectRef>
+          <a:fontRef idx="minor">
+            <a:schemeClr val="lt1"/>
+          </a:fontRef>
+        </p:style>
+        <p:txBody>
+          <a:bodyPr rtlCol="0" anchor="ctr" lIns="0" rIns="0" tIns="0" bIns="0"/>
+          <a:lstStyle/>
+          <a:p>
+            <a:pPr algn="ctr"/>
+            <a:r>
+              <a:rPr sz="1400" b="1">
+                <a:solidFill>
+                  <a:srgbClr val="202122"/>
+                </a:solidFill>
+                <a:latin typeface="Calibri"/>
+              </a:rPr>
+              <a:t>1</a:t>
+            </a:r>
+          </a:p>
+        </p:txBody>
+      </p:sp>
+      <p:sp>
+        <p:nvSpPr>
+          <p:cNvPr id="7" name="TextBox 6"/>
+          <p:cNvSpPr txBox="1"/>
+          <p:nvPr/>
+        </p:nvSpPr>
+        <p:spPr>
+          <a:xfrm>
+            <a:off x="1234440" y="1600200"/>
+            <a:ext cx="10408615" cy="1030986"/>
+          </a:xfrm>
+          <a:prstGeom prst="rect">
+            <a:avLst/>
+          </a:prstGeom>
+          <a:noFill/>
+        </p:spPr>
+        <p:txBody>
+          <a:bodyPr wrap="square" anchor="t" lIns="0" rIns="0" tIns="0" bIns="0"/>
+          <a:lstStyle/>
+          <a:p>
+            <a:pPr algn="l"/>
+            <a:r>
+              <a:rPr sz="2200" b="0" i="0">
+                <a:solidFill>
+                  <a:srgbClr val="202122"/>
+                </a:solidFill>
+                <a:latin typeface="Calibri"/>
+              </a:rPr>
+              <a:t>What is a data dictionary?</a:t>
+            </a:r>
+          </a:p>
+        </p:txBody>
+      </p:sp>
+      <p:sp>
+        <p:nvSpPr>
+          <p:cNvPr id="8" name="Oval 7"/>
+          <p:cNvSpPr/>
+          <p:nvPr/>
+        </p:nvSpPr>
+        <p:spPr>
+          <a:xfrm>
+            <a:off x="548640" y="2814066"/>
+            <a:ext cx="411480" cy="411480"/>
+          </a:xfrm>
+          <a:prstGeom prst="ellipse">
+            <a:avLst/>
+          </a:prstGeom>
+          <a:solidFill>
+            <a:srgbClr val="33C17A"/>
+          </a:solidFill>
+          <a:ln>
+            <a:noFill/>
+          </a:ln>
+          <a:effectLst/>
+        </p:spPr>
+        <p:style>
+          <a:lnRef idx="1">
+            <a:schemeClr val="accent1"/>
+          </a:lnRef>
+          <a:fillRef idx="3">
+            <a:schemeClr val="accent1"/>
+          </a:fillRef>
+          <a:effectRef idx="2">
+            <a:schemeClr val="accent1"/>
+          </a:effectRef>
+          <a:fontRef idx="minor">
+            <a:schemeClr val="lt1"/>
+          </a:fontRef>
+        </p:style>
+        <p:txBody>
+          <a:bodyPr rtlCol="0" anchor="ctr" lIns="0" rIns="0" tIns="0" bIns="0"/>
+          <a:lstStyle/>
+          <a:p>
+            <a:pPr algn="ctr"/>
+            <a:r>
+              <a:rPr sz="1400" b="1">
+                <a:solidFill>
+                  <a:srgbClr val="202122"/>
+                </a:solidFill>
+                <a:latin typeface="Calibri"/>
+              </a:rPr>
+              <a:t>2</a:t>
+            </a:r>
+          </a:p>
+        </p:txBody>
+      </p:sp>
+      <p:sp>
+        <p:nvSpPr>
+          <p:cNvPr id="9" name="TextBox 8"/>
+          <p:cNvSpPr txBox="1"/>
+          <p:nvPr/>
+        </p:nvSpPr>
+        <p:spPr>
+          <a:xfrm>
+            <a:off x="1234440" y="2795778"/>
+            <a:ext cx="10408615" cy="1030986"/>
+          </a:xfrm>
+          <a:prstGeom prst="rect">
+            <a:avLst/>
+          </a:prstGeom>
+          <a:noFill/>
+        </p:spPr>
+        <p:txBody>
+          <a:bodyPr wrap="square" anchor="t" lIns="0" rIns="0" tIns="0" bIns="0"/>
+          <a:lstStyle/>
+          <a:p>
+            <a:pPr algn="l"/>
+            <a:r>
+              <a:rPr sz="2200" b="0" i="0">
+                <a:solidFill>
+                  <a:srgbClr val="202122"/>
+                </a:solidFill>
+                <a:latin typeface="Calibri"/>
+              </a:rPr>
+              <a:t>What does normalisation reduce?</a:t>
+            </a:r>
+          </a:p>
+        </p:txBody>
+      </p:sp>
+      <p:sp>
+        <p:nvSpPr>
+          <p:cNvPr id="10" name="Oval 9"/>
+          <p:cNvSpPr/>
+          <p:nvPr/>
+        </p:nvSpPr>
+        <p:spPr>
+          <a:xfrm>
+            <a:off x="548640" y="4009644"/>
+            <a:ext cx="411480" cy="411480"/>
+          </a:xfrm>
+          <a:prstGeom prst="ellipse">
+            <a:avLst/>
+          </a:prstGeom>
+          <a:solidFill>
+            <a:srgbClr val="33C17A"/>
+          </a:solidFill>
+          <a:ln>
+            <a:noFill/>
+          </a:ln>
+          <a:effectLst/>
+        </p:spPr>
+        <p:style>
+          <a:lnRef idx="1">
+            <a:schemeClr val="accent1"/>
+          </a:lnRef>
+          <a:fillRef idx="3">
+            <a:schemeClr val="accent1"/>
+          </a:fillRef>
+          <a:effectRef idx="2">
+            <a:schemeClr val="accent1"/>
+          </a:effectRef>
+          <a:fontRef idx="minor">
+            <a:schemeClr val="lt1"/>
+          </a:fontRef>
+        </p:style>
+        <p:txBody>
+          <a:bodyPr rtlCol="0" anchor="ctr" lIns="0" rIns="0" tIns="0" bIns="0"/>
+          <a:lstStyle/>
+          <a:p>
+            <a:pPr algn="ctr"/>
+            <a:r>
+              <a:rPr sz="1400" b="1">
+                <a:solidFill>
+                  <a:srgbClr val="202122"/>
+                </a:solidFill>
+                <a:latin typeface="Calibri"/>
+              </a:rPr>
+              <a:t>3</a:t>
+            </a:r>
+          </a:p>
+        </p:txBody>
+      </p:sp>
+      <p:sp>
+        <p:nvSpPr>
+          <p:cNvPr id="11" name="TextBox 10"/>
+          <p:cNvSpPr txBox="1"/>
+          <p:nvPr/>
+        </p:nvSpPr>
+        <p:spPr>
+          <a:xfrm>
+            <a:off x="1234440" y="3991356"/>
+            <a:ext cx="10408615" cy="1030986"/>
+          </a:xfrm>
+          <a:prstGeom prst="rect">
+            <a:avLst/>
+          </a:prstGeom>
+          <a:noFill/>
+        </p:spPr>
+        <p:txBody>
+          <a:bodyPr wrap="square" anchor="t" lIns="0" rIns="0" tIns="0" bIns="0"/>
+          <a:lstStyle/>
+          <a:p>
+            <a:pPr algn="l"/>
+            <a:r>
+              <a:rPr sz="2200" b="0" i="0">
+                <a:solidFill>
+                  <a:srgbClr val="202122"/>
+                </a:solidFill>
+                <a:latin typeface="Calibri"/>
+              </a:rPr>
+              <a:t>Give one factor when selecting a video asset.</a:t>
+            </a:r>
+          </a:p>
+        </p:txBody>
+      </p:sp>
+      <p:sp>
+        <p:nvSpPr>
+          <p:cNvPr id="12" name="Oval 11"/>
+          <p:cNvSpPr/>
+          <p:nvPr/>
+        </p:nvSpPr>
+        <p:spPr>
+          <a:xfrm>
+            <a:off x="548640" y="5205221"/>
+            <a:ext cx="411480" cy="411480"/>
+          </a:xfrm>
+          <a:prstGeom prst="ellipse">
+            <a:avLst/>
+          </a:prstGeom>
+          <a:solidFill>
+            <a:srgbClr val="33C17A"/>
+          </a:solidFill>
+          <a:ln>
+            <a:noFill/>
+          </a:ln>
+          <a:effectLst/>
+        </p:spPr>
+        <p:style>
+          <a:lnRef idx="1">
+            <a:schemeClr val="accent1"/>
+          </a:lnRef>
+          <a:fillRef idx="3">
+            <a:schemeClr val="accent1"/>
+          </a:fillRef>
+          <a:effectRef idx="2">
+            <a:schemeClr val="accent1"/>
+          </a:effectRef>
+          <a:fontRef idx="minor">
+            <a:schemeClr val="lt1"/>
+          </a:fontRef>
+        </p:style>
+        <p:txBody>
+          <a:bodyPr rtlCol="0" anchor="ctr" lIns="0" rIns="0" tIns="0" bIns="0"/>
+          <a:lstStyle/>
+          <a:p>
+            <a:pPr algn="ctr"/>
+            <a:r>
+              <a:rPr sz="1400" b="1">
+                <a:solidFill>
+                  <a:srgbClr val="202122"/>
+                </a:solidFill>
+                <a:latin typeface="Calibri"/>
+              </a:rPr>
+              <a:t>4</a:t>
+            </a:r>
+          </a:p>
+        </p:txBody>
+      </p:sp>
+      <p:sp>
+        <p:nvSpPr>
+          <p:cNvPr id="13" name="TextBox 12"/>
+          <p:cNvSpPr txBox="1"/>
+          <p:nvPr/>
+        </p:nvSpPr>
+        <p:spPr>
+          <a:xfrm>
+            <a:off x="1234440" y="5186933"/>
+            <a:ext cx="10408615" cy="1030986"/>
+          </a:xfrm>
+          <a:prstGeom prst="rect">
+            <a:avLst/>
+          </a:prstGeom>
+          <a:noFill/>
+        </p:spPr>
+        <p:txBody>
+          <a:bodyPr wrap="square" anchor="t" lIns="0" rIns="0" tIns="0" bIns="0"/>
+          <a:lstStyle/>
+          <a:p>
+            <a:pPr algn="l"/>
+            <a:r>
+              <a:rPr sz="2200" b="0" i="0">
+                <a:solidFill>
+                  <a:srgbClr val="202122"/>
+                </a:solidFill>
+                <a:latin typeface="Calibri"/>
+              </a:rPr>
+              <a:t>What is a system boundary?</a:t>
+            </a:r>
+          </a:p>
+        </p:txBody>
+      </p:sp>
+    </p:spTree>
+  </p:cSld>
+  <p:clrMapOvr>
+    <a:masterClrMapping/>
+  </p:clrMapOvr>
+</p:sld>
+</file>
+
+<file path=ppt/slides/slide14.xml><?xml version="1.0" encoding="utf-8"?>
+<p:sld xmlns:a="http://schemas.openxmlformats.org/drawingml/2006/main" xmlns:p="http://schemas.openxmlformats.org/presentationml/2006/main" xmlns:r="http://schemas.openxmlformats.org/officeDocument/2006/relationships">
+  <p:cSld>
+    <p:bg>
+      <p:bgPr>
+        <a:solidFill>
+          <a:srgbClr val="FFFFFF"/>
+        </a:solidFill>
+        <a:effectLst/>
+      </p:bgPr>
+    </p:bg>
+    <p:spTree>
+      <p:nvGrpSpPr>
+        <p:cNvPr id="1" name=""/>
+        <p:cNvGrpSpPr/>
+        <p:nvPr/>
+      </p:nvGrpSpPr>
+      <p:grpSpPr/>
+      <p:sp>
+        <p:nvSpPr>
+          <p:cNvPr id="2" name="TextBox 1"/>
+          <p:cNvSpPr txBox="1"/>
+          <p:nvPr/>
+        </p:nvSpPr>
+        <p:spPr>
+          <a:xfrm>
+            <a:off x="548640" y="320040"/>
+            <a:ext cx="11094415" cy="274320"/>
+          </a:xfrm>
+          <a:prstGeom prst="rect">
+            <a:avLst/>
+          </a:prstGeom>
+          <a:noFill/>
+        </p:spPr>
+        <p:txBody>
+          <a:bodyPr wrap="square" anchor="t" lIns="0" rIns="0" tIns="0" bIns="0"/>
+          <a:lstStyle/>
+          <a:p>
+            <a:pPr algn="l"/>
+            <a:r>
+              <a:rPr sz="1100" b="1" i="0">
+                <a:solidFill>
+                  <a:srgbClr val="54595D"/>
+                </a:solidFill>
+                <a:latin typeface="Calibri"/>
+              </a:rPr>
+              <a:t>OCCUPATIONAL SPECIALISM  ·  Specialism Content Area 4</a:t>
+            </a:r>
+          </a:p>
+        </p:txBody>
+      </p:sp>
+      <p:sp>
+        <p:nvSpPr>
+          <p:cNvPr id="3" name="TextBox 2"/>
+          <p:cNvSpPr txBox="1"/>
+          <p:nvPr/>
+        </p:nvSpPr>
+        <p:spPr>
+          <a:xfrm>
+            <a:off x="548640" y="566928"/>
+            <a:ext cx="11094415" cy="822960"/>
+          </a:xfrm>
+          <a:prstGeom prst="rect">
+            <a:avLst/>
+          </a:prstGeom>
+          <a:noFill/>
+        </p:spPr>
+        <p:txBody>
+          <a:bodyPr wrap="square" anchor="ctr" lIns="0" rIns="0" tIns="0" bIns="0"/>
+          <a:lstStyle/>
+          <a:p>
+            <a:pPr algn="l"/>
+            <a:r>
+              <a:rPr sz="3200" b="1" i="0">
+                <a:solidFill>
+                  <a:srgbClr val="03306E"/>
+                </a:solidFill>
+                <a:latin typeface="Cambria"/>
+              </a:rPr>
+              <a:t>Answers</a:t>
+            </a:r>
+          </a:p>
+        </p:txBody>
+      </p:sp>
+      <p:sp>
+        <p:nvSpPr>
+          <p:cNvPr id="4" name="TextBox 3"/>
+          <p:cNvSpPr txBox="1"/>
+          <p:nvPr/>
+        </p:nvSpPr>
+        <p:spPr>
+          <a:xfrm>
+            <a:off x="548640" y="6446520"/>
+            <a:ext cx="8229600" cy="274320"/>
+          </a:xfrm>
+          <a:prstGeom prst="rect">
+            <a:avLst/>
+          </a:prstGeom>
+          <a:noFill/>
+        </p:spPr>
+        <p:txBody>
+          <a:bodyPr wrap="square" anchor="t" lIns="0" rIns="0" tIns="0" bIns="0"/>
+          <a:lstStyle/>
+          <a:p>
+            <a:pPr algn="l"/>
+            <a:r>
+              <a:rPr sz="1000" b="0" i="0">
+                <a:solidFill>
+                  <a:srgbClr val="54595D"/>
+                </a:solidFill>
+                <a:latin typeface="Calibri"/>
+              </a:rPr>
+              <a:t>Digital Software Development T Level  ·  Designing Data, Assets and Integration</a:t>
+            </a:r>
+          </a:p>
+        </p:txBody>
+      </p:sp>
+      <p:sp>
+        <p:nvSpPr>
+          <p:cNvPr id="5" name="TextBox 4"/>
+          <p:cNvSpPr txBox="1"/>
+          <p:nvPr/>
+        </p:nvSpPr>
+        <p:spPr>
+          <a:xfrm>
+            <a:off x="10728655" y="6446520"/>
+            <a:ext cx="914400" cy="274320"/>
+          </a:xfrm>
+          <a:prstGeom prst="rect">
+            <a:avLst/>
+          </a:prstGeom>
+          <a:noFill/>
+        </p:spPr>
+        <p:txBody>
+          <a:bodyPr wrap="square" anchor="t" lIns="0" rIns="0" tIns="0" bIns="0"/>
+          <a:lstStyle/>
+          <a:p>
+            <a:pPr algn="r"/>
+            <a:r>
+              <a:rPr sz="1000" b="0" i="0">
+                <a:solidFill>
+                  <a:srgbClr val="54595D"/>
+                </a:solidFill>
+                <a:latin typeface="Calibri"/>
+              </a:rPr>
+              <a:t>14</a:t>
+            </a:r>
+          </a:p>
+        </p:txBody>
+      </p:sp>
+      <p:sp>
+        <p:nvSpPr>
+          <p:cNvPr id="6" name="Oval 5"/>
+          <p:cNvSpPr/>
+          <p:nvPr/>
+        </p:nvSpPr>
+        <p:spPr>
+          <a:xfrm>
+            <a:off x="548640" y="1618488"/>
+            <a:ext cx="411480" cy="411480"/>
+          </a:xfrm>
+          <a:prstGeom prst="ellipse">
+            <a:avLst/>
+          </a:prstGeom>
+          <a:solidFill>
+            <a:srgbClr val="33C17A"/>
+          </a:solidFill>
+          <a:ln>
+            <a:noFill/>
+          </a:ln>
+          <a:effectLst/>
+        </p:spPr>
+        <p:style>
+          <a:lnRef idx="1">
+            <a:schemeClr val="accent1"/>
+          </a:lnRef>
+          <a:fillRef idx="3">
+            <a:schemeClr val="accent1"/>
+          </a:fillRef>
+          <a:effectRef idx="2">
+            <a:schemeClr val="accent1"/>
+          </a:effectRef>
+          <a:fontRef idx="minor">
+            <a:schemeClr val="lt1"/>
+          </a:fontRef>
+        </p:style>
+        <p:txBody>
+          <a:bodyPr rtlCol="0" anchor="ctr" lIns="0" rIns="0" tIns="0" bIns="0"/>
+          <a:lstStyle/>
+          <a:p>
+            <a:pPr algn="ctr"/>
+            <a:r>
+              <a:rPr sz="1400" b="1">
+                <a:solidFill>
+                  <a:srgbClr val="202122"/>
+                </a:solidFill>
+                <a:latin typeface="Calibri"/>
+              </a:rPr>
+              <a:t>1</a:t>
+            </a:r>
+          </a:p>
+        </p:txBody>
+      </p:sp>
+      <p:sp>
+        <p:nvSpPr>
+          <p:cNvPr id="7" name="TextBox 6"/>
+          <p:cNvSpPr txBox="1"/>
+          <p:nvPr/>
+        </p:nvSpPr>
+        <p:spPr>
+          <a:xfrm>
+            <a:off x="1234440" y="1600200"/>
+            <a:ext cx="10408615" cy="1030986"/>
+          </a:xfrm>
+          <a:prstGeom prst="rect">
+            <a:avLst/>
+          </a:prstGeom>
+          <a:noFill/>
+        </p:spPr>
+        <p:txBody>
+          <a:bodyPr wrap="square" anchor="t" lIns="0" rIns="0" tIns="0" bIns="0"/>
+          <a:lstStyle/>
+          <a:p>
+            <a:pPr algn="l"/>
+            <a:r>
+              <a:rPr sz="1800" b="0" i="0">
+                <a:solidFill>
+                  <a:srgbClr val="54595D"/>
+                </a:solidFill>
+                <a:latin typeface="Calibri"/>
+              </a:rPr>
+              <a:t>What is a data dictionary?</a:t>
+            </a:r>
+          </a:p>
+          <a:p>
+            <a:r>
+              <a:rPr sz="1800" b="1">
+                <a:solidFill>
+                  <a:srgbClr val="03306E"/>
+                </a:solidFill>
+                <a:latin typeface="Calibri"/>
+              </a:rPr>
+              <a:t>A document describing every field, its type and rules.</a:t>
+            </a:r>
+          </a:p>
+        </p:txBody>
+      </p:sp>
+      <p:sp>
+        <p:nvSpPr>
+          <p:cNvPr id="8" name="Oval 7"/>
+          <p:cNvSpPr/>
+          <p:nvPr/>
+        </p:nvSpPr>
+        <p:spPr>
+          <a:xfrm>
+            <a:off x="548640" y="2814066"/>
+            <a:ext cx="411480" cy="411480"/>
+          </a:xfrm>
+          <a:prstGeom prst="ellipse">
+            <a:avLst/>
+          </a:prstGeom>
+          <a:solidFill>
+            <a:srgbClr val="33C17A"/>
+          </a:solidFill>
+          <a:ln>
+            <a:noFill/>
+          </a:ln>
+          <a:effectLst/>
+        </p:spPr>
+        <p:style>
+          <a:lnRef idx="1">
+            <a:schemeClr val="accent1"/>
+          </a:lnRef>
+          <a:fillRef idx="3">
+            <a:schemeClr val="accent1"/>
+          </a:fillRef>
+          <a:effectRef idx="2">
+            <a:schemeClr val="accent1"/>
+          </a:effectRef>
+          <a:fontRef idx="minor">
+            <a:schemeClr val="lt1"/>
+          </a:fontRef>
+        </p:style>
+        <p:txBody>
+          <a:bodyPr rtlCol="0" anchor="ctr" lIns="0" rIns="0" tIns="0" bIns="0"/>
+          <a:lstStyle/>
+          <a:p>
+            <a:pPr algn="ctr"/>
+            <a:r>
+              <a:rPr sz="1400" b="1">
+                <a:solidFill>
+                  <a:srgbClr val="202122"/>
+                </a:solidFill>
+                <a:latin typeface="Calibri"/>
+              </a:rPr>
+              <a:t>2</a:t>
+            </a:r>
+          </a:p>
+        </p:txBody>
+      </p:sp>
+      <p:sp>
+        <p:nvSpPr>
+          <p:cNvPr id="9" name="TextBox 8"/>
+          <p:cNvSpPr txBox="1"/>
+          <p:nvPr/>
+        </p:nvSpPr>
+        <p:spPr>
+          <a:xfrm>
+            <a:off x="1234440" y="2795778"/>
+            <a:ext cx="10408615" cy="1030986"/>
+          </a:xfrm>
+          <a:prstGeom prst="rect">
+            <a:avLst/>
+          </a:prstGeom>
+          <a:noFill/>
+        </p:spPr>
+        <p:txBody>
+          <a:bodyPr wrap="square" anchor="t" lIns="0" rIns="0" tIns="0" bIns="0"/>
+          <a:lstStyle/>
+          <a:p>
+            <a:pPr algn="l"/>
+            <a:r>
+              <a:rPr sz="1800" b="0" i="0">
+                <a:solidFill>
+                  <a:srgbClr val="54595D"/>
+                </a:solidFill>
+                <a:latin typeface="Calibri"/>
+              </a:rPr>
+              <a:t>What does normalisation reduce?</a:t>
+            </a:r>
+          </a:p>
+          <a:p>
+            <a:r>
+              <a:rPr sz="1800" b="1">
+                <a:solidFill>
+                  <a:srgbClr val="03306E"/>
+                </a:solidFill>
+                <a:latin typeface="Calibri"/>
+              </a:rPr>
+              <a:t>Data redundancy (duplication).</a:t>
+            </a:r>
+          </a:p>
+        </p:txBody>
+      </p:sp>
+      <p:sp>
+        <p:nvSpPr>
+          <p:cNvPr id="10" name="Oval 9"/>
+          <p:cNvSpPr/>
+          <p:nvPr/>
+        </p:nvSpPr>
+        <p:spPr>
+          <a:xfrm>
+            <a:off x="548640" y="4009644"/>
+            <a:ext cx="411480" cy="411480"/>
+          </a:xfrm>
+          <a:prstGeom prst="ellipse">
+            <a:avLst/>
+          </a:prstGeom>
+          <a:solidFill>
+            <a:srgbClr val="33C17A"/>
+          </a:solidFill>
+          <a:ln>
+            <a:noFill/>
+          </a:ln>
+          <a:effectLst/>
+        </p:spPr>
+        <p:style>
+          <a:lnRef idx="1">
+            <a:schemeClr val="accent1"/>
+          </a:lnRef>
+          <a:fillRef idx="3">
+            <a:schemeClr val="accent1"/>
+          </a:fillRef>
+          <a:effectRef idx="2">
+            <a:schemeClr val="accent1"/>
+          </a:effectRef>
+          <a:fontRef idx="minor">
+            <a:schemeClr val="lt1"/>
+          </a:fontRef>
+        </p:style>
+        <p:txBody>
+          <a:bodyPr rtlCol="0" anchor="ctr" lIns="0" rIns="0" tIns="0" bIns="0"/>
+          <a:lstStyle/>
+          <a:p>
+            <a:pPr algn="ctr"/>
+            <a:r>
+              <a:rPr sz="1400" b="1">
+                <a:solidFill>
+                  <a:srgbClr val="202122"/>
+                </a:solidFill>
+                <a:latin typeface="Calibri"/>
+              </a:rPr>
+              <a:t>3</a:t>
+            </a:r>
+          </a:p>
+        </p:txBody>
+      </p:sp>
+      <p:sp>
+        <p:nvSpPr>
+          <p:cNvPr id="11" name="TextBox 10"/>
+          <p:cNvSpPr txBox="1"/>
+          <p:nvPr/>
+        </p:nvSpPr>
+        <p:spPr>
+          <a:xfrm>
+            <a:off x="1234440" y="3991356"/>
+            <a:ext cx="10408615" cy="1030986"/>
+          </a:xfrm>
+          <a:prstGeom prst="rect">
+            <a:avLst/>
+          </a:prstGeom>
+          <a:noFill/>
+        </p:spPr>
+        <p:txBody>
+          <a:bodyPr wrap="square" anchor="t" lIns="0" rIns="0" tIns="0" bIns="0"/>
+          <a:lstStyle/>
+          <a:p>
+            <a:pPr algn="l"/>
+            <a:r>
+              <a:rPr sz="1800" b="0" i="0">
+                <a:solidFill>
+                  <a:srgbClr val="54595D"/>
+                </a:solidFill>
+                <a:latin typeface="Calibri"/>
+              </a:rPr>
+              <a:t>Give one factor when selecting a video asset.</a:t>
+            </a:r>
+          </a:p>
+          <a:p>
+            <a:r>
+              <a:rPr sz="1800" b="1">
+                <a:solidFill>
+                  <a:srgbClr val="03306E"/>
+                </a:solidFill>
+                <a:latin typeface="Calibri"/>
+              </a:rPr>
+              <a:t>E.g. file size, compression, bandwidth, quality.</a:t>
+            </a:r>
+          </a:p>
+        </p:txBody>
+      </p:sp>
+      <p:sp>
+        <p:nvSpPr>
+          <p:cNvPr id="12" name="Oval 11"/>
+          <p:cNvSpPr/>
+          <p:nvPr/>
+        </p:nvSpPr>
+        <p:spPr>
+          <a:xfrm>
+            <a:off x="548640" y="5205221"/>
+            <a:ext cx="411480" cy="411480"/>
+          </a:xfrm>
+          <a:prstGeom prst="ellipse">
+            <a:avLst/>
+          </a:prstGeom>
+          <a:solidFill>
+            <a:srgbClr val="33C17A"/>
+          </a:solidFill>
+          <a:ln>
+            <a:noFill/>
+          </a:ln>
+          <a:effectLst/>
+        </p:spPr>
+        <p:style>
+          <a:lnRef idx="1">
+            <a:schemeClr val="accent1"/>
+          </a:lnRef>
+          <a:fillRef idx="3">
+            <a:schemeClr val="accent1"/>
+          </a:fillRef>
+          <a:effectRef idx="2">
+            <a:schemeClr val="accent1"/>
+          </a:effectRef>
+          <a:fontRef idx="minor">
+            <a:schemeClr val="lt1"/>
+          </a:fontRef>
+        </p:style>
+        <p:txBody>
+          <a:bodyPr rtlCol="0" anchor="ctr" lIns="0" rIns="0" tIns="0" bIns="0"/>
+          <a:lstStyle/>
+          <a:p>
+            <a:pPr algn="ctr"/>
+            <a:r>
+              <a:rPr sz="1400" b="1">
+                <a:solidFill>
+                  <a:srgbClr val="202122"/>
+                </a:solidFill>
+                <a:latin typeface="Calibri"/>
+              </a:rPr>
+              <a:t>4</a:t>
+            </a:r>
+          </a:p>
+        </p:txBody>
+      </p:sp>
+      <p:sp>
+        <p:nvSpPr>
+          <p:cNvPr id="13" name="TextBox 12"/>
+          <p:cNvSpPr txBox="1"/>
+          <p:nvPr/>
+        </p:nvSpPr>
+        <p:spPr>
+          <a:xfrm>
+            <a:off x="1234440" y="5186933"/>
+            <a:ext cx="10408615" cy="1030986"/>
+          </a:xfrm>
+          <a:prstGeom prst="rect">
+            <a:avLst/>
+          </a:prstGeom>
+          <a:noFill/>
+        </p:spPr>
+        <p:txBody>
+          <a:bodyPr wrap="square" anchor="t" lIns="0" rIns="0" tIns="0" bIns="0"/>
+          <a:lstStyle/>
+          <a:p>
+            <a:pPr algn="l"/>
+            <a:r>
+              <a:rPr sz="1800" b="0" i="0">
+                <a:solidFill>
+                  <a:srgbClr val="54595D"/>
+                </a:solidFill>
+                <a:latin typeface="Calibri"/>
+              </a:rPr>
+              <a:t>What is a system boundary?</a:t>
+            </a:r>
+          </a:p>
+          <a:p>
+            <a:r>
+              <a:rPr sz="1800" b="1">
+                <a:solidFill>
+                  <a:srgbClr val="03306E"/>
+                </a:solidFill>
+                <a:latin typeface="Calibri"/>
+              </a:rPr>
+              <a:t>Where your system ends and external systems begin.</a:t>
+            </a:r>
+          </a:p>
+        </p:txBody>
+      </p:sp>
+    </p:spTree>
+  </p:cSld>
+  <p:clrMapOvr>
+    <a:masterClrMapping/>
+  </p:clrMapOvr>
+</p:sld>
+</file>
+
+<file path=ppt/slides/slide15.xml><?xml version="1.0" encoding="utf-8"?>
+<p:sld xmlns:a="http://schemas.openxmlformats.org/drawingml/2006/main" xmlns:p="http://schemas.openxmlformats.org/presentationml/2006/main" xmlns:r="http://schemas.openxmlformats.org/officeDocument/2006/relationships">
+  <p:cSld>
+    <p:bg>
+      <p:bgPr>
+        <a:solidFill>
+          <a:srgbClr val="FFFFFF"/>
+        </a:solidFill>
+        <a:effectLst/>
+      </p:bgPr>
+    </p:bg>
+    <p:spTree>
+      <p:nvGrpSpPr>
+        <p:cNvPr id="1" name=""/>
+        <p:cNvGrpSpPr/>
+        <p:nvPr/>
+      </p:nvGrpSpPr>
+      <p:grpSpPr/>
+      <p:sp>
+        <p:nvSpPr>
+          <p:cNvPr id="2" name="TextBox 1"/>
+          <p:cNvSpPr txBox="1"/>
+          <p:nvPr/>
+        </p:nvSpPr>
+        <p:spPr>
+          <a:xfrm>
+            <a:off x="548640" y="320040"/>
+            <a:ext cx="11094415" cy="274320"/>
+          </a:xfrm>
+          <a:prstGeom prst="rect">
+            <a:avLst/>
+          </a:prstGeom>
+          <a:noFill/>
+        </p:spPr>
+        <p:txBody>
+          <a:bodyPr wrap="square" anchor="t" lIns="0" rIns="0" tIns="0" bIns="0"/>
+          <a:lstStyle/>
+          <a:p>
+            <a:pPr algn="l"/>
+            <a:r>
+              <a:rPr sz="1100" b="1" i="0">
+                <a:solidFill>
+                  <a:srgbClr val="54595D"/>
+                </a:solidFill>
+                <a:latin typeface="Calibri"/>
+              </a:rPr>
+              <a:t>OCCUPATIONAL SPECIALISM  ·  Specialism Content Area 4</a:t>
+            </a:r>
+          </a:p>
+        </p:txBody>
+      </p:sp>
+      <p:sp>
+        <p:nvSpPr>
+          <p:cNvPr id="3" name="TextBox 2"/>
+          <p:cNvSpPr txBox="1"/>
+          <p:nvPr/>
+        </p:nvSpPr>
+        <p:spPr>
+          <a:xfrm>
+            <a:off x="548640" y="566928"/>
+            <a:ext cx="11094415" cy="822960"/>
+          </a:xfrm>
+          <a:prstGeom prst="rect">
+            <a:avLst/>
+          </a:prstGeom>
+          <a:noFill/>
+        </p:spPr>
+        <p:txBody>
+          <a:bodyPr wrap="square" anchor="ctr" lIns="0" rIns="0" tIns="0" bIns="0"/>
+          <a:lstStyle/>
+          <a:p>
+            <a:pPr algn="l"/>
+            <a:r>
+              <a:rPr sz="3200" b="1" i="0">
+                <a:solidFill>
+                  <a:srgbClr val="03306E"/>
+                </a:solidFill>
+                <a:latin typeface="Cambria"/>
+              </a:rPr>
+              <a:t>Activity: Design a shop database</a:t>
+            </a:r>
+          </a:p>
+        </p:txBody>
+      </p:sp>
+      <p:sp>
+        <p:nvSpPr>
+          <p:cNvPr id="4" name="TextBox 3"/>
+          <p:cNvSpPr txBox="1"/>
+          <p:nvPr/>
+        </p:nvSpPr>
+        <p:spPr>
+          <a:xfrm>
+            <a:off x="548640" y="6446520"/>
+            <a:ext cx="8229600" cy="274320"/>
+          </a:xfrm>
+          <a:prstGeom prst="rect">
+            <a:avLst/>
+          </a:prstGeom>
+          <a:noFill/>
+        </p:spPr>
+        <p:txBody>
+          <a:bodyPr wrap="square" anchor="t" lIns="0" rIns="0" tIns="0" bIns="0"/>
+          <a:lstStyle/>
+          <a:p>
+            <a:pPr algn="l"/>
+            <a:r>
+              <a:rPr sz="1000" b="0" i="0">
+                <a:solidFill>
+                  <a:srgbClr val="54595D"/>
+                </a:solidFill>
+                <a:latin typeface="Calibri"/>
+              </a:rPr>
+              <a:t>Digital Software Development T Level  ·  Designing Data, Assets and Integration</a:t>
+            </a:r>
+          </a:p>
+        </p:txBody>
+      </p:sp>
+      <p:sp>
+        <p:nvSpPr>
+          <p:cNvPr id="5" name="TextBox 4"/>
+          <p:cNvSpPr txBox="1"/>
+          <p:nvPr/>
+        </p:nvSpPr>
+        <p:spPr>
+          <a:xfrm>
+            <a:off x="10728655" y="6446520"/>
+            <a:ext cx="914400" cy="274320"/>
+          </a:xfrm>
+          <a:prstGeom prst="rect">
+            <a:avLst/>
+          </a:prstGeom>
+          <a:noFill/>
+        </p:spPr>
+        <p:txBody>
+          <a:bodyPr wrap="square" anchor="t" lIns="0" rIns="0" tIns="0" bIns="0"/>
+          <a:lstStyle/>
+          <a:p>
+            <a:pPr algn="r"/>
+            <a:r>
+              <a:rPr sz="1000" b="0" i="0">
+                <a:solidFill>
+                  <a:srgbClr val="54595D"/>
+                </a:solidFill>
+                <a:latin typeface="Calibri"/>
+              </a:rPr>
+              <a:t>15</a:t>
+            </a:r>
+          </a:p>
+        </p:txBody>
+      </p:sp>
+      <p:sp>
+        <p:nvSpPr>
+          <p:cNvPr id="6" name="Rounded Rectangle 5"/>
+          <p:cNvSpPr/>
+          <p:nvPr/>
+        </p:nvSpPr>
+        <p:spPr>
+          <a:xfrm>
+            <a:off x="548640" y="1508760"/>
+            <a:ext cx="2011680" cy="457200"/>
+          </a:xfrm>
+          <a:prstGeom prst="roundRect">
+            <a:avLst>
+              <a:gd name="adj" fmla="val 50000"/>
+            </a:avLst>
+          </a:prstGeom>
+          <a:solidFill>
+            <a:srgbClr val="33C17A"/>
+          </a:solidFill>
+          <a:ln>
+            <a:noFill/>
+          </a:ln>
+          <a:effectLst/>
+        </p:spPr>
+        <p:style>
+          <a:lnRef idx="1">
+            <a:schemeClr val="accent1"/>
+          </a:lnRef>
+          <a:fillRef idx="3">
+            <a:schemeClr val="accent1"/>
+          </a:fillRef>
+          <a:effectRef idx="2">
+            <a:schemeClr val="accent1"/>
+          </a:effectRef>
+          <a:fontRef idx="minor">
+            <a:schemeClr val="lt1"/>
+          </a:fontRef>
+        </p:style>
+        <p:txBody>
+          <a:bodyPr rtlCol="0" anchor="ctr"/>
+          <a:lstStyle/>
+          <a:p/>
+        </p:txBody>
+      </p:sp>
+      <p:sp>
+        <p:nvSpPr>
+          <p:cNvPr id="7" name="TextBox 6"/>
+          <p:cNvSpPr txBox="1"/>
+          <p:nvPr/>
+        </p:nvSpPr>
+        <p:spPr>
+          <a:xfrm>
+            <a:off x="548640" y="1508760"/>
+            <a:ext cx="2011680" cy="457200"/>
+          </a:xfrm>
+          <a:prstGeom prst="rect">
+            <a:avLst/>
+          </a:prstGeom>
+          <a:noFill/>
+        </p:spPr>
+        <p:txBody>
+          <a:bodyPr wrap="square" anchor="ctr" lIns="0" rIns="0" tIns="0" bIns="0"/>
+          <a:lstStyle/>
+          <a:p>
+            <a:pPr algn="ctr"/>
+            <a:r>
+              <a:rPr sz="1400" b="1" i="0">
+                <a:solidFill>
+                  <a:srgbClr val="202122"/>
+                </a:solidFill>
+                <a:latin typeface="Calibri"/>
+              </a:rPr>
+              <a:t>35 minutes</a:t>
+            </a:r>
+          </a:p>
+        </p:txBody>
+      </p:sp>
+      <p:sp>
+        <p:nvSpPr>
+          <p:cNvPr id="8" name="TextBox 7"/>
+          <p:cNvSpPr txBox="1"/>
+          <p:nvPr/>
+        </p:nvSpPr>
+        <p:spPr>
+          <a:xfrm>
+            <a:off x="2743200" y="1508760"/>
+            <a:ext cx="4754880" cy="457200"/>
+          </a:xfrm>
+          <a:prstGeom prst="rect">
+            <a:avLst/>
+          </a:prstGeom>
+          <a:noFill/>
+        </p:spPr>
+        <p:txBody>
+          <a:bodyPr wrap="square" anchor="ctr" lIns="0" rIns="0" tIns="0" bIns="0"/>
+          <a:lstStyle/>
+          <a:p>
+            <a:pPr algn="l"/>
+            <a:r>
+              <a:rPr sz="1400" b="0" i="1">
+                <a:solidFill>
+                  <a:srgbClr val="54595D"/>
+                </a:solidFill>
+                <a:latin typeface="Calibri"/>
+              </a:rPr>
+              <a:t>Pairs</a:t>
+            </a:r>
+          </a:p>
+        </p:txBody>
+      </p:sp>
+      <p:sp>
+        <p:nvSpPr>
+          <p:cNvPr id="9" name="Oval 8"/>
+          <p:cNvSpPr/>
+          <p:nvPr/>
+        </p:nvSpPr>
+        <p:spPr>
+          <a:xfrm>
+            <a:off x="548640" y="2482596"/>
+            <a:ext cx="384048" cy="384048"/>
+          </a:xfrm>
+          <a:prstGeom prst="ellipse">
+            <a:avLst/>
+          </a:prstGeom>
+          <a:solidFill>
+            <a:srgbClr val="0645AD"/>
+          </a:solidFill>
+          <a:ln>
+            <a:noFill/>
+          </a:ln>
+          <a:effectLst/>
+        </p:spPr>
+        <p:style>
+          <a:lnRef idx="1">
+            <a:schemeClr val="accent1"/>
+          </a:lnRef>
+          <a:fillRef idx="3">
+            <a:schemeClr val="accent1"/>
+          </a:fillRef>
+          <a:effectRef idx="2">
+            <a:schemeClr val="accent1"/>
+          </a:effectRef>
+          <a:fontRef idx="minor">
+            <a:schemeClr val="lt1"/>
+          </a:fontRef>
+        </p:style>
+        <p:txBody>
+          <a:bodyPr rtlCol="0" anchor="ctr" lIns="0" rIns="0" tIns="0" bIns="0"/>
+          <a:lstStyle/>
+          <a:p>
+            <a:pPr algn="ctr"/>
+            <a:r>
+              <a:rPr sz="1300" b="1">
+                <a:solidFill>
+                  <a:srgbClr val="FFFFFF"/>
+                </a:solidFill>
+                <a:latin typeface="Calibri"/>
+              </a:rPr>
+              <a:t>1</a:t>
+            </a:r>
+          </a:p>
+        </p:txBody>
+      </p:sp>
+      <p:sp>
+        <p:nvSpPr>
+          <p:cNvPr id="10" name="TextBox 9"/>
+          <p:cNvSpPr txBox="1"/>
+          <p:nvPr/>
+        </p:nvSpPr>
+        <p:spPr>
+          <a:xfrm>
+            <a:off x="1143000" y="2240280"/>
+            <a:ext cx="5943600" cy="868680"/>
+          </a:xfrm>
+          <a:prstGeom prst="rect">
+            <a:avLst/>
+          </a:prstGeom>
+          <a:noFill/>
+        </p:spPr>
+        <p:txBody>
+          <a:bodyPr wrap="square" anchor="ctr" lIns="0" rIns="0" tIns="0" bIns="0"/>
+          <a:lstStyle/>
+          <a:p>
+            <a:pPr algn="l"/>
+            <a:r>
+              <a:rPr sz="1700" b="0" i="0">
+                <a:solidFill>
+                  <a:srgbClr val="202122"/>
+                </a:solidFill>
+                <a:latin typeface="Calibri"/>
+              </a:rPr>
+              <a:t>A small online shop sells products to customers who place orders.</a:t>
+            </a:r>
+          </a:p>
+        </p:txBody>
+      </p:sp>
+      <p:sp>
+        <p:nvSpPr>
+          <p:cNvPr id="11" name="Oval 10"/>
+          <p:cNvSpPr/>
+          <p:nvPr/>
+        </p:nvSpPr>
+        <p:spPr>
+          <a:xfrm>
+            <a:off x="548640" y="3461004"/>
+            <a:ext cx="384048" cy="384048"/>
+          </a:xfrm>
+          <a:prstGeom prst="ellipse">
+            <a:avLst/>
+          </a:prstGeom>
+          <a:solidFill>
+            <a:srgbClr val="0645AD"/>
+          </a:solidFill>
+          <a:ln>
+            <a:noFill/>
+          </a:ln>
+          <a:effectLst/>
+        </p:spPr>
+        <p:style>
+          <a:lnRef idx="1">
+            <a:schemeClr val="accent1"/>
+          </a:lnRef>
+          <a:fillRef idx="3">
+            <a:schemeClr val="accent1"/>
+          </a:fillRef>
+          <a:effectRef idx="2">
+            <a:schemeClr val="accent1"/>
+          </a:effectRef>
+          <a:fontRef idx="minor">
+            <a:schemeClr val="lt1"/>
+          </a:fontRef>
+        </p:style>
+        <p:txBody>
+          <a:bodyPr rtlCol="0" anchor="ctr" lIns="0" rIns="0" tIns="0" bIns="0"/>
+          <a:lstStyle/>
+          <a:p>
+            <a:pPr algn="ctr"/>
+            <a:r>
+              <a:rPr sz="1300" b="1">
+                <a:solidFill>
+                  <a:srgbClr val="FFFFFF"/>
+                </a:solidFill>
+                <a:latin typeface="Calibri"/>
+              </a:rPr>
+              <a:t>2</a:t>
+            </a:r>
+          </a:p>
+        </p:txBody>
+      </p:sp>
+      <p:sp>
+        <p:nvSpPr>
+          <p:cNvPr id="12" name="TextBox 11"/>
+          <p:cNvSpPr txBox="1"/>
+          <p:nvPr/>
+        </p:nvSpPr>
+        <p:spPr>
+          <a:xfrm>
+            <a:off x="1143000" y="3218688"/>
+            <a:ext cx="5943600" cy="868680"/>
+          </a:xfrm>
+          <a:prstGeom prst="rect">
+            <a:avLst/>
+          </a:prstGeom>
+          <a:noFill/>
+        </p:spPr>
+        <p:txBody>
+          <a:bodyPr wrap="square" anchor="ctr" lIns="0" rIns="0" tIns="0" bIns="0"/>
+          <a:lstStyle/>
+          <a:p>
+            <a:pPr algn="l"/>
+            <a:r>
+              <a:rPr sz="1700" b="0" i="0">
+                <a:solidFill>
+                  <a:srgbClr val="202122"/>
+                </a:solidFill>
+                <a:latin typeface="Calibri"/>
+              </a:rPr>
+              <a:t>Write a data dictionary for three tables.</a:t>
+            </a:r>
+          </a:p>
+        </p:txBody>
+      </p:sp>
+      <p:sp>
+        <p:nvSpPr>
+          <p:cNvPr id="13" name="Oval 12"/>
+          <p:cNvSpPr/>
+          <p:nvPr/>
+        </p:nvSpPr>
+        <p:spPr>
+          <a:xfrm>
+            <a:off x="548640" y="4439412"/>
+            <a:ext cx="384048" cy="384048"/>
+          </a:xfrm>
+          <a:prstGeom prst="ellipse">
+            <a:avLst/>
+          </a:prstGeom>
+          <a:solidFill>
+            <a:srgbClr val="0645AD"/>
+          </a:solidFill>
+          <a:ln>
+            <a:noFill/>
+          </a:ln>
+          <a:effectLst/>
+        </p:spPr>
+        <p:style>
+          <a:lnRef idx="1">
+            <a:schemeClr val="accent1"/>
+          </a:lnRef>
+          <a:fillRef idx="3">
+            <a:schemeClr val="accent1"/>
+          </a:fillRef>
+          <a:effectRef idx="2">
+            <a:schemeClr val="accent1"/>
+          </a:effectRef>
+          <a:fontRef idx="minor">
+            <a:schemeClr val="lt1"/>
+          </a:fontRef>
+        </p:style>
+        <p:txBody>
+          <a:bodyPr rtlCol="0" anchor="ctr" lIns="0" rIns="0" tIns="0" bIns="0"/>
+          <a:lstStyle/>
+          <a:p>
+            <a:pPr algn="ctr"/>
+            <a:r>
+              <a:rPr sz="1300" b="1">
+                <a:solidFill>
+                  <a:srgbClr val="FFFFFF"/>
+                </a:solidFill>
+                <a:latin typeface="Calibri"/>
+              </a:rPr>
+              <a:t>3</a:t>
+            </a:r>
+          </a:p>
+        </p:txBody>
+      </p:sp>
+      <p:sp>
+        <p:nvSpPr>
+          <p:cNvPr id="14" name="TextBox 13"/>
+          <p:cNvSpPr txBox="1"/>
+          <p:nvPr/>
+        </p:nvSpPr>
+        <p:spPr>
+          <a:xfrm>
+            <a:off x="1143000" y="4197096"/>
+            <a:ext cx="5943600" cy="868680"/>
+          </a:xfrm>
+          <a:prstGeom prst="rect">
+            <a:avLst/>
+          </a:prstGeom>
+          <a:noFill/>
+        </p:spPr>
+        <p:txBody>
+          <a:bodyPr wrap="square" anchor="ctr" lIns="0" rIns="0" tIns="0" bIns="0"/>
+          <a:lstStyle/>
+          <a:p>
+            <a:pPr algn="l"/>
+            <a:r>
+              <a:rPr sz="1700" b="0" i="0">
+                <a:solidFill>
+                  <a:srgbClr val="202122"/>
+                </a:solidFill>
+                <a:latin typeface="Calibri"/>
+              </a:rPr>
+              <a:t>Draw the ERD.</a:t>
+            </a:r>
+          </a:p>
+        </p:txBody>
+      </p:sp>
+      <p:sp>
+        <p:nvSpPr>
+          <p:cNvPr id="15" name="Oval 14"/>
+          <p:cNvSpPr/>
+          <p:nvPr/>
+        </p:nvSpPr>
+        <p:spPr>
+          <a:xfrm>
+            <a:off x="548640" y="5417820"/>
+            <a:ext cx="384048" cy="384048"/>
+          </a:xfrm>
+          <a:prstGeom prst="ellipse">
+            <a:avLst/>
+          </a:prstGeom>
+          <a:solidFill>
+            <a:srgbClr val="0645AD"/>
+          </a:solidFill>
+          <a:ln>
+            <a:noFill/>
+          </a:ln>
+          <a:effectLst/>
+        </p:spPr>
+        <p:style>
+          <a:lnRef idx="1">
+            <a:schemeClr val="accent1"/>
+          </a:lnRef>
+          <a:fillRef idx="3">
+            <a:schemeClr val="accent1"/>
+          </a:fillRef>
+          <a:effectRef idx="2">
+            <a:schemeClr val="accent1"/>
+          </a:effectRef>
+          <a:fontRef idx="minor">
+            <a:schemeClr val="lt1"/>
+          </a:fontRef>
+        </p:style>
+        <p:txBody>
+          <a:bodyPr rtlCol="0" anchor="ctr" lIns="0" rIns="0" tIns="0" bIns="0"/>
+          <a:lstStyle/>
+          <a:p>
+            <a:pPr algn="ctr"/>
+            <a:r>
+              <a:rPr sz="1300" b="1">
+                <a:solidFill>
+                  <a:srgbClr val="FFFFFF"/>
+                </a:solidFill>
+                <a:latin typeface="Calibri"/>
+              </a:rPr>
+              <a:t>4</a:t>
+            </a:r>
+          </a:p>
+        </p:txBody>
+      </p:sp>
+      <p:sp>
+        <p:nvSpPr>
+          <p:cNvPr id="16" name="TextBox 15"/>
+          <p:cNvSpPr txBox="1"/>
+          <p:nvPr/>
+        </p:nvSpPr>
+        <p:spPr>
+          <a:xfrm>
+            <a:off x="1143000" y="5175504"/>
+            <a:ext cx="5943600" cy="868680"/>
+          </a:xfrm>
+          <a:prstGeom prst="rect">
+            <a:avLst/>
+          </a:prstGeom>
+          <a:noFill/>
+        </p:spPr>
+        <p:txBody>
+          <a:bodyPr wrap="square" anchor="ctr" lIns="0" rIns="0" tIns="0" bIns="0"/>
+          <a:lstStyle/>
+          <a:p>
+            <a:pPr algn="l"/>
+            <a:r>
+              <a:rPr sz="1700" b="0" i="0">
+                <a:solidFill>
+                  <a:srgbClr val="202122"/>
+                </a:solidFill>
+                <a:latin typeface="Calibri"/>
+              </a:rPr>
+              <a:t>Check it is in third normal form and explain why.</a:t>
+            </a:r>
+          </a:p>
+        </p:txBody>
+      </p:sp>
+      <p:sp>
+        <p:nvSpPr>
+          <p:cNvPr id="17" name="Rounded Rectangle 16"/>
+          <p:cNvSpPr/>
+          <p:nvPr/>
+        </p:nvSpPr>
+        <p:spPr>
+          <a:xfrm>
+            <a:off x="7772400" y="1508760"/>
+            <a:ext cx="3867912" cy="4572000"/>
+          </a:xfrm>
+          <a:prstGeom prst="roundRect">
+            <a:avLst>
+              <a:gd name="adj" fmla="val 8000"/>
+            </a:avLst>
+          </a:prstGeom>
+          <a:solidFill>
+            <a:srgbClr val="EAF3FF"/>
+          </a:solidFill>
+          <a:ln>
+            <a:noFill/>
+          </a:ln>
+          <a:effectLst/>
+        </p:spPr>
+        <p:style>
+          <a:lnRef idx="1">
+            <a:schemeClr val="accent1"/>
+          </a:lnRef>
+          <a:fillRef idx="3">
+            <a:schemeClr val="accent1"/>
+          </a:fillRef>
+          <a:effectRef idx="2">
+            <a:schemeClr val="accent1"/>
+          </a:effectRef>
+          <a:fontRef idx="minor">
+            <a:schemeClr val="lt1"/>
+          </a:fontRef>
+        </p:style>
+        <p:txBody>
+          <a:bodyPr rtlCol="0" anchor="ctr"/>
+          <a:lstStyle/>
+          <a:p/>
+        </p:txBody>
+      </p:sp>
+      <p:sp>
+        <p:nvSpPr>
+          <p:cNvPr id="18" name="TextBox 17"/>
+          <p:cNvSpPr txBox="1"/>
+          <p:nvPr/>
+        </p:nvSpPr>
+        <p:spPr>
+          <a:xfrm>
+            <a:off x="8046720" y="1737360"/>
+            <a:ext cx="3291840" cy="365760"/>
+          </a:xfrm>
+          <a:prstGeom prst="rect">
+            <a:avLst/>
+          </a:prstGeom>
+          <a:noFill/>
+        </p:spPr>
+        <p:txBody>
+          <a:bodyPr wrap="square" anchor="t" lIns="0" rIns="0" tIns="0" bIns="0"/>
+          <a:lstStyle/>
+          <a:p>
+            <a:pPr algn="l"/>
+            <a:r>
+              <a:rPr sz="1300" b="1" i="0">
+                <a:solidFill>
+                  <a:srgbClr val="0645AD"/>
+                </a:solidFill>
+                <a:latin typeface="Calibri"/>
+              </a:rPr>
+              <a:t>SUCCESS CRITERIA</a:t>
+            </a:r>
+          </a:p>
+        </p:txBody>
+      </p:sp>
+      <p:sp>
+        <p:nvSpPr>
+          <p:cNvPr id="19" name="TextBox 18"/>
+          <p:cNvSpPr txBox="1"/>
+          <p:nvPr/>
+        </p:nvSpPr>
+        <p:spPr>
+          <a:xfrm>
+            <a:off x="8046720" y="2240280"/>
+            <a:ext cx="3337560" cy="3657600"/>
+          </a:xfrm>
+          <a:prstGeom prst="rect">
+            <a:avLst/>
+          </a:prstGeom>
+          <a:noFill/>
+        </p:spPr>
+        <p:txBody>
+          <a:bodyPr wrap="square" lIns="0" rIns="0" tIns="0" bIns="0">
+            <a:spAutoFit/>
+          </a:bodyPr>
+          <a:lstStyle/>
+          <a:p>
+            <a:pPr marL="274320" indent="-274320">
+              <a:spcAft>
+                <a:spcPts val="810"/>
+              </a:spcAft>
+              <a:buClr>
+                <a:srgbClr val="0645AD"/>
+              </a:buClr>
+              <a:buFont typeface="Arial"/>
+              <a:buChar char="•"/>
+            </a:pPr>
+            <a:r>
+              <a:rPr sz="1800" b="0">
+                <a:solidFill>
+                  <a:srgbClr val="202122"/>
+                </a:solidFill>
+                <a:latin typeface="Calibri"/>
+              </a:rPr>
+              <a:t>Primary and foreign keys shown</a:t>
+            </a:r>
+          </a:p>
+          <a:p>
+            <a:pPr marL="274320" indent="-274320">
+              <a:spcAft>
+                <a:spcPts val="810"/>
+              </a:spcAft>
+              <a:buClr>
+                <a:srgbClr val="0645AD"/>
+              </a:buClr>
+              <a:buFont typeface="Arial"/>
+              <a:buChar char="•"/>
+            </a:pPr>
+            <a:r>
+              <a:rPr sz="1800" b="0">
+                <a:solidFill>
+                  <a:srgbClr val="202122"/>
+                </a:solidFill>
+                <a:latin typeface="Calibri"/>
+              </a:rPr>
+              <a:t>Relationships correct</a:t>
+            </a:r>
+          </a:p>
+          <a:p>
+            <a:pPr marL="274320" indent="-274320">
+              <a:spcAft>
+                <a:spcPts val="810"/>
+              </a:spcAft>
+              <a:buClr>
+                <a:srgbClr val="0645AD"/>
+              </a:buClr>
+              <a:buFont typeface="Arial"/>
+              <a:buChar char="•"/>
+            </a:pPr>
+            <a:r>
+              <a:rPr sz="1800" b="0">
+                <a:solidFill>
+                  <a:srgbClr val="202122"/>
+                </a:solidFill>
+                <a:latin typeface="Calibri"/>
+              </a:rPr>
+              <a:t>No repeated data</a:t>
+            </a:r>
+          </a:p>
+        </p:txBody>
+      </p:sp>
+    </p:spTree>
+  </p:cSld>
+  <p:clrMapOvr>
+    <a:masterClrMapping/>
+  </p:clrMapOvr>
+</p:sld>
+</file>
+
+<file path=ppt/slides/slide16.xml><?xml version="1.0" encoding="utf-8"?>
+<p:sld xmlns:a="http://schemas.openxmlformats.org/drawingml/2006/main" xmlns:p="http://schemas.openxmlformats.org/presentationml/2006/main" xmlns:r="http://schemas.openxmlformats.org/officeDocument/2006/relationships">
+  <p:cSld>
+    <p:bg>
+      <p:bgPr>
+        <a:solidFill>
           <a:srgbClr val="03306E"/>
         </a:solidFill>
         <a:effectLst/>
@@ -5783,22 +9511,93 @@
       </p:sp>
       <p:sp>
         <p:nvSpPr>
-          <p:cNvPr id="6" name="Rounded Rectangle 5"/>
+          <p:cNvPr id="6" name="TextBox 5"/>
+          <p:cNvSpPr txBox="1"/>
+          <p:nvPr/>
+        </p:nvSpPr>
+        <p:spPr>
+          <a:xfrm>
+            <a:off x="548640" y="1554480"/>
+            <a:ext cx="6720840" cy="4617720"/>
+          </a:xfrm>
+          <a:prstGeom prst="rect">
+            <a:avLst/>
+          </a:prstGeom>
+          <a:noFill/>
+        </p:spPr>
+        <p:txBody>
+          <a:bodyPr wrap="square" lIns="0" rIns="0" tIns="0" bIns="0">
+            <a:spAutoFit/>
+          </a:bodyPr>
+          <a:lstStyle/>
+          <a:p>
+            <a:pPr>
+              <a:spcAft>
+                <a:spcPts val="1320"/>
+              </a:spcAft>
+            </a:pPr>
+            <a:r>
+              <a:rPr sz="2200" b="0">
+                <a:solidFill>
+                  <a:srgbClr val="202122"/>
+                </a:solidFill>
+                <a:latin typeface="Calibri"/>
+              </a:rPr>
+              <a:t>Assets are the graphics, audio, video and code a solution uses.</a:t>
+            </a:r>
+          </a:p>
+          <a:p>
+            <a:pPr>
+              <a:spcAft>
+                <a:spcPts val="1320"/>
+              </a:spcAft>
+            </a:pPr>
+            <a:r>
+              <a:rPr sz="2200" b="0">
+                <a:solidFill>
+                  <a:srgbClr val="202122"/>
+                </a:solidFill>
+                <a:latin typeface="Calibri"/>
+              </a:rPr>
+              <a:t>When selecting them, consider the file type, file size and compression, how audio and video are streamed or encoded, metadata, the quality needed, the available bandwidth and storage, and the target platform. A 20 MB image might look great but will crawl on a mobile connection.</a:t>
+            </a:r>
+          </a:p>
+          <a:p>
+            <a:pPr>
+              <a:spcAft>
+                <a:spcPts val="1320"/>
+              </a:spcAft>
+            </a:pPr>
+            <a:r>
+              <a:rPr sz="2200" b="0">
+                <a:solidFill>
+                  <a:srgbClr val="202122"/>
+                </a:solidFill>
+                <a:latin typeface="Calibri"/>
+              </a:rPr>
+              <a:t>When using AI to generate content or assets, work legally and ethically: check licences and ownership, don't pass off others' work, and review the output.</a:t>
+            </a:r>
+          </a:p>
+        </p:txBody>
+      </p:sp>
+      <p:sp>
+        <p:nvSpPr>
+          <p:cNvPr id="7" name="Rounded Rectangle 6"/>
           <p:cNvSpPr/>
           <p:nvPr/>
         </p:nvSpPr>
         <p:spPr>
           <a:xfrm>
-            <a:off x="548640" y="1600200"/>
-            <a:ext cx="3515258" cy="4572000"/>
+            <a:off x="7772400" y="1554480"/>
+            <a:ext cx="3867912" cy="4526280"/>
           </a:xfrm>
           <a:prstGeom prst="roundRect">
             <a:avLst>
-              <a:gd name="adj" fmla="val 6000"/>
+              <a:gd name="adj" fmla="val 8000"/>
             </a:avLst>
           </a:prstGeom>
           <a:solidFill>
-            <a:srgbClr val="EAF3FF"/>
+            <a:srgbClr val="03306E"/>
           </a:solidFill>
           <a:ln>
             <a:noFill/>
@@ -5827,14 +9626,14 @@
       </p:sp>
       <p:sp>
         <p:nvSpPr>
-          <p:cNvPr id="7" name="Oval 6"/>
+          <p:cNvPr id="8" name="Oval 7"/>
           <p:cNvSpPr/>
           <p:nvPr/>
         </p:nvSpPr>
         <p:spPr>
           <a:xfrm>
-            <a:off x="777240" y="1828800"/>
-            <a:ext cx="457200" cy="457200"/>
+            <a:off x="8046720" y="1828800"/>
+            <a:ext cx="548640" cy="548640"/>
           </a:xfrm>
           <a:prstGeom prst="ellipse">
             <a:avLst/>
@@ -5867,60 +9666,60 @@
           <a:p>
             <a:pPr algn="ctr"/>
             <a:r>
-              <a:rPr sz="1500" b="1">
+              <a:rPr sz="1300" b="1">
                 <a:solidFill>
                   <a:srgbClr val="202122"/>
                 </a:solidFill>
                 <a:latin typeface="Calibri"/>
               </a:rPr>
-              <a:t>1</a:t>
-            </a:r>
-          </a:p>
-        </p:txBody>
-      </p:sp>
-      <p:sp>
-        <p:nvSpPr>
-          <p:cNvPr id="8" name="TextBox 7"/>
-          <p:cNvSpPr txBox="1"/>
-          <p:nvPr/>
-        </p:nvSpPr>
-        <p:spPr>
-          <a:xfrm>
-            <a:off x="1371600" y="1801368"/>
-            <a:ext cx="2509418" cy="512064"/>
-          </a:xfrm>
-          <a:prstGeom prst="rect">
-            <a:avLst/>
-          </a:prstGeom>
-          <a:noFill/>
-        </p:spPr>
-        <p:txBody>
-          <a:bodyPr wrap="square" anchor="ctr" lIns="0" rIns="0" tIns="0" bIns="0"/>
+              <a:t>e.g.</a:t>
+            </a:r>
+          </a:p>
+        </p:txBody>
+      </p:sp>
+      <p:sp>
+        <p:nvSpPr>
+          <p:cNvPr id="9" name="TextBox 8"/>
+          <p:cNvSpPr txBox="1"/>
+          <p:nvPr/>
+        </p:nvSpPr>
+        <p:spPr>
+          <a:xfrm>
+            <a:off x="8046720" y="2560320"/>
+            <a:ext cx="3291840" cy="365760"/>
+          </a:xfrm>
+          <a:prstGeom prst="rect">
+            <a:avLst/>
+          </a:prstGeom>
+          <a:noFill/>
+        </p:spPr>
+        <p:txBody>
+          <a:bodyPr wrap="square" anchor="t" lIns="0" rIns="0" tIns="0" bIns="0"/>
           <a:lstStyle/>
           <a:p>
             <a:pPr algn="l"/>
             <a:r>
-              <a:rPr sz="1900" b="1" i="0">
-                <a:solidFill>
-                  <a:srgbClr val="03306E"/>
-                </a:solidFill>
-                <a:latin typeface="Calibri"/>
-              </a:rPr>
-              <a:t>Asset choices</a:t>
-            </a:r>
-          </a:p>
-        </p:txBody>
-      </p:sp>
-      <p:sp>
-        <p:nvSpPr>
-          <p:cNvPr id="9" name="TextBox 8"/>
-          <p:cNvSpPr txBox="1"/>
-          <p:nvPr/>
-        </p:nvSpPr>
-        <p:spPr>
-          <a:xfrm>
-            <a:off x="777240" y="2468880"/>
-            <a:ext cx="3058058" cy="3566160"/>
+              <a:rPr sz="1300" b="1" i="0">
+                <a:solidFill>
+                  <a:srgbClr val="A9C8F0"/>
+                </a:solidFill>
+                <a:latin typeface="Calibri"/>
+              </a:rPr>
+              <a:t>EXAMPLE</a:t>
+            </a:r>
+          </a:p>
+        </p:txBody>
+      </p:sp>
+      <p:sp>
+        <p:nvSpPr>
+          <p:cNvPr id="10" name="TextBox 9"/>
+          <p:cNvSpPr txBox="1"/>
+          <p:nvPr/>
+        </p:nvSpPr>
+        <p:spPr>
+          <a:xfrm>
+            <a:off x="8046720" y="2971800"/>
+            <a:ext cx="3291840" cy="2971800"/>
           </a:xfrm>
           <a:prstGeom prst="rect">
             <a:avLst/>
@@ -5933,339 +9732,13 @@
           <a:p>
             <a:pPr algn="l"/>
             <a:r>
-              <a:rPr sz="2000" b="0" i="0">
-                <a:solidFill>
-                  <a:srgbClr val="202122"/>
-                </a:solidFill>
-                <a:latin typeface="Calibri"/>
-              </a:rPr>
-              <a:t>File type, size, compression, streaming and encoding, metadata, quality.</a:t>
-            </a:r>
-          </a:p>
-        </p:txBody>
-      </p:sp>
-      <p:sp>
-        <p:nvSpPr>
-          <p:cNvPr id="10" name="Rounded Rectangle 9"/>
-          <p:cNvSpPr/>
-          <p:nvPr/>
-        </p:nvSpPr>
-        <p:spPr>
-          <a:xfrm>
-            <a:off x="4338218" y="1600200"/>
-            <a:ext cx="3515258" cy="4572000"/>
-          </a:xfrm>
-          <a:prstGeom prst="roundRect">
-            <a:avLst>
-              <a:gd name="adj" fmla="val 6000"/>
-            </a:avLst>
-          </a:prstGeom>
-          <a:solidFill>
-            <a:srgbClr val="EAF3FF"/>
-          </a:solidFill>
-          <a:ln>
-            <a:noFill/>
-          </a:ln>
-          <a:effectLst/>
-        </p:spPr>
-        <p:style>
-          <a:lnRef idx="1">
-            <a:schemeClr val="accent1"/>
-          </a:lnRef>
-          <a:fillRef idx="3">
-            <a:schemeClr val="accent1"/>
-          </a:fillRef>
-          <a:effectRef idx="2">
-            <a:schemeClr val="accent1"/>
-          </a:effectRef>
-          <a:fontRef idx="minor">
-            <a:schemeClr val="lt1"/>
-          </a:fontRef>
-        </p:style>
-        <p:txBody>
-          <a:bodyPr rtlCol="0" anchor="ctr"/>
-          <a:lstStyle/>
-          <a:p/>
-        </p:txBody>
-      </p:sp>
-      <p:sp>
-        <p:nvSpPr>
-          <p:cNvPr id="11" name="Oval 10"/>
-          <p:cNvSpPr/>
-          <p:nvPr/>
-        </p:nvSpPr>
-        <p:spPr>
-          <a:xfrm>
-            <a:off x="4566818" y="1828800"/>
-            <a:ext cx="457200" cy="457200"/>
-          </a:xfrm>
-          <a:prstGeom prst="ellipse">
-            <a:avLst/>
-          </a:prstGeom>
-          <a:solidFill>
-            <a:srgbClr val="33C17A"/>
-          </a:solidFill>
-          <a:ln>
-            <a:noFill/>
-          </a:ln>
-          <a:effectLst/>
-        </p:spPr>
-        <p:style>
-          <a:lnRef idx="1">
-            <a:schemeClr val="accent1"/>
-          </a:lnRef>
-          <a:fillRef idx="3">
-            <a:schemeClr val="accent1"/>
-          </a:fillRef>
-          <a:effectRef idx="2">
-            <a:schemeClr val="accent1"/>
-          </a:effectRef>
-          <a:fontRef idx="minor">
-            <a:schemeClr val="lt1"/>
-          </a:fontRef>
-        </p:style>
-        <p:txBody>
-          <a:bodyPr rtlCol="0" anchor="ctr" lIns="0" rIns="0" tIns="0" bIns="0"/>
-          <a:lstStyle/>
-          <a:p>
-            <a:pPr algn="ctr"/>
-            <a:r>
-              <a:rPr sz="1500" b="1">
-                <a:solidFill>
-                  <a:srgbClr val="202122"/>
-                </a:solidFill>
-                <a:latin typeface="Calibri"/>
-              </a:rPr>
-              <a:t>2</a:t>
-            </a:r>
-          </a:p>
-        </p:txBody>
-      </p:sp>
-      <p:sp>
-        <p:nvSpPr>
-          <p:cNvPr id="12" name="TextBox 11"/>
-          <p:cNvSpPr txBox="1"/>
-          <p:nvPr/>
-        </p:nvSpPr>
-        <p:spPr>
-          <a:xfrm>
-            <a:off x="5161178" y="1801368"/>
-            <a:ext cx="2509418" cy="512064"/>
-          </a:xfrm>
-          <a:prstGeom prst="rect">
-            <a:avLst/>
-          </a:prstGeom>
-          <a:noFill/>
-        </p:spPr>
-        <p:txBody>
-          <a:bodyPr wrap="square" anchor="ctr" lIns="0" rIns="0" tIns="0" bIns="0"/>
-          <a:lstStyle/>
-          <a:p>
-            <a:pPr algn="l"/>
-            <a:r>
-              <a:rPr sz="1900" b="1" i="0">
-                <a:solidFill>
-                  <a:srgbClr val="03306E"/>
-                </a:solidFill>
-                <a:latin typeface="Calibri"/>
-              </a:rPr>
-              <a:t>Constraints</a:t>
-            </a:r>
-          </a:p>
-        </p:txBody>
-      </p:sp>
-      <p:sp>
-        <p:nvSpPr>
-          <p:cNvPr id="13" name="TextBox 12"/>
-          <p:cNvSpPr txBox="1"/>
-          <p:nvPr/>
-        </p:nvSpPr>
-        <p:spPr>
-          <a:xfrm>
-            <a:off x="4566818" y="2468880"/>
-            <a:ext cx="3058058" cy="3566160"/>
-          </a:xfrm>
-          <a:prstGeom prst="rect">
-            <a:avLst/>
-          </a:prstGeom>
-          <a:noFill/>
-        </p:spPr>
-        <p:txBody>
-          <a:bodyPr wrap="square" anchor="t" lIns="0" rIns="0" tIns="0" bIns="0"/>
-          <a:lstStyle/>
-          <a:p>
-            <a:pPr algn="l"/>
-            <a:r>
-              <a:rPr sz="2000" b="0" i="0">
-                <a:solidFill>
-                  <a:srgbClr val="202122"/>
-                </a:solidFill>
-                <a:latin typeface="Calibri"/>
-              </a:rPr>
-              <a:t>Available bandwidth, storage and target platform.</a:t>
-            </a:r>
-          </a:p>
-        </p:txBody>
-      </p:sp>
-      <p:sp>
-        <p:nvSpPr>
-          <p:cNvPr id="14" name="Rounded Rectangle 13"/>
-          <p:cNvSpPr/>
-          <p:nvPr/>
-        </p:nvSpPr>
-        <p:spPr>
-          <a:xfrm>
-            <a:off x="8127796" y="1600200"/>
-            <a:ext cx="3515258" cy="4572000"/>
-          </a:xfrm>
-          <a:prstGeom prst="roundRect">
-            <a:avLst>
-              <a:gd name="adj" fmla="val 6000"/>
-            </a:avLst>
-          </a:prstGeom>
-          <a:solidFill>
-            <a:srgbClr val="EAF3FF"/>
-          </a:solidFill>
-          <a:ln>
-            <a:noFill/>
-          </a:ln>
-          <a:effectLst/>
-        </p:spPr>
-        <p:style>
-          <a:lnRef idx="1">
-            <a:schemeClr val="accent1"/>
-          </a:lnRef>
-          <a:fillRef idx="3">
-            <a:schemeClr val="accent1"/>
-          </a:fillRef>
-          <a:effectRef idx="2">
-            <a:schemeClr val="accent1"/>
-          </a:effectRef>
-          <a:fontRef idx="minor">
-            <a:schemeClr val="lt1"/>
-          </a:fontRef>
-        </p:style>
-        <p:txBody>
-          <a:bodyPr rtlCol="0" anchor="ctr"/>
-          <a:lstStyle/>
-          <a:p/>
-        </p:txBody>
-      </p:sp>
-      <p:sp>
-        <p:nvSpPr>
-          <p:cNvPr id="15" name="Oval 14"/>
-          <p:cNvSpPr/>
-          <p:nvPr/>
-        </p:nvSpPr>
-        <p:spPr>
-          <a:xfrm>
-            <a:off x="8356396" y="1828800"/>
-            <a:ext cx="457200" cy="457200"/>
-          </a:xfrm>
-          <a:prstGeom prst="ellipse">
-            <a:avLst/>
-          </a:prstGeom>
-          <a:solidFill>
-            <a:srgbClr val="33C17A"/>
-          </a:solidFill>
-          <a:ln>
-            <a:noFill/>
-          </a:ln>
-          <a:effectLst/>
-        </p:spPr>
-        <p:style>
-          <a:lnRef idx="1">
-            <a:schemeClr val="accent1"/>
-          </a:lnRef>
-          <a:fillRef idx="3">
-            <a:schemeClr val="accent1"/>
-          </a:fillRef>
-          <a:effectRef idx="2">
-            <a:schemeClr val="accent1"/>
-          </a:effectRef>
-          <a:fontRef idx="minor">
-            <a:schemeClr val="lt1"/>
-          </a:fontRef>
-        </p:style>
-        <p:txBody>
-          <a:bodyPr rtlCol="0" anchor="ctr" lIns="0" rIns="0" tIns="0" bIns="0"/>
-          <a:lstStyle/>
-          <a:p>
-            <a:pPr algn="ctr"/>
-            <a:r>
-              <a:rPr sz="1500" b="1">
-                <a:solidFill>
-                  <a:srgbClr val="202122"/>
-                </a:solidFill>
-                <a:latin typeface="Calibri"/>
-              </a:rPr>
-              <a:t>3</a:t>
-            </a:r>
-          </a:p>
-        </p:txBody>
-      </p:sp>
-      <p:sp>
-        <p:nvSpPr>
-          <p:cNvPr id="16" name="TextBox 15"/>
-          <p:cNvSpPr txBox="1"/>
-          <p:nvPr/>
-        </p:nvSpPr>
-        <p:spPr>
-          <a:xfrm>
-            <a:off x="8950756" y="1801368"/>
-            <a:ext cx="2509418" cy="512064"/>
-          </a:xfrm>
-          <a:prstGeom prst="rect">
-            <a:avLst/>
-          </a:prstGeom>
-          <a:noFill/>
-        </p:spPr>
-        <p:txBody>
-          <a:bodyPr wrap="square" anchor="ctr" lIns="0" rIns="0" tIns="0" bIns="0"/>
-          <a:lstStyle/>
-          <a:p>
-            <a:pPr algn="l"/>
-            <a:r>
-              <a:rPr sz="1900" b="1" i="0">
-                <a:solidFill>
-                  <a:srgbClr val="03306E"/>
-                </a:solidFill>
-                <a:latin typeface="Calibri"/>
-              </a:rPr>
-              <a:t>Using AI</a:t>
-            </a:r>
-          </a:p>
-        </p:txBody>
-      </p:sp>
-      <p:sp>
-        <p:nvSpPr>
-          <p:cNvPr id="17" name="TextBox 16"/>
-          <p:cNvSpPr txBox="1"/>
-          <p:nvPr/>
-        </p:nvSpPr>
-        <p:spPr>
-          <a:xfrm>
-            <a:off x="8356396" y="2468880"/>
-            <a:ext cx="3058058" cy="3566160"/>
-          </a:xfrm>
-          <a:prstGeom prst="rect">
-            <a:avLst/>
-          </a:prstGeom>
-          <a:noFill/>
-        </p:spPr>
-        <p:txBody>
-          <a:bodyPr wrap="square" anchor="t" lIns="0" rIns="0" tIns="0" bIns="0"/>
-          <a:lstStyle/>
-          <a:p>
-            <a:pPr algn="l"/>
-            <a:r>
-              <a:rPr sz="2000" b="0" i="0">
-                <a:solidFill>
-                  <a:srgbClr val="202122"/>
-                </a:solidFill>
-                <a:latin typeface="Calibri"/>
-              </a:rPr>
-              <a:t>Check licences and ownership; work legally and ethically.</a:t>
+              <a:rPr sz="1900" b="0" i="0">
+                <a:solidFill>
+                  <a:srgbClr val="FFFFFF"/>
+                </a:solidFill>
+                <a:latin typeface="Cambria"/>
+              </a:rPr>
+              <a:t>Swapping a 4 MB PNG hero image for a 300 KB compressed WebP makes a mobile page load in 1 second instead of 6.</a:t>
             </a:r>
           </a:p>
         </p:txBody>
@@ -6357,7 +9830,7 @@
                 </a:solidFill>
                 <a:latin typeface="Cambria"/>
               </a:rPr>
-              <a:t>Designing a database</a:t>
+              <a:t>Assets and AI</a:t>
             </a:r>
           </a:p>
         </p:txBody>
@@ -6430,20 +9903,22 @@
       </p:sp>
       <p:sp>
         <p:nvSpPr>
-          <p:cNvPr id="6" name="Rectangle 5"/>
+          <p:cNvPr id="6" name="Rounded Rectangle 5"/>
           <p:cNvSpPr/>
           <p:nvPr/>
         </p:nvSpPr>
         <p:spPr>
           <a:xfrm>
-            <a:off x="1884006" y="2793492"/>
-            <a:ext cx="8423681" cy="36576"/>
-          </a:xfrm>
-          <a:prstGeom prst="rect">
-            <a:avLst/>
+            <a:off x="548640" y="1600200"/>
+            <a:ext cx="3515258" cy="4572000"/>
+          </a:xfrm>
+          <a:prstGeom prst="roundRect">
+            <a:avLst>
+              <a:gd name="adj" fmla="val 6000"/>
+            </a:avLst>
           </a:prstGeom>
           <a:solidFill>
-            <a:srgbClr val="A9C8F0"/>
+            <a:srgbClr val="EAF3FF"/>
           </a:solidFill>
           <a:ln>
             <a:noFill/>
@@ -6478,8 +9953,8 @@
         </p:nvSpPr>
         <p:spPr>
           <a:xfrm>
-            <a:off x="1563966" y="2491740"/>
-            <a:ext cx="640080" cy="640080"/>
+            <a:off x="777240" y="1828800"/>
+            <a:ext cx="457200" cy="457200"/>
           </a:xfrm>
           <a:prstGeom prst="ellipse">
             <a:avLst/>
@@ -6512,7 +9987,7 @@
           <a:p>
             <a:pPr algn="ctr"/>
             <a:r>
-              <a:rPr sz="2000" b="1">
+              <a:rPr sz="1500" b="1">
                 <a:solidFill>
                   <a:srgbClr val="202122"/>
                 </a:solidFill>
@@ -6531,8 +10006,41 @@
         </p:nvSpPr>
         <p:spPr>
           <a:xfrm>
-            <a:off x="548640" y="3268979"/>
-            <a:ext cx="2670733" cy="731520"/>
+            <a:off x="1371600" y="1801368"/>
+            <a:ext cx="2509418" cy="512064"/>
+          </a:xfrm>
+          <a:prstGeom prst="rect">
+            <a:avLst/>
+          </a:prstGeom>
+          <a:noFill/>
+        </p:spPr>
+        <p:txBody>
+          <a:bodyPr wrap="square" anchor="ctr" lIns="0" rIns="0" tIns="0" bIns="0"/>
+          <a:lstStyle/>
+          <a:p>
+            <a:pPr algn="l"/>
+            <a:r>
+              <a:rPr sz="1900" b="1" i="0">
+                <a:solidFill>
+                  <a:srgbClr val="03306E"/>
+                </a:solidFill>
+                <a:latin typeface="Calibri"/>
+              </a:rPr>
+              <a:t>Asset choices</a:t>
+            </a:r>
+          </a:p>
+        </p:txBody>
+      </p:sp>
+      <p:sp>
+        <p:nvSpPr>
+          <p:cNvPr id="9" name="TextBox 8"/>
+          <p:cNvSpPr txBox="1"/>
+          <p:nvPr/>
+        </p:nvSpPr>
+        <p:spPr>
+          <a:xfrm>
+            <a:off x="777240" y="2468880"/>
+            <a:ext cx="3058058" cy="3566160"/>
           </a:xfrm>
           <a:prstGeom prst="rect">
             <a:avLst/>
@@ -6543,29 +10051,29 @@
           <a:bodyPr wrap="square" anchor="t" lIns="0" rIns="0" tIns="0" bIns="0"/>
           <a:lstStyle/>
           <a:p>
-            <a:pPr algn="ctr"/>
-            <a:r>
-              <a:rPr sz="1700" b="1" i="0">
-                <a:solidFill>
-                  <a:srgbClr val="03306E"/>
-                </a:solidFill>
-                <a:latin typeface="Calibri"/>
-              </a:rPr>
-              <a:t>Purpose</a:t>
-            </a:r>
-          </a:p>
-        </p:txBody>
-      </p:sp>
-      <p:sp>
-        <p:nvSpPr>
-          <p:cNvPr id="9" name="Rounded Rectangle 8"/>
+            <a:pPr algn="l"/>
+            <a:r>
+              <a:rPr sz="2000" b="0" i="0">
+                <a:solidFill>
+                  <a:srgbClr val="202122"/>
+                </a:solidFill>
+                <a:latin typeface="Calibri"/>
+              </a:rPr>
+              <a:t>File type, size, compression, streaming and encoding, metadata, quality.</a:t>
+            </a:r>
+          </a:p>
+        </p:txBody>
+      </p:sp>
+      <p:sp>
+        <p:nvSpPr>
+          <p:cNvPr id="10" name="Rounded Rectangle 9"/>
           <p:cNvSpPr/>
           <p:nvPr/>
         </p:nvSpPr>
         <p:spPr>
           <a:xfrm>
-            <a:off x="548640" y="4046220"/>
-            <a:ext cx="2670733" cy="1234439"/>
+            <a:off x="4338218" y="1600200"/>
+            <a:ext cx="3515258" cy="4572000"/>
           </a:xfrm>
           <a:prstGeom prst="roundRect">
             <a:avLst>
@@ -6602,47 +10110,14 @@
       </p:sp>
       <p:sp>
         <p:nvSpPr>
-          <p:cNvPr id="10" name="TextBox 9"/>
-          <p:cNvSpPr txBox="1"/>
-          <p:nvPr/>
-        </p:nvSpPr>
-        <p:spPr>
-          <a:xfrm>
-            <a:off x="685800" y="4183380"/>
-            <a:ext cx="2396413" cy="960119"/>
-          </a:xfrm>
-          <a:prstGeom prst="rect">
-            <a:avLst/>
-          </a:prstGeom>
-          <a:noFill/>
-        </p:spPr>
-        <p:txBody>
-          <a:bodyPr wrap="square" anchor="t" lIns="0" rIns="0" tIns="0" bIns="0"/>
-          <a:lstStyle/>
-          <a:p>
-            <a:pPr algn="l"/>
-            <a:r>
-              <a:rPr sz="1800" b="0" i="0">
-                <a:solidFill>
-                  <a:srgbClr val="202122"/>
-                </a:solidFill>
-                <a:latin typeface="Calibri"/>
-              </a:rPr>
-              <a:t>User management, e-commerce, diagnostics, performance.</a:t>
-            </a:r>
-          </a:p>
-        </p:txBody>
-      </p:sp>
-      <p:sp>
-        <p:nvSpPr>
           <p:cNvPr id="11" name="Oval 10"/>
           <p:cNvSpPr/>
           <p:nvPr/>
         </p:nvSpPr>
         <p:spPr>
           <a:xfrm>
-            <a:off x="4371860" y="2491740"/>
-            <a:ext cx="640080" cy="640080"/>
+            <a:off x="4566818" y="1828800"/>
+            <a:ext cx="457200" cy="457200"/>
           </a:xfrm>
           <a:prstGeom prst="ellipse">
             <a:avLst/>
@@ -6675,7 +10150,7 @@
           <a:p>
             <a:pPr algn="ctr"/>
             <a:r>
-              <a:rPr sz="2000" b="1">
+              <a:rPr sz="1500" b="1">
                 <a:solidFill>
                   <a:srgbClr val="202122"/>
                 </a:solidFill>
@@ -6694,8 +10169,41 @@
         </p:nvSpPr>
         <p:spPr>
           <a:xfrm>
-            <a:off x="3356533" y="3268979"/>
-            <a:ext cx="2670733" cy="731520"/>
+            <a:off x="5161178" y="1801368"/>
+            <a:ext cx="2509418" cy="512064"/>
+          </a:xfrm>
+          <a:prstGeom prst="rect">
+            <a:avLst/>
+          </a:prstGeom>
+          <a:noFill/>
+        </p:spPr>
+        <p:txBody>
+          <a:bodyPr wrap="square" anchor="ctr" lIns="0" rIns="0" tIns="0" bIns="0"/>
+          <a:lstStyle/>
+          <a:p>
+            <a:pPr algn="l"/>
+            <a:r>
+              <a:rPr sz="1900" b="1" i="0">
+                <a:solidFill>
+                  <a:srgbClr val="03306E"/>
+                </a:solidFill>
+                <a:latin typeface="Calibri"/>
+              </a:rPr>
+              <a:t>Constraints</a:t>
+            </a:r>
+          </a:p>
+        </p:txBody>
+      </p:sp>
+      <p:sp>
+        <p:nvSpPr>
+          <p:cNvPr id="13" name="TextBox 12"/>
+          <p:cNvSpPr txBox="1"/>
+          <p:nvPr/>
+        </p:nvSpPr>
+        <p:spPr>
+          <a:xfrm>
+            <a:off x="4566818" y="2468880"/>
+            <a:ext cx="3058058" cy="3566160"/>
           </a:xfrm>
           <a:prstGeom prst="rect">
             <a:avLst/>
@@ -6706,29 +10214,29 @@
           <a:bodyPr wrap="square" anchor="t" lIns="0" rIns="0" tIns="0" bIns="0"/>
           <a:lstStyle/>
           <a:p>
-            <a:pPr algn="ctr"/>
-            <a:r>
-              <a:rPr sz="1700" b="1" i="0">
-                <a:solidFill>
-                  <a:srgbClr val="03306E"/>
-                </a:solidFill>
-                <a:latin typeface="Calibri"/>
-              </a:rPr>
-              <a:t>Data dictionary</a:t>
-            </a:r>
-          </a:p>
-        </p:txBody>
-      </p:sp>
-      <p:sp>
-        <p:nvSpPr>
-          <p:cNvPr id="13" name="Rounded Rectangle 12"/>
+            <a:pPr algn="l"/>
+            <a:r>
+              <a:rPr sz="2000" b="0" i="0">
+                <a:solidFill>
+                  <a:srgbClr val="202122"/>
+                </a:solidFill>
+                <a:latin typeface="Calibri"/>
+              </a:rPr>
+              <a:t>Available bandwidth, storage and target platform.</a:t>
+            </a:r>
+          </a:p>
+        </p:txBody>
+      </p:sp>
+      <p:sp>
+        <p:nvSpPr>
+          <p:cNvPr id="14" name="Rounded Rectangle 13"/>
           <p:cNvSpPr/>
           <p:nvPr/>
         </p:nvSpPr>
         <p:spPr>
           <a:xfrm>
-            <a:off x="3356533" y="4046220"/>
-            <a:ext cx="2670733" cy="1234439"/>
+            <a:off x="8127796" y="1600200"/>
+            <a:ext cx="3515258" cy="4572000"/>
           </a:xfrm>
           <a:prstGeom prst="roundRect">
             <a:avLst>
@@ -6765,47 +10273,14 @@
       </p:sp>
       <p:sp>
         <p:nvSpPr>
-          <p:cNvPr id="14" name="TextBox 13"/>
-          <p:cNvSpPr txBox="1"/>
-          <p:nvPr/>
-        </p:nvSpPr>
-        <p:spPr>
-          <a:xfrm>
-            <a:off x="3493693" y="4183380"/>
-            <a:ext cx="2396413" cy="960119"/>
-          </a:xfrm>
-          <a:prstGeom prst="rect">
-            <a:avLst/>
-          </a:prstGeom>
-          <a:noFill/>
-        </p:spPr>
-        <p:txBody>
-          <a:bodyPr wrap="square" anchor="t" lIns="0" rIns="0" tIns="0" bIns="0"/>
-          <a:lstStyle/>
-          <a:p>
-            <a:pPr algn="l"/>
-            <a:r>
-              <a:rPr sz="1800" b="0" i="0">
-                <a:solidFill>
-                  <a:srgbClr val="202122"/>
-                </a:solidFill>
-                <a:latin typeface="Calibri"/>
-              </a:rPr>
-              <a:t>Every field, type and rule.</a:t>
-            </a:r>
-          </a:p>
-        </p:txBody>
-      </p:sp>
-      <p:sp>
-        <p:nvSpPr>
           <p:cNvPr id="15" name="Oval 14"/>
           <p:cNvSpPr/>
           <p:nvPr/>
         </p:nvSpPr>
         <p:spPr>
           <a:xfrm>
-            <a:off x="7179754" y="2491740"/>
-            <a:ext cx="640080" cy="640080"/>
+            <a:off x="8356396" y="1828800"/>
+            <a:ext cx="457200" cy="457200"/>
           </a:xfrm>
           <a:prstGeom prst="ellipse">
             <a:avLst/>
@@ -6838,7 +10313,7 @@
           <a:p>
             <a:pPr algn="ctr"/>
             <a:r>
-              <a:rPr sz="2000" b="1">
+              <a:rPr sz="1500" b="1">
                 <a:solidFill>
                   <a:srgbClr val="202122"/>
                 </a:solidFill>
@@ -6857,8 +10332,41 @@
         </p:nvSpPr>
         <p:spPr>
           <a:xfrm>
-            <a:off x="6164427" y="3268979"/>
-            <a:ext cx="2670733" cy="731520"/>
+            <a:off x="8950756" y="1801368"/>
+            <a:ext cx="2509418" cy="512064"/>
+          </a:xfrm>
+          <a:prstGeom prst="rect">
+            <a:avLst/>
+          </a:prstGeom>
+          <a:noFill/>
+        </p:spPr>
+        <p:txBody>
+          <a:bodyPr wrap="square" anchor="ctr" lIns="0" rIns="0" tIns="0" bIns="0"/>
+          <a:lstStyle/>
+          <a:p>
+            <a:pPr algn="l"/>
+            <a:r>
+              <a:rPr sz="1900" b="1" i="0">
+                <a:solidFill>
+                  <a:srgbClr val="03306E"/>
+                </a:solidFill>
+                <a:latin typeface="Calibri"/>
+              </a:rPr>
+              <a:t>Using AI</a:t>
+            </a:r>
+          </a:p>
+        </p:txBody>
+      </p:sp>
+      <p:sp>
+        <p:nvSpPr>
+          <p:cNvPr id="17" name="TextBox 16"/>
+          <p:cNvSpPr txBox="1"/>
+          <p:nvPr/>
+        </p:nvSpPr>
+        <p:spPr>
+          <a:xfrm>
+            <a:off x="8356396" y="2468880"/>
+            <a:ext cx="3058058" cy="3566160"/>
           </a:xfrm>
           <a:prstGeom prst="rect">
             <a:avLst/>
@@ -6869,255 +10377,15 @@
           <a:bodyPr wrap="square" anchor="t" lIns="0" rIns="0" tIns="0" bIns="0"/>
           <a:lstStyle/>
           <a:p>
-            <a:pPr algn="ctr"/>
-            <a:r>
-              <a:rPr sz="1700" b="1" i="0">
-                <a:solidFill>
-                  <a:srgbClr val="03306E"/>
-                </a:solidFill>
-                <a:latin typeface="Calibri"/>
-              </a:rPr>
-              <a:t>ERD</a:t>
-            </a:r>
-          </a:p>
-        </p:txBody>
-      </p:sp>
-      <p:sp>
-        <p:nvSpPr>
-          <p:cNvPr id="17" name="Rounded Rectangle 16"/>
-          <p:cNvSpPr/>
-          <p:nvPr/>
-        </p:nvSpPr>
-        <p:spPr>
-          <a:xfrm>
-            <a:off x="6164427" y="4046220"/>
-            <a:ext cx="2670733" cy="1234439"/>
-          </a:xfrm>
-          <a:prstGeom prst="roundRect">
-            <a:avLst>
-              <a:gd name="adj" fmla="val 6000"/>
-            </a:avLst>
-          </a:prstGeom>
-          <a:solidFill>
-            <a:srgbClr val="EAF3FF"/>
-          </a:solidFill>
-          <a:ln>
-            <a:noFill/>
-          </a:ln>
-          <a:effectLst/>
-        </p:spPr>
-        <p:style>
-          <a:lnRef idx="1">
-            <a:schemeClr val="accent1"/>
-          </a:lnRef>
-          <a:fillRef idx="3">
-            <a:schemeClr val="accent1"/>
-          </a:fillRef>
-          <a:effectRef idx="2">
-            <a:schemeClr val="accent1"/>
-          </a:effectRef>
-          <a:fontRef idx="minor">
-            <a:schemeClr val="lt1"/>
-          </a:fontRef>
-        </p:style>
-        <p:txBody>
-          <a:bodyPr rtlCol="0" anchor="ctr"/>
-          <a:lstStyle/>
-          <a:p/>
-        </p:txBody>
-      </p:sp>
-      <p:sp>
-        <p:nvSpPr>
-          <p:cNvPr id="18" name="TextBox 17"/>
-          <p:cNvSpPr txBox="1"/>
-          <p:nvPr/>
-        </p:nvSpPr>
-        <p:spPr>
-          <a:xfrm>
-            <a:off x="6301587" y="4183380"/>
-            <a:ext cx="2396413" cy="960119"/>
-          </a:xfrm>
-          <a:prstGeom prst="rect">
-            <a:avLst/>
-          </a:prstGeom>
-          <a:noFill/>
-        </p:spPr>
-        <p:txBody>
-          <a:bodyPr wrap="square" anchor="t" lIns="0" rIns="0" tIns="0" bIns="0"/>
-          <a:lstStyle/>
-          <a:p>
             <a:pPr algn="l"/>
             <a:r>
-              <a:rPr sz="1800" b="0" i="0">
+              <a:rPr sz="2000" b="0" i="0">
                 <a:solidFill>
                   <a:srgbClr val="202122"/>
                 </a:solidFill>
                 <a:latin typeface="Calibri"/>
               </a:rPr>
-              <a:t>Entities and relationships.</a:t>
-            </a:r>
-          </a:p>
-        </p:txBody>
-      </p:sp>
-      <p:sp>
-        <p:nvSpPr>
-          <p:cNvPr id="19" name="Oval 18"/>
-          <p:cNvSpPr/>
-          <p:nvPr/>
-        </p:nvSpPr>
-        <p:spPr>
-          <a:xfrm>
-            <a:off x="9987648" y="2491740"/>
-            <a:ext cx="640080" cy="640080"/>
-          </a:xfrm>
-          <a:prstGeom prst="ellipse">
-            <a:avLst/>
-          </a:prstGeom>
-          <a:solidFill>
-            <a:srgbClr val="33C17A"/>
-          </a:solidFill>
-          <a:ln>
-            <a:noFill/>
-          </a:ln>
-          <a:effectLst/>
-        </p:spPr>
-        <p:style>
-          <a:lnRef idx="1">
-            <a:schemeClr val="accent1"/>
-          </a:lnRef>
-          <a:fillRef idx="3">
-            <a:schemeClr val="accent1"/>
-          </a:fillRef>
-          <a:effectRef idx="2">
-            <a:schemeClr val="accent1"/>
-          </a:effectRef>
-          <a:fontRef idx="minor">
-            <a:schemeClr val="lt1"/>
-          </a:fontRef>
-        </p:style>
-        <p:txBody>
-          <a:bodyPr rtlCol="0" anchor="ctr" lIns="0" rIns="0" tIns="0" bIns="0"/>
-          <a:lstStyle/>
-          <a:p>
-            <a:pPr algn="ctr"/>
-            <a:r>
-              <a:rPr sz="2000" b="1">
-                <a:solidFill>
-                  <a:srgbClr val="202122"/>
-                </a:solidFill>
-                <a:latin typeface="Calibri"/>
-              </a:rPr>
-              <a:t>4</a:t>
-            </a:r>
-          </a:p>
-        </p:txBody>
-      </p:sp>
-      <p:sp>
-        <p:nvSpPr>
-          <p:cNvPr id="20" name="TextBox 19"/>
-          <p:cNvSpPr txBox="1"/>
-          <p:nvPr/>
-        </p:nvSpPr>
-        <p:spPr>
-          <a:xfrm>
-            <a:off x="8972321" y="3268979"/>
-            <a:ext cx="2670733" cy="731520"/>
-          </a:xfrm>
-          <a:prstGeom prst="rect">
-            <a:avLst/>
-          </a:prstGeom>
-          <a:noFill/>
-        </p:spPr>
-        <p:txBody>
-          <a:bodyPr wrap="square" anchor="t" lIns="0" rIns="0" tIns="0" bIns="0"/>
-          <a:lstStyle/>
-          <a:p>
-            <a:pPr algn="ctr"/>
-            <a:r>
-              <a:rPr sz="1700" b="1" i="0">
-                <a:solidFill>
-                  <a:srgbClr val="03306E"/>
-                </a:solidFill>
-                <a:latin typeface="Calibri"/>
-              </a:rPr>
-              <a:t>Normalise</a:t>
-            </a:r>
-          </a:p>
-        </p:txBody>
-      </p:sp>
-      <p:sp>
-        <p:nvSpPr>
-          <p:cNvPr id="21" name="Rounded Rectangle 20"/>
-          <p:cNvSpPr/>
-          <p:nvPr/>
-        </p:nvSpPr>
-        <p:spPr>
-          <a:xfrm>
-            <a:off x="8972321" y="4046220"/>
-            <a:ext cx="2670733" cy="1234439"/>
-          </a:xfrm>
-          <a:prstGeom prst="roundRect">
-            <a:avLst>
-              <a:gd name="adj" fmla="val 6000"/>
-            </a:avLst>
-          </a:prstGeom>
-          <a:solidFill>
-            <a:srgbClr val="EAF3FF"/>
-          </a:solidFill>
-          <a:ln>
-            <a:noFill/>
-          </a:ln>
-          <a:effectLst/>
-        </p:spPr>
-        <p:style>
-          <a:lnRef idx="1">
-            <a:schemeClr val="accent1"/>
-          </a:lnRef>
-          <a:fillRef idx="3">
-            <a:schemeClr val="accent1"/>
-          </a:fillRef>
-          <a:effectRef idx="2">
-            <a:schemeClr val="accent1"/>
-          </a:effectRef>
-          <a:fontRef idx="minor">
-            <a:schemeClr val="lt1"/>
-          </a:fontRef>
-        </p:style>
-        <p:txBody>
-          <a:bodyPr rtlCol="0" anchor="ctr"/>
-          <a:lstStyle/>
-          <a:p/>
-        </p:txBody>
-      </p:sp>
-      <p:sp>
-        <p:nvSpPr>
-          <p:cNvPr id="22" name="TextBox 21"/>
-          <p:cNvSpPr txBox="1"/>
-          <p:nvPr/>
-        </p:nvSpPr>
-        <p:spPr>
-          <a:xfrm>
-            <a:off x="9109481" y="4183380"/>
-            <a:ext cx="2396413" cy="960119"/>
-          </a:xfrm>
-          <a:prstGeom prst="rect">
-            <a:avLst/>
-          </a:prstGeom>
-          <a:noFill/>
-        </p:spPr>
-        <p:txBody>
-          <a:bodyPr wrap="square" anchor="t" lIns="0" rIns="0" tIns="0" bIns="0"/>
-          <a:lstStyle/>
-          <a:p>
-            <a:pPr algn="l"/>
-            <a:r>
-              <a:rPr sz="1800" b="0" i="0">
-                <a:solidFill>
-                  <a:srgbClr val="202122"/>
-                </a:solidFill>
-                <a:latin typeface="Calibri"/>
-              </a:rPr>
-              <a:t>To third normal form.</a:t>
+              <a:t>Check licences and ownership; work legally and ethically.</a:t>
             </a:r>
           </a:p>
         </p:txBody>
@@ -7209,7 +10477,7 @@
                 </a:solidFill>
                 <a:latin typeface="Cambria"/>
               </a:rPr>
-              <a:t>Platforms and integration</a:t>
+              <a:t>Quick check: Assets and AI</a:t>
             </a:r>
           </a:p>
         </p:txBody>
@@ -7282,58 +10550,14 @@
       </p:sp>
       <p:sp>
         <p:nvSpPr>
-          <p:cNvPr id="6" name="Rounded Rectangle 5"/>
+          <p:cNvPr id="6" name="Oval 5"/>
           <p:cNvSpPr/>
           <p:nvPr/>
         </p:nvSpPr>
         <p:spPr>
           <a:xfrm>
-            <a:off x="548640" y="1600200"/>
-            <a:ext cx="5410047" cy="2148840"/>
-          </a:xfrm>
-          <a:prstGeom prst="roundRect">
-            <a:avLst>
-              <a:gd name="adj" fmla="val 6000"/>
-            </a:avLst>
-          </a:prstGeom>
-          <a:solidFill>
-            <a:srgbClr val="EAF3FF"/>
-          </a:solidFill>
-          <a:ln>
-            <a:noFill/>
-          </a:ln>
-          <a:effectLst/>
-        </p:spPr>
-        <p:style>
-          <a:lnRef idx="1">
-            <a:schemeClr val="accent1"/>
-          </a:lnRef>
-          <a:fillRef idx="3">
-            <a:schemeClr val="accent1"/>
-          </a:fillRef>
-          <a:effectRef idx="2">
-            <a:schemeClr val="accent1"/>
-          </a:effectRef>
-          <a:fontRef idx="minor">
-            <a:schemeClr val="lt1"/>
-          </a:fontRef>
-        </p:style>
-        <p:txBody>
-          <a:bodyPr rtlCol="0" anchor="ctr"/>
-          <a:lstStyle/>
-          <a:p/>
-        </p:txBody>
-      </p:sp>
-      <p:sp>
-        <p:nvSpPr>
-          <p:cNvPr id="7" name="Oval 6"/>
-          <p:cNvSpPr/>
-          <p:nvPr/>
-        </p:nvSpPr>
-        <p:spPr>
-          <a:xfrm>
-            <a:off x="777240" y="1828800"/>
-            <a:ext cx="457200" cy="457200"/>
+            <a:off x="548640" y="1691640"/>
+            <a:ext cx="502920" cy="502920"/>
           </a:xfrm>
           <a:prstGeom prst="ellipse">
             <a:avLst/>
@@ -7366,7 +10590,7 @@
           <a:p>
             <a:pPr algn="ctr"/>
             <a:r>
-              <a:rPr sz="1500" b="1">
+              <a:rPr sz="1600" b="1">
                 <a:solidFill>
                   <a:srgbClr val="202122"/>
                 </a:solidFill>
@@ -7379,124 +10603,47 @@
       </p:sp>
       <p:sp>
         <p:nvSpPr>
-          <p:cNvPr id="8" name="TextBox 7"/>
-          <p:cNvSpPr txBox="1"/>
-          <p:nvPr/>
-        </p:nvSpPr>
-        <p:spPr>
-          <a:xfrm>
-            <a:off x="1371600" y="1801368"/>
-            <a:ext cx="4404207" cy="512064"/>
-          </a:xfrm>
-          <a:prstGeom prst="rect">
-            <a:avLst/>
-          </a:prstGeom>
-          <a:noFill/>
-        </p:spPr>
-        <p:txBody>
-          <a:bodyPr wrap="square" anchor="ctr" lIns="0" rIns="0" tIns="0" bIns="0"/>
+          <p:cNvPr id="7" name="TextBox 6"/>
+          <p:cNvSpPr txBox="1"/>
+          <p:nvPr/>
+        </p:nvSpPr>
+        <p:spPr>
+          <a:xfrm>
+            <a:off x="1371600" y="1645920"/>
+            <a:ext cx="10271455" cy="1188720"/>
+          </a:xfrm>
+          <a:prstGeom prst="rect">
+            <a:avLst/>
+          </a:prstGeom>
+          <a:noFill/>
+        </p:spPr>
+        <p:txBody>
+          <a:bodyPr wrap="square" anchor="t" lIns="0" rIns="0" tIns="0" bIns="0"/>
           <a:lstStyle/>
           <a:p>
             <a:pPr algn="l"/>
             <a:r>
-              <a:rPr sz="1900" b="1" i="0">
-                <a:solidFill>
-                  <a:srgbClr val="03306E"/>
-                </a:solidFill>
-                <a:latin typeface="Calibri"/>
-              </a:rPr>
-              <a:t>Target platforms</a:t>
-            </a:r>
-          </a:p>
-        </p:txBody>
-      </p:sp>
-      <p:sp>
-        <p:nvSpPr>
-          <p:cNvPr id="9" name="TextBox 8"/>
-          <p:cNvSpPr txBox="1"/>
-          <p:nvPr/>
-        </p:nvSpPr>
-        <p:spPr>
-          <a:xfrm>
-            <a:off x="777240" y="2468880"/>
-            <a:ext cx="4952847" cy="1143000"/>
-          </a:xfrm>
-          <a:prstGeom prst="rect">
-            <a:avLst/>
-          </a:prstGeom>
-          <a:noFill/>
-        </p:spPr>
-        <p:txBody>
-          <a:bodyPr wrap="square" anchor="t" lIns="0" rIns="0" tIns="0" bIns="0"/>
-          <a:lstStyle/>
-          <a:p>
-            <a:pPr algn="l"/>
-            <a:r>
-              <a:rPr sz="2000" b="0" i="0">
+              <a:rPr sz="2400" b="0" i="0">
                 <a:solidFill>
                   <a:srgbClr val="202122"/>
                 </a:solidFill>
                 <a:latin typeface="Calibri"/>
               </a:rPr>
-              <a:t>OS, file system, physical or virtual servers, language stack, mobile or web.</a:t>
-            </a:r>
-          </a:p>
-        </p:txBody>
-      </p:sp>
-      <p:sp>
-        <p:nvSpPr>
-          <p:cNvPr id="10" name="Rounded Rectangle 9"/>
+              <a:t>Name three factors when selecting an image asset.</a:t>
+            </a:r>
+          </a:p>
+        </p:txBody>
+      </p:sp>
+      <p:sp>
+        <p:nvSpPr>
+          <p:cNvPr id="8" name="Oval 7"/>
           <p:cNvSpPr/>
           <p:nvPr/>
         </p:nvSpPr>
         <p:spPr>
           <a:xfrm>
-            <a:off x="6233007" y="1600200"/>
-            <a:ext cx="5410047" cy="2148840"/>
-          </a:xfrm>
-          <a:prstGeom prst="roundRect">
-            <a:avLst>
-              <a:gd name="adj" fmla="val 6000"/>
-            </a:avLst>
-          </a:prstGeom>
-          <a:solidFill>
-            <a:srgbClr val="EAF3FF"/>
-          </a:solidFill>
-          <a:ln>
-            <a:noFill/>
-          </a:ln>
-          <a:effectLst/>
-        </p:spPr>
-        <p:style>
-          <a:lnRef idx="1">
-            <a:schemeClr val="accent1"/>
-          </a:lnRef>
-          <a:fillRef idx="3">
-            <a:schemeClr val="accent1"/>
-          </a:fillRef>
-          <a:effectRef idx="2">
-            <a:schemeClr val="accent1"/>
-          </a:effectRef>
-          <a:fontRef idx="minor">
-            <a:schemeClr val="lt1"/>
-          </a:fontRef>
-        </p:style>
-        <p:txBody>
-          <a:bodyPr rtlCol="0" anchor="ctr"/>
-          <a:lstStyle/>
-          <a:p/>
-        </p:txBody>
-      </p:sp>
-      <p:sp>
-        <p:nvSpPr>
-          <p:cNvPr id="11" name="Oval 10"/>
-          <p:cNvSpPr/>
-          <p:nvPr/>
-        </p:nvSpPr>
-        <p:spPr>
-          <a:xfrm>
-            <a:off x="6461607" y="1828800"/>
-            <a:ext cx="457200" cy="457200"/>
+            <a:off x="548640" y="3108960"/>
+            <a:ext cx="502920" cy="502920"/>
           </a:xfrm>
           <a:prstGeom prst="ellipse">
             <a:avLst/>
@@ -7529,7 +10676,7 @@
           <a:p>
             <a:pPr algn="ctr"/>
             <a:r>
-              <a:rPr sz="1500" b="1">
+              <a:rPr sz="1600" b="1">
                 <a:solidFill>
                   <a:srgbClr val="202122"/>
                 </a:solidFill>
@@ -7542,124 +10689,47 @@
       </p:sp>
       <p:sp>
         <p:nvSpPr>
-          <p:cNvPr id="12" name="TextBox 11"/>
-          <p:cNvSpPr txBox="1"/>
-          <p:nvPr/>
-        </p:nvSpPr>
-        <p:spPr>
-          <a:xfrm>
-            <a:off x="7055967" y="1801368"/>
-            <a:ext cx="4404207" cy="512064"/>
-          </a:xfrm>
-          <a:prstGeom prst="rect">
-            <a:avLst/>
-          </a:prstGeom>
-          <a:noFill/>
-        </p:spPr>
-        <p:txBody>
-          <a:bodyPr wrap="square" anchor="ctr" lIns="0" rIns="0" tIns="0" bIns="0"/>
+          <p:cNvPr id="9" name="TextBox 8"/>
+          <p:cNvSpPr txBox="1"/>
+          <p:nvPr/>
+        </p:nvSpPr>
+        <p:spPr>
+          <a:xfrm>
+            <a:off x="1371600" y="3063240"/>
+            <a:ext cx="10271455" cy="1188720"/>
+          </a:xfrm>
+          <a:prstGeom prst="rect">
+            <a:avLst/>
+          </a:prstGeom>
+          <a:noFill/>
+        </p:spPr>
+        <p:txBody>
+          <a:bodyPr wrap="square" anchor="t" lIns="0" rIns="0" tIns="0" bIns="0"/>
           <a:lstStyle/>
           <a:p>
             <a:pPr algn="l"/>
             <a:r>
-              <a:rPr sz="1900" b="1" i="0">
-                <a:solidFill>
-                  <a:srgbClr val="03306E"/>
-                </a:solidFill>
-                <a:latin typeface="Calibri"/>
-              </a:rPr>
-              <a:t>Local or remote</a:t>
-            </a:r>
-          </a:p>
-        </p:txBody>
-      </p:sp>
-      <p:sp>
-        <p:nvSpPr>
-          <p:cNvPr id="13" name="TextBox 12"/>
-          <p:cNvSpPr txBox="1"/>
-          <p:nvPr/>
-        </p:nvSpPr>
-        <p:spPr>
-          <a:xfrm>
-            <a:off x="6461607" y="2468880"/>
-            <a:ext cx="4952847" cy="1143000"/>
-          </a:xfrm>
-          <a:prstGeom prst="rect">
-            <a:avLst/>
-          </a:prstGeom>
-          <a:noFill/>
-        </p:spPr>
-        <p:txBody>
-          <a:bodyPr wrap="square" anchor="t" lIns="0" rIns="0" tIns="0" bIns="0"/>
-          <a:lstStyle/>
-          <a:p>
-            <a:pPr algn="l"/>
-            <a:r>
-              <a:rPr sz="2000" b="0" i="0">
+              <a:rPr sz="2400" b="0" i="0">
                 <a:solidFill>
                   <a:srgbClr val="202122"/>
                 </a:solidFill>
                 <a:latin typeface="Calibri"/>
               </a:rPr>
-              <a:t>What runs on the device, what runs on the server.</a:t>
-            </a:r>
-          </a:p>
-        </p:txBody>
-      </p:sp>
-      <p:sp>
-        <p:nvSpPr>
-          <p:cNvPr id="14" name="Rounded Rectangle 13"/>
+              <a:t>Why does asset size matter on mobile?</a:t>
+            </a:r>
+          </a:p>
+        </p:txBody>
+      </p:sp>
+      <p:sp>
+        <p:nvSpPr>
+          <p:cNvPr id="10" name="Oval 9"/>
           <p:cNvSpPr/>
           <p:nvPr/>
         </p:nvSpPr>
         <p:spPr>
           <a:xfrm>
-            <a:off x="548640" y="4023360"/>
-            <a:ext cx="5410047" cy="2148840"/>
-          </a:xfrm>
-          <a:prstGeom prst="roundRect">
-            <a:avLst>
-              <a:gd name="adj" fmla="val 6000"/>
-            </a:avLst>
-          </a:prstGeom>
-          <a:solidFill>
-            <a:srgbClr val="EAF3FF"/>
-          </a:solidFill>
-          <a:ln>
-            <a:noFill/>
-          </a:ln>
-          <a:effectLst/>
-        </p:spPr>
-        <p:style>
-          <a:lnRef idx="1">
-            <a:schemeClr val="accent1"/>
-          </a:lnRef>
-          <a:fillRef idx="3">
-            <a:schemeClr val="accent1"/>
-          </a:fillRef>
-          <a:effectRef idx="2">
-            <a:schemeClr val="accent1"/>
-          </a:effectRef>
-          <a:fontRef idx="minor">
-            <a:schemeClr val="lt1"/>
-          </a:fontRef>
-        </p:style>
-        <p:txBody>
-          <a:bodyPr rtlCol="0" anchor="ctr"/>
-          <a:lstStyle/>
-          <a:p/>
-        </p:txBody>
-      </p:sp>
-      <p:sp>
-        <p:nvSpPr>
-          <p:cNvPr id="15" name="Oval 14"/>
-          <p:cNvSpPr/>
-          <p:nvPr/>
-        </p:nvSpPr>
-        <p:spPr>
-          <a:xfrm>
-            <a:off x="777240" y="4251960"/>
-            <a:ext cx="457200" cy="457200"/>
+            <a:off x="548640" y="4526280"/>
+            <a:ext cx="502920" cy="502920"/>
           </a:xfrm>
           <a:prstGeom prst="ellipse">
             <a:avLst/>
@@ -7692,7 +10762,7 @@
           <a:p>
             <a:pPr algn="ctr"/>
             <a:r>
-              <a:rPr sz="1500" b="1">
+              <a:rPr sz="1600" b="1">
                 <a:solidFill>
                   <a:srgbClr val="202122"/>
                 </a:solidFill>
@@ -7705,47 +10775,47 @@
       </p:sp>
       <p:sp>
         <p:nvSpPr>
-          <p:cNvPr id="16" name="TextBox 15"/>
-          <p:cNvSpPr txBox="1"/>
-          <p:nvPr/>
-        </p:nvSpPr>
-        <p:spPr>
-          <a:xfrm>
-            <a:off x="1371600" y="4224528"/>
-            <a:ext cx="4404207" cy="512064"/>
-          </a:xfrm>
-          <a:prstGeom prst="rect">
-            <a:avLst/>
-          </a:prstGeom>
-          <a:noFill/>
-        </p:spPr>
-        <p:txBody>
-          <a:bodyPr wrap="square" anchor="ctr" lIns="0" rIns="0" tIns="0" bIns="0"/>
+          <p:cNvPr id="11" name="TextBox 10"/>
+          <p:cNvSpPr txBox="1"/>
+          <p:nvPr/>
+        </p:nvSpPr>
+        <p:spPr>
+          <a:xfrm>
+            <a:off x="1371600" y="4480560"/>
+            <a:ext cx="10271455" cy="1188720"/>
+          </a:xfrm>
+          <a:prstGeom prst="rect">
+            <a:avLst/>
+          </a:prstGeom>
+          <a:noFill/>
+        </p:spPr>
+        <p:txBody>
+          <a:bodyPr wrap="square" anchor="t" lIns="0" rIns="0" tIns="0" bIns="0"/>
           <a:lstStyle/>
           <a:p>
             <a:pPr algn="l"/>
             <a:r>
-              <a:rPr sz="1900" b="1" i="0">
-                <a:solidFill>
-                  <a:srgbClr val="03306E"/>
-                </a:solidFill>
-                <a:latin typeface="Calibri"/>
-              </a:rPr>
-              <a:t>Connections</a:t>
-            </a:r>
-          </a:p>
-        </p:txBody>
-      </p:sp>
-      <p:sp>
-        <p:nvSpPr>
-          <p:cNvPr id="17" name="TextBox 16"/>
-          <p:cNvSpPr txBox="1"/>
-          <p:nvPr/>
-        </p:nvSpPr>
-        <p:spPr>
-          <a:xfrm>
-            <a:off x="777240" y="4892040"/>
-            <a:ext cx="4952847" cy="1143000"/>
+              <a:rPr sz="2400" b="0" i="0">
+                <a:solidFill>
+                  <a:srgbClr val="202122"/>
+                </a:solidFill>
+                <a:latin typeface="Calibri"/>
+              </a:rPr>
+              <a:t>What should you check when using AI-generated assets?</a:t>
+            </a:r>
+          </a:p>
+        </p:txBody>
+      </p:sp>
+      <p:sp>
+        <p:nvSpPr>
+          <p:cNvPr id="12" name="TextBox 11"/>
+          <p:cNvSpPr txBox="1"/>
+          <p:nvPr/>
+        </p:nvSpPr>
+        <p:spPr>
+          <a:xfrm>
+            <a:off x="548640" y="5852160"/>
+            <a:ext cx="11094415" cy="365760"/>
           </a:xfrm>
           <a:prstGeom prst="rect">
             <a:avLst/>
@@ -7758,176 +10828,13 @@
           <a:p>
             <a:pPr algn="l"/>
             <a:r>
-              <a:rPr sz="2000" b="0" i="0">
-                <a:solidFill>
-                  <a:srgbClr val="202122"/>
-                </a:solidFill>
-                <a:latin typeface="Calibri"/>
-              </a:rPr>
-              <a:t>How data moves, e.g. remote system calls; system boundaries.</a:t>
-            </a:r>
-          </a:p>
-        </p:txBody>
-      </p:sp>
-      <p:sp>
-        <p:nvSpPr>
-          <p:cNvPr id="18" name="Rounded Rectangle 17"/>
-          <p:cNvSpPr/>
-          <p:nvPr/>
-        </p:nvSpPr>
-        <p:spPr>
-          <a:xfrm>
-            <a:off x="6233007" y="4023360"/>
-            <a:ext cx="5410047" cy="2148840"/>
-          </a:xfrm>
-          <a:prstGeom prst="roundRect">
-            <a:avLst>
-              <a:gd name="adj" fmla="val 6000"/>
-            </a:avLst>
-          </a:prstGeom>
-          <a:solidFill>
-            <a:srgbClr val="EAF3FF"/>
-          </a:solidFill>
-          <a:ln>
-            <a:noFill/>
-          </a:ln>
-          <a:effectLst/>
-        </p:spPr>
-        <p:style>
-          <a:lnRef idx="1">
-            <a:schemeClr val="accent1"/>
-          </a:lnRef>
-          <a:fillRef idx="3">
-            <a:schemeClr val="accent1"/>
-          </a:fillRef>
-          <a:effectRef idx="2">
-            <a:schemeClr val="accent1"/>
-          </a:effectRef>
-          <a:fontRef idx="minor">
-            <a:schemeClr val="lt1"/>
-          </a:fontRef>
-        </p:style>
-        <p:txBody>
-          <a:bodyPr rtlCol="0" anchor="ctr"/>
-          <a:lstStyle/>
-          <a:p/>
-        </p:txBody>
-      </p:sp>
-      <p:sp>
-        <p:nvSpPr>
-          <p:cNvPr id="19" name="Oval 18"/>
-          <p:cNvSpPr/>
-          <p:nvPr/>
-        </p:nvSpPr>
-        <p:spPr>
-          <a:xfrm>
-            <a:off x="6461607" y="4251960"/>
-            <a:ext cx="457200" cy="457200"/>
-          </a:xfrm>
-          <a:prstGeom prst="ellipse">
-            <a:avLst/>
-          </a:prstGeom>
-          <a:solidFill>
-            <a:srgbClr val="33C17A"/>
-          </a:solidFill>
-          <a:ln>
-            <a:noFill/>
-          </a:ln>
-          <a:effectLst/>
-        </p:spPr>
-        <p:style>
-          <a:lnRef idx="1">
-            <a:schemeClr val="accent1"/>
-          </a:lnRef>
-          <a:fillRef idx="3">
-            <a:schemeClr val="accent1"/>
-          </a:fillRef>
-          <a:effectRef idx="2">
-            <a:schemeClr val="accent1"/>
-          </a:effectRef>
-          <a:fontRef idx="minor">
-            <a:schemeClr val="lt1"/>
-          </a:fontRef>
-        </p:style>
-        <p:txBody>
-          <a:bodyPr rtlCol="0" anchor="ctr" lIns="0" rIns="0" tIns="0" bIns="0"/>
-          <a:lstStyle/>
-          <a:p>
-            <a:pPr algn="ctr"/>
-            <a:r>
-              <a:rPr sz="1500" b="1">
-                <a:solidFill>
-                  <a:srgbClr val="202122"/>
-                </a:solidFill>
-                <a:latin typeface="Calibri"/>
-              </a:rPr>
-              <a:t>4</a:t>
-            </a:r>
-          </a:p>
-        </p:txBody>
-      </p:sp>
-      <p:sp>
-        <p:nvSpPr>
-          <p:cNvPr id="20" name="TextBox 19"/>
-          <p:cNvSpPr txBox="1"/>
-          <p:nvPr/>
-        </p:nvSpPr>
-        <p:spPr>
-          <a:xfrm>
-            <a:off x="7055967" y="4224528"/>
-            <a:ext cx="4404207" cy="512064"/>
-          </a:xfrm>
-          <a:prstGeom prst="rect">
-            <a:avLst/>
-          </a:prstGeom>
-          <a:noFill/>
-        </p:spPr>
-        <p:txBody>
-          <a:bodyPr wrap="square" anchor="ctr" lIns="0" rIns="0" tIns="0" bIns="0"/>
-          <a:lstStyle/>
-          <a:p>
-            <a:pPr algn="l"/>
-            <a:r>
-              <a:rPr sz="1900" b="1" i="0">
-                <a:solidFill>
-                  <a:srgbClr val="03306E"/>
-                </a:solidFill>
-                <a:latin typeface="Calibri"/>
-              </a:rPr>
-              <a:t>External systems</a:t>
-            </a:r>
-          </a:p>
-        </p:txBody>
-      </p:sp>
-      <p:sp>
-        <p:nvSpPr>
-          <p:cNvPr id="21" name="TextBox 20"/>
-          <p:cNvSpPr txBox="1"/>
-          <p:nvPr/>
-        </p:nvSpPr>
-        <p:spPr>
-          <a:xfrm>
-            <a:off x="6461607" y="4892040"/>
-            <a:ext cx="4952847" cy="1143000"/>
-          </a:xfrm>
-          <a:prstGeom prst="rect">
-            <a:avLst/>
-          </a:prstGeom>
-          <a:noFill/>
-        </p:spPr>
-        <p:txBody>
-          <a:bodyPr wrap="square" anchor="t" lIns="0" rIns="0" tIns="0" bIns="0"/>
-          <a:lstStyle/>
-          <a:p>
-            <a:pPr algn="l"/>
-            <a:r>
-              <a:rPr sz="2000" b="0" i="0">
-                <a:solidFill>
-                  <a:srgbClr val="202122"/>
-                </a:solidFill>
-                <a:latin typeface="Calibri"/>
-              </a:rPr>
-              <a:t>Third-party feeds such as sports data.</a:t>
+              <a:rPr sz="1300" b="0" i="1">
+                <a:solidFill>
+                  <a:srgbClr val="54595D"/>
+                </a:solidFill>
+                <a:latin typeface="Calibri"/>
+              </a:rPr>
+              <a:t>Answer on mini whiteboards or in your book. Answers are in the speaker notes.</a:t>
             </a:r>
           </a:p>
         </p:txBody>
@@ -8019,7 +10926,7 @@
                 </a:solidFill>
                 <a:latin typeface="Cambria"/>
               </a:rPr>
-              <a:t>Check your understanding</a:t>
+              <a:t>Designing a database</a:t>
             </a:r>
           </a:p>
         </p:txBody>
@@ -8092,14 +10999,129 @@
       </p:sp>
       <p:sp>
         <p:nvSpPr>
-          <p:cNvPr id="6" name="Oval 5"/>
+          <p:cNvPr id="6" name="TextBox 5"/>
+          <p:cNvSpPr txBox="1"/>
+          <p:nvPr/>
+        </p:nvSpPr>
+        <p:spPr>
+          <a:xfrm>
+            <a:off x="548640" y="1554480"/>
+            <a:ext cx="6720840" cy="4617720"/>
+          </a:xfrm>
+          <a:prstGeom prst="rect">
+            <a:avLst/>
+          </a:prstGeom>
+          <a:noFill/>
+        </p:spPr>
+        <p:txBody>
+          <a:bodyPr wrap="square" lIns="0" rIns="0" tIns="0" bIns="0">
+            <a:spAutoFit/>
+          </a:bodyPr>
+          <a:lstStyle/>
+          <a:p>
+            <a:pPr>
+              <a:spcAft>
+                <a:spcPts val="1320"/>
+              </a:spcAft>
+            </a:pPr>
+            <a:r>
+              <a:rPr sz="2200" b="0">
+                <a:solidFill>
+                  <a:srgbClr val="202122"/>
+                </a:solidFill>
+                <a:latin typeface="Calibri"/>
+              </a:rPr>
+              <a:t>Databases support user management, e-commerce (stock, orders, personalisation), diagnostics and performance analysis.</a:t>
+            </a:r>
+          </a:p>
+          <a:p>
+            <a:pPr>
+              <a:spcAft>
+                <a:spcPts val="1320"/>
+              </a:spcAft>
+            </a:pPr>
+            <a:r>
+              <a:rPr sz="2200" b="0">
+                <a:solidFill>
+                  <a:srgbClr val="202122"/>
+                </a:solidFill>
+                <a:latin typeface="Calibri"/>
+              </a:rPr>
+              <a:t>Design starts with a data dictionary listing every field, its data type, size and validation rules. An entity relationship diagram (ERD) shows the entities (such as Customer, Order, Product) and the relationships between them.</a:t>
+            </a:r>
+          </a:p>
+          <a:p>
+            <a:pPr>
+              <a:spcAft>
+                <a:spcPts val="1320"/>
+              </a:spcAft>
+            </a:pPr>
+            <a:r>
+              <a:rPr sz="2200" b="0">
+                <a:solidFill>
+                  <a:srgbClr val="202122"/>
+                </a:solidFill>
+                <a:latin typeface="Calibri"/>
+              </a:rPr>
+              <a:t>Normalisation to third normal form removes duplicated data by splitting it into linked tables using primary and foreign keys, so each fact is stored once.</a:t>
+            </a:r>
+          </a:p>
+        </p:txBody>
+      </p:sp>
+      <p:sp>
+        <p:nvSpPr>
+          <p:cNvPr id="7" name="Rounded Rectangle 6"/>
           <p:cNvSpPr/>
           <p:nvPr/>
         </p:nvSpPr>
         <p:spPr>
           <a:xfrm>
-            <a:off x="548640" y="1618488"/>
-            <a:ext cx="411480" cy="411480"/>
+            <a:off x="7772400" y="1554480"/>
+            <a:ext cx="3867912" cy="4526280"/>
+          </a:xfrm>
+          <a:prstGeom prst="roundRect">
+            <a:avLst>
+              <a:gd name="adj" fmla="val 8000"/>
+            </a:avLst>
+          </a:prstGeom>
+          <a:solidFill>
+            <a:srgbClr val="03306E"/>
+          </a:solidFill>
+          <a:ln>
+            <a:noFill/>
+          </a:ln>
+          <a:effectLst/>
+        </p:spPr>
+        <p:style>
+          <a:lnRef idx="1">
+            <a:schemeClr val="accent1"/>
+          </a:lnRef>
+          <a:fillRef idx="3">
+            <a:schemeClr val="accent1"/>
+          </a:fillRef>
+          <a:effectRef idx="2">
+            <a:schemeClr val="accent1"/>
+          </a:effectRef>
+          <a:fontRef idx="minor">
+            <a:schemeClr val="lt1"/>
+          </a:fontRef>
+        </p:style>
+        <p:txBody>
+          <a:bodyPr rtlCol="0" anchor="ctr"/>
+          <a:lstStyle/>
+          <a:p/>
+        </p:txBody>
+      </p:sp>
+      <p:sp>
+        <p:nvSpPr>
+          <p:cNvPr id="8" name="Oval 7"/>
+          <p:cNvSpPr/>
+          <p:nvPr/>
+        </p:nvSpPr>
+        <p:spPr>
+          <a:xfrm>
+            <a:off x="8046720" y="1828800"/>
+            <a:ext cx="548640" cy="548640"/>
           </a:xfrm>
           <a:prstGeom prst="ellipse">
             <a:avLst/>
@@ -8132,27 +11154,27 @@
           <a:p>
             <a:pPr algn="ctr"/>
             <a:r>
-              <a:rPr sz="1400" b="1">
+              <a:rPr sz="1300" b="1">
                 <a:solidFill>
                   <a:srgbClr val="202122"/>
                 </a:solidFill>
                 <a:latin typeface="Calibri"/>
               </a:rPr>
-              <a:t>1</a:t>
-            </a:r>
-          </a:p>
-        </p:txBody>
-      </p:sp>
-      <p:sp>
-        <p:nvSpPr>
-          <p:cNvPr id="7" name="TextBox 6"/>
-          <p:cNvSpPr txBox="1"/>
-          <p:nvPr/>
-        </p:nvSpPr>
-        <p:spPr>
-          <a:xfrm>
-            <a:off x="1234440" y="1600200"/>
-            <a:ext cx="10408615" cy="1030986"/>
+              <a:t>e.g.</a:t>
+            </a:r>
+          </a:p>
+        </p:txBody>
+      </p:sp>
+      <p:sp>
+        <p:nvSpPr>
+          <p:cNvPr id="9" name="TextBox 8"/>
+          <p:cNvSpPr txBox="1"/>
+          <p:nvPr/>
+        </p:nvSpPr>
+        <p:spPr>
+          <a:xfrm>
+            <a:off x="8046720" y="2560320"/>
+            <a:ext cx="3291840" cy="365760"/>
           </a:xfrm>
           <a:prstGeom prst="rect">
             <a:avLst/>
@@ -8165,80 +11187,27 @@
           <a:p>
             <a:pPr algn="l"/>
             <a:r>
-              <a:rPr sz="2200" b="0" i="0">
-                <a:solidFill>
-                  <a:srgbClr val="202122"/>
-                </a:solidFill>
-                <a:latin typeface="Calibri"/>
-              </a:rPr>
-              <a:t>What is a data dictionary?</a:t>
-            </a:r>
-          </a:p>
-        </p:txBody>
-      </p:sp>
-      <p:sp>
-        <p:nvSpPr>
-          <p:cNvPr id="8" name="Oval 7"/>
-          <p:cNvSpPr/>
-          <p:nvPr/>
-        </p:nvSpPr>
-        <p:spPr>
-          <a:xfrm>
-            <a:off x="548640" y="2814066"/>
-            <a:ext cx="411480" cy="411480"/>
-          </a:xfrm>
-          <a:prstGeom prst="ellipse">
-            <a:avLst/>
-          </a:prstGeom>
-          <a:solidFill>
-            <a:srgbClr val="33C17A"/>
-          </a:solidFill>
-          <a:ln>
-            <a:noFill/>
-          </a:ln>
-          <a:effectLst/>
-        </p:spPr>
-        <p:style>
-          <a:lnRef idx="1">
-            <a:schemeClr val="accent1"/>
-          </a:lnRef>
-          <a:fillRef idx="3">
-            <a:schemeClr val="accent1"/>
-          </a:fillRef>
-          <a:effectRef idx="2">
-            <a:schemeClr val="accent1"/>
-          </a:effectRef>
-          <a:fontRef idx="minor">
-            <a:schemeClr val="lt1"/>
-          </a:fontRef>
-        </p:style>
-        <p:txBody>
-          <a:bodyPr rtlCol="0" anchor="ctr" lIns="0" rIns="0" tIns="0" bIns="0"/>
-          <a:lstStyle/>
-          <a:p>
-            <a:pPr algn="ctr"/>
-            <a:r>
-              <a:rPr sz="1400" b="1">
-                <a:solidFill>
-                  <a:srgbClr val="202122"/>
-                </a:solidFill>
-                <a:latin typeface="Calibri"/>
-              </a:rPr>
-              <a:t>2</a:t>
-            </a:r>
-          </a:p>
-        </p:txBody>
-      </p:sp>
-      <p:sp>
-        <p:nvSpPr>
-          <p:cNvPr id="9" name="TextBox 8"/>
-          <p:cNvSpPr txBox="1"/>
-          <p:nvPr/>
-        </p:nvSpPr>
-        <p:spPr>
-          <a:xfrm>
-            <a:off x="1234440" y="2795778"/>
-            <a:ext cx="10408615" cy="1030986"/>
+              <a:rPr sz="1300" b="1" i="0">
+                <a:solidFill>
+                  <a:srgbClr val="A9C8F0"/>
+                </a:solidFill>
+                <a:latin typeface="Calibri"/>
+              </a:rPr>
+              <a:t>EXAMPLE</a:t>
+            </a:r>
+          </a:p>
+        </p:txBody>
+      </p:sp>
+      <p:sp>
+        <p:nvSpPr>
+          <p:cNvPr id="10" name="TextBox 9"/>
+          <p:cNvSpPr txBox="1"/>
+          <p:nvPr/>
+        </p:nvSpPr>
+        <p:spPr>
+          <a:xfrm>
+            <a:off x="8046720" y="2971800"/>
+            <a:ext cx="3291840" cy="2971800"/>
           </a:xfrm>
           <a:prstGeom prst="rect">
             <a:avLst/>
@@ -8251,185 +11220,13 @@
           <a:p>
             <a:pPr algn="l"/>
             <a:r>
-              <a:rPr sz="2200" b="0" i="0">
-                <a:solidFill>
-                  <a:srgbClr val="202122"/>
-                </a:solidFill>
-                <a:latin typeface="Calibri"/>
-              </a:rPr>
-              <a:t>What does normalisation reduce?</a:t>
-            </a:r>
-          </a:p>
-        </p:txBody>
-      </p:sp>
-      <p:sp>
-        <p:nvSpPr>
-          <p:cNvPr id="10" name="Oval 9"/>
-          <p:cNvSpPr/>
-          <p:nvPr/>
-        </p:nvSpPr>
-        <p:spPr>
-          <a:xfrm>
-            <a:off x="548640" y="4009644"/>
-            <a:ext cx="411480" cy="411480"/>
-          </a:xfrm>
-          <a:prstGeom prst="ellipse">
-            <a:avLst/>
-          </a:prstGeom>
-          <a:solidFill>
-            <a:srgbClr val="33C17A"/>
-          </a:solidFill>
-          <a:ln>
-            <a:noFill/>
-          </a:ln>
-          <a:effectLst/>
-        </p:spPr>
-        <p:style>
-          <a:lnRef idx="1">
-            <a:schemeClr val="accent1"/>
-          </a:lnRef>
-          <a:fillRef idx="3">
-            <a:schemeClr val="accent1"/>
-          </a:fillRef>
-          <a:effectRef idx="2">
-            <a:schemeClr val="accent1"/>
-          </a:effectRef>
-          <a:fontRef idx="minor">
-            <a:schemeClr val="lt1"/>
-          </a:fontRef>
-        </p:style>
-        <p:txBody>
-          <a:bodyPr rtlCol="0" anchor="ctr" lIns="0" rIns="0" tIns="0" bIns="0"/>
-          <a:lstStyle/>
-          <a:p>
-            <a:pPr algn="ctr"/>
-            <a:r>
-              <a:rPr sz="1400" b="1">
-                <a:solidFill>
-                  <a:srgbClr val="202122"/>
-                </a:solidFill>
-                <a:latin typeface="Calibri"/>
-              </a:rPr>
-              <a:t>3</a:t>
-            </a:r>
-          </a:p>
-        </p:txBody>
-      </p:sp>
-      <p:sp>
-        <p:nvSpPr>
-          <p:cNvPr id="11" name="TextBox 10"/>
-          <p:cNvSpPr txBox="1"/>
-          <p:nvPr/>
-        </p:nvSpPr>
-        <p:spPr>
-          <a:xfrm>
-            <a:off x="1234440" y="3991356"/>
-            <a:ext cx="10408615" cy="1030986"/>
-          </a:xfrm>
-          <a:prstGeom prst="rect">
-            <a:avLst/>
-          </a:prstGeom>
-          <a:noFill/>
-        </p:spPr>
-        <p:txBody>
-          <a:bodyPr wrap="square" anchor="t" lIns="0" rIns="0" tIns="0" bIns="0"/>
-          <a:lstStyle/>
-          <a:p>
-            <a:pPr algn="l"/>
-            <a:r>
-              <a:rPr sz="2200" b="0" i="0">
-                <a:solidFill>
-                  <a:srgbClr val="202122"/>
-                </a:solidFill>
-                <a:latin typeface="Calibri"/>
-              </a:rPr>
-              <a:t>Give one factor when selecting a video asset.</a:t>
-            </a:r>
-          </a:p>
-        </p:txBody>
-      </p:sp>
-      <p:sp>
-        <p:nvSpPr>
-          <p:cNvPr id="12" name="Oval 11"/>
-          <p:cNvSpPr/>
-          <p:nvPr/>
-        </p:nvSpPr>
-        <p:spPr>
-          <a:xfrm>
-            <a:off x="548640" y="5205221"/>
-            <a:ext cx="411480" cy="411480"/>
-          </a:xfrm>
-          <a:prstGeom prst="ellipse">
-            <a:avLst/>
-          </a:prstGeom>
-          <a:solidFill>
-            <a:srgbClr val="33C17A"/>
-          </a:solidFill>
-          <a:ln>
-            <a:noFill/>
-          </a:ln>
-          <a:effectLst/>
-        </p:spPr>
-        <p:style>
-          <a:lnRef idx="1">
-            <a:schemeClr val="accent1"/>
-          </a:lnRef>
-          <a:fillRef idx="3">
-            <a:schemeClr val="accent1"/>
-          </a:fillRef>
-          <a:effectRef idx="2">
-            <a:schemeClr val="accent1"/>
-          </a:effectRef>
-          <a:fontRef idx="minor">
-            <a:schemeClr val="lt1"/>
-          </a:fontRef>
-        </p:style>
-        <p:txBody>
-          <a:bodyPr rtlCol="0" anchor="ctr" lIns="0" rIns="0" tIns="0" bIns="0"/>
-          <a:lstStyle/>
-          <a:p>
-            <a:pPr algn="ctr"/>
-            <a:r>
-              <a:rPr sz="1400" b="1">
-                <a:solidFill>
-                  <a:srgbClr val="202122"/>
-                </a:solidFill>
-                <a:latin typeface="Calibri"/>
-              </a:rPr>
-              <a:t>4</a:t>
-            </a:r>
-          </a:p>
-        </p:txBody>
-      </p:sp>
-      <p:sp>
-        <p:nvSpPr>
-          <p:cNvPr id="13" name="TextBox 12"/>
-          <p:cNvSpPr txBox="1"/>
-          <p:nvPr/>
-        </p:nvSpPr>
-        <p:spPr>
-          <a:xfrm>
-            <a:off x="1234440" y="5186933"/>
-            <a:ext cx="10408615" cy="1030986"/>
-          </a:xfrm>
-          <a:prstGeom prst="rect">
-            <a:avLst/>
-          </a:prstGeom>
-          <a:noFill/>
-        </p:spPr>
-        <p:txBody>
-          <a:bodyPr wrap="square" anchor="t" lIns="0" rIns="0" tIns="0" bIns="0"/>
-          <a:lstStyle/>
-          <a:p>
-            <a:pPr algn="l"/>
-            <a:r>
-              <a:rPr sz="2200" b="0" i="0">
-                <a:solidFill>
-                  <a:srgbClr val="202122"/>
-                </a:solidFill>
-                <a:latin typeface="Calibri"/>
-              </a:rPr>
-              <a:t>What is a system boundary?</a:t>
+              <a:rPr sz="1900" b="0" i="0">
+                <a:solidFill>
+                  <a:srgbClr val="FFFFFF"/>
+                </a:solidFill>
+                <a:latin typeface="Cambria"/>
+              </a:rPr>
+              <a:t>Instead of storing a customer's address on every order, store it once in Customer and link each Order with a CustomerID foreign key.</a:t>
             </a:r>
           </a:p>
         </p:txBody>
@@ -8521,7 +11318,7 @@
                 </a:solidFill>
                 <a:latin typeface="Cambria"/>
               </a:rPr>
-              <a:t>Answers</a:t>
+              <a:t>Designing a database</a:t>
             </a:r>
           </a:p>
         </p:txBody>
@@ -8594,14 +11391,56 @@
       </p:sp>
       <p:sp>
         <p:nvSpPr>
-          <p:cNvPr id="6" name="Oval 5"/>
+          <p:cNvPr id="6" name="Rectangle 5"/>
           <p:cNvSpPr/>
           <p:nvPr/>
         </p:nvSpPr>
         <p:spPr>
           <a:xfrm>
-            <a:off x="548640" y="1618488"/>
-            <a:ext cx="411480" cy="411480"/>
+            <a:off x="1884006" y="2793492"/>
+            <a:ext cx="8423681" cy="36576"/>
+          </a:xfrm>
+          <a:prstGeom prst="rect">
+            <a:avLst/>
+          </a:prstGeom>
+          <a:solidFill>
+            <a:srgbClr val="A9C8F0"/>
+          </a:solidFill>
+          <a:ln>
+            <a:noFill/>
+          </a:ln>
+          <a:effectLst/>
+        </p:spPr>
+        <p:style>
+          <a:lnRef idx="1">
+            <a:schemeClr val="accent1"/>
+          </a:lnRef>
+          <a:fillRef idx="3">
+            <a:schemeClr val="accent1"/>
+          </a:fillRef>
+          <a:effectRef idx="2">
+            <a:schemeClr val="accent1"/>
+          </a:effectRef>
+          <a:fontRef idx="minor">
+            <a:schemeClr val="lt1"/>
+          </a:fontRef>
+        </p:style>
+        <p:txBody>
+          <a:bodyPr rtlCol="0" anchor="ctr"/>
+          <a:lstStyle/>
+          <a:p/>
+        </p:txBody>
+      </p:sp>
+      <p:sp>
+        <p:nvSpPr>
+          <p:cNvPr id="7" name="Oval 6"/>
+          <p:cNvSpPr/>
+          <p:nvPr/>
+        </p:nvSpPr>
+        <p:spPr>
+          <a:xfrm>
+            <a:off x="1563966" y="2491740"/>
+            <a:ext cx="640080" cy="640080"/>
           </a:xfrm>
           <a:prstGeom prst="ellipse">
             <a:avLst/>
@@ -8634,7 +11473,7 @@
           <a:p>
             <a:pPr algn="ctr"/>
             <a:r>
-              <a:rPr sz="1400" b="1">
+              <a:rPr sz="2000" b="1">
                 <a:solidFill>
                   <a:srgbClr val="202122"/>
                 </a:solidFill>
@@ -8647,14 +11486,14 @@
       </p:sp>
       <p:sp>
         <p:nvSpPr>
-          <p:cNvPr id="7" name="TextBox 6"/>
-          <p:cNvSpPr txBox="1"/>
-          <p:nvPr/>
-        </p:nvSpPr>
-        <p:spPr>
-          <a:xfrm>
-            <a:off x="1234440" y="1600200"/>
-            <a:ext cx="10408615" cy="1030986"/>
+          <p:cNvPr id="8" name="TextBox 7"/>
+          <p:cNvSpPr txBox="1"/>
+          <p:nvPr/>
+        </p:nvSpPr>
+        <p:spPr>
+          <a:xfrm>
+            <a:off x="548640" y="3268979"/>
+            <a:ext cx="2670733" cy="731520"/>
           </a:xfrm>
           <a:prstGeom prst="rect">
             <a:avLst/>
@@ -8665,40 +11504,106 @@
           <a:bodyPr wrap="square" anchor="t" lIns="0" rIns="0" tIns="0" bIns="0"/>
           <a:lstStyle/>
           <a:p>
+            <a:pPr algn="ctr"/>
+            <a:r>
+              <a:rPr sz="1700" b="1" i="0">
+                <a:solidFill>
+                  <a:srgbClr val="03306E"/>
+                </a:solidFill>
+                <a:latin typeface="Calibri"/>
+              </a:rPr>
+              <a:t>Purpose</a:t>
+            </a:r>
+          </a:p>
+        </p:txBody>
+      </p:sp>
+      <p:sp>
+        <p:nvSpPr>
+          <p:cNvPr id="9" name="Rounded Rectangle 8"/>
+          <p:cNvSpPr/>
+          <p:nvPr/>
+        </p:nvSpPr>
+        <p:spPr>
+          <a:xfrm>
+            <a:off x="548640" y="4046220"/>
+            <a:ext cx="2670733" cy="1234439"/>
+          </a:xfrm>
+          <a:prstGeom prst="roundRect">
+            <a:avLst>
+              <a:gd name="adj" fmla="val 6000"/>
+            </a:avLst>
+          </a:prstGeom>
+          <a:solidFill>
+            <a:srgbClr val="EAF3FF"/>
+          </a:solidFill>
+          <a:ln>
+            <a:noFill/>
+          </a:ln>
+          <a:effectLst/>
+        </p:spPr>
+        <p:style>
+          <a:lnRef idx="1">
+            <a:schemeClr val="accent1"/>
+          </a:lnRef>
+          <a:fillRef idx="3">
+            <a:schemeClr val="accent1"/>
+          </a:fillRef>
+          <a:effectRef idx="2">
+            <a:schemeClr val="accent1"/>
+          </a:effectRef>
+          <a:fontRef idx="minor">
+            <a:schemeClr val="lt1"/>
+          </a:fontRef>
+        </p:style>
+        <p:txBody>
+          <a:bodyPr rtlCol="0" anchor="ctr"/>
+          <a:lstStyle/>
+          <a:p/>
+        </p:txBody>
+      </p:sp>
+      <p:sp>
+        <p:nvSpPr>
+          <p:cNvPr id="10" name="TextBox 9"/>
+          <p:cNvSpPr txBox="1"/>
+          <p:nvPr/>
+        </p:nvSpPr>
+        <p:spPr>
+          <a:xfrm>
+            <a:off x="685800" y="4183380"/>
+            <a:ext cx="2396413" cy="960119"/>
+          </a:xfrm>
+          <a:prstGeom prst="rect">
+            <a:avLst/>
+          </a:prstGeom>
+          <a:noFill/>
+        </p:spPr>
+        <p:txBody>
+          <a:bodyPr wrap="square" anchor="t" lIns="0" rIns="0" tIns="0" bIns="0"/>
+          <a:lstStyle/>
+          <a:p>
             <a:pPr algn="l"/>
             <a:r>
               <a:rPr sz="1800" b="0" i="0">
                 <a:solidFill>
-                  <a:srgbClr val="54595D"/>
-                </a:solidFill>
-                <a:latin typeface="Calibri"/>
-              </a:rPr>
-              <a:t>What is a data dictionary?</a:t>
-            </a:r>
-          </a:p>
-          <a:p>
-            <a:r>
-              <a:rPr sz="1800" b="1">
-                <a:solidFill>
-                  <a:srgbClr val="03306E"/>
-                </a:solidFill>
-                <a:latin typeface="Calibri"/>
-              </a:rPr>
-              <a:t>A document describing every field, its type and rules.</a:t>
-            </a:r>
-          </a:p>
-        </p:txBody>
-      </p:sp>
-      <p:sp>
-        <p:nvSpPr>
-          <p:cNvPr id="8" name="Oval 7"/>
+                  <a:srgbClr val="202122"/>
+                </a:solidFill>
+                <a:latin typeface="Calibri"/>
+              </a:rPr>
+              <a:t>User management, e-commerce, diagnostics, performance.</a:t>
+            </a:r>
+          </a:p>
+        </p:txBody>
+      </p:sp>
+      <p:sp>
+        <p:nvSpPr>
+          <p:cNvPr id="11" name="Oval 10"/>
           <p:cNvSpPr/>
           <p:nvPr/>
         </p:nvSpPr>
         <p:spPr>
           <a:xfrm>
-            <a:off x="548640" y="2814066"/>
-            <a:ext cx="411480" cy="411480"/>
+            <a:off x="4371860" y="2491740"/>
+            <a:ext cx="640080" cy="640080"/>
           </a:xfrm>
           <a:prstGeom prst="ellipse">
             <a:avLst/>
@@ -8731,7 +11636,7 @@
           <a:p>
             <a:pPr algn="ctr"/>
             <a:r>
-              <a:rPr sz="1400" b="1">
+              <a:rPr sz="2000" b="1">
                 <a:solidFill>
                   <a:srgbClr val="202122"/>
                 </a:solidFill>
@@ -8744,14 +11649,14 @@
       </p:sp>
       <p:sp>
         <p:nvSpPr>
-          <p:cNvPr id="9" name="TextBox 8"/>
-          <p:cNvSpPr txBox="1"/>
-          <p:nvPr/>
-        </p:nvSpPr>
-        <p:spPr>
-          <a:xfrm>
-            <a:off x="1234440" y="2795778"/>
-            <a:ext cx="10408615" cy="1030986"/>
+          <p:cNvPr id="12" name="TextBox 11"/>
+          <p:cNvSpPr txBox="1"/>
+          <p:nvPr/>
+        </p:nvSpPr>
+        <p:spPr>
+          <a:xfrm>
+            <a:off x="3356533" y="3268979"/>
+            <a:ext cx="2670733" cy="731520"/>
           </a:xfrm>
           <a:prstGeom prst="rect">
             <a:avLst/>
@@ -8762,40 +11667,106 @@
           <a:bodyPr wrap="square" anchor="t" lIns="0" rIns="0" tIns="0" bIns="0"/>
           <a:lstStyle/>
           <a:p>
+            <a:pPr algn="ctr"/>
+            <a:r>
+              <a:rPr sz="1700" b="1" i="0">
+                <a:solidFill>
+                  <a:srgbClr val="03306E"/>
+                </a:solidFill>
+                <a:latin typeface="Calibri"/>
+              </a:rPr>
+              <a:t>Data dictionary</a:t>
+            </a:r>
+          </a:p>
+        </p:txBody>
+      </p:sp>
+      <p:sp>
+        <p:nvSpPr>
+          <p:cNvPr id="13" name="Rounded Rectangle 12"/>
+          <p:cNvSpPr/>
+          <p:nvPr/>
+        </p:nvSpPr>
+        <p:spPr>
+          <a:xfrm>
+            <a:off x="3356533" y="4046220"/>
+            <a:ext cx="2670733" cy="1234439"/>
+          </a:xfrm>
+          <a:prstGeom prst="roundRect">
+            <a:avLst>
+              <a:gd name="adj" fmla="val 6000"/>
+            </a:avLst>
+          </a:prstGeom>
+          <a:solidFill>
+            <a:srgbClr val="EAF3FF"/>
+          </a:solidFill>
+          <a:ln>
+            <a:noFill/>
+          </a:ln>
+          <a:effectLst/>
+        </p:spPr>
+        <p:style>
+          <a:lnRef idx="1">
+            <a:schemeClr val="accent1"/>
+          </a:lnRef>
+          <a:fillRef idx="3">
+            <a:schemeClr val="accent1"/>
+          </a:fillRef>
+          <a:effectRef idx="2">
+            <a:schemeClr val="accent1"/>
+          </a:effectRef>
+          <a:fontRef idx="minor">
+            <a:schemeClr val="lt1"/>
+          </a:fontRef>
+        </p:style>
+        <p:txBody>
+          <a:bodyPr rtlCol="0" anchor="ctr"/>
+          <a:lstStyle/>
+          <a:p/>
+        </p:txBody>
+      </p:sp>
+      <p:sp>
+        <p:nvSpPr>
+          <p:cNvPr id="14" name="TextBox 13"/>
+          <p:cNvSpPr txBox="1"/>
+          <p:nvPr/>
+        </p:nvSpPr>
+        <p:spPr>
+          <a:xfrm>
+            <a:off x="3493693" y="4183380"/>
+            <a:ext cx="2396413" cy="960119"/>
+          </a:xfrm>
+          <a:prstGeom prst="rect">
+            <a:avLst/>
+          </a:prstGeom>
+          <a:noFill/>
+        </p:spPr>
+        <p:txBody>
+          <a:bodyPr wrap="square" anchor="t" lIns="0" rIns="0" tIns="0" bIns="0"/>
+          <a:lstStyle/>
+          <a:p>
             <a:pPr algn="l"/>
             <a:r>
               <a:rPr sz="1800" b="0" i="0">
                 <a:solidFill>
-                  <a:srgbClr val="54595D"/>
-                </a:solidFill>
-                <a:latin typeface="Calibri"/>
-              </a:rPr>
-              <a:t>What does normalisation reduce?</a:t>
-            </a:r>
-          </a:p>
-          <a:p>
-            <a:r>
-              <a:rPr sz="1800" b="1">
-                <a:solidFill>
-                  <a:srgbClr val="03306E"/>
-                </a:solidFill>
-                <a:latin typeface="Calibri"/>
-              </a:rPr>
-              <a:t>Data redundancy (duplication).</a:t>
-            </a:r>
-          </a:p>
-        </p:txBody>
-      </p:sp>
-      <p:sp>
-        <p:nvSpPr>
-          <p:cNvPr id="10" name="Oval 9"/>
+                  <a:srgbClr val="202122"/>
+                </a:solidFill>
+                <a:latin typeface="Calibri"/>
+              </a:rPr>
+              <a:t>Every field, type and rule.</a:t>
+            </a:r>
+          </a:p>
+        </p:txBody>
+      </p:sp>
+      <p:sp>
+        <p:nvSpPr>
+          <p:cNvPr id="15" name="Oval 14"/>
           <p:cNvSpPr/>
           <p:nvPr/>
         </p:nvSpPr>
         <p:spPr>
           <a:xfrm>
-            <a:off x="548640" y="4009644"/>
-            <a:ext cx="411480" cy="411480"/>
+            <a:off x="7179754" y="2491740"/>
+            <a:ext cx="640080" cy="640080"/>
           </a:xfrm>
           <a:prstGeom prst="ellipse">
             <a:avLst/>
@@ -8828,7 +11799,7 @@
           <a:p>
             <a:pPr algn="ctr"/>
             <a:r>
-              <a:rPr sz="1400" b="1">
+              <a:rPr sz="2000" b="1">
                 <a:solidFill>
                   <a:srgbClr val="202122"/>
                 </a:solidFill>
@@ -8841,14 +11812,14 @@
       </p:sp>
       <p:sp>
         <p:nvSpPr>
-          <p:cNvPr id="11" name="TextBox 10"/>
-          <p:cNvSpPr txBox="1"/>
-          <p:nvPr/>
-        </p:nvSpPr>
-        <p:spPr>
-          <a:xfrm>
-            <a:off x="1234440" y="3991356"/>
-            <a:ext cx="10408615" cy="1030986"/>
+          <p:cNvPr id="16" name="TextBox 15"/>
+          <p:cNvSpPr txBox="1"/>
+          <p:nvPr/>
+        </p:nvSpPr>
+        <p:spPr>
+          <a:xfrm>
+            <a:off x="6164427" y="3268979"/>
+            <a:ext cx="2670733" cy="731520"/>
           </a:xfrm>
           <a:prstGeom prst="rect">
             <a:avLst/>
@@ -8859,40 +11830,106 @@
           <a:bodyPr wrap="square" anchor="t" lIns="0" rIns="0" tIns="0" bIns="0"/>
           <a:lstStyle/>
           <a:p>
+            <a:pPr algn="ctr"/>
+            <a:r>
+              <a:rPr sz="1700" b="1" i="0">
+                <a:solidFill>
+                  <a:srgbClr val="03306E"/>
+                </a:solidFill>
+                <a:latin typeface="Calibri"/>
+              </a:rPr>
+              <a:t>ERD</a:t>
+            </a:r>
+          </a:p>
+        </p:txBody>
+      </p:sp>
+      <p:sp>
+        <p:nvSpPr>
+          <p:cNvPr id="17" name="Rounded Rectangle 16"/>
+          <p:cNvSpPr/>
+          <p:nvPr/>
+        </p:nvSpPr>
+        <p:spPr>
+          <a:xfrm>
+            <a:off x="6164427" y="4046220"/>
+            <a:ext cx="2670733" cy="1234439"/>
+          </a:xfrm>
+          <a:prstGeom prst="roundRect">
+            <a:avLst>
+              <a:gd name="adj" fmla="val 6000"/>
+            </a:avLst>
+          </a:prstGeom>
+          <a:solidFill>
+            <a:srgbClr val="EAF3FF"/>
+          </a:solidFill>
+          <a:ln>
+            <a:noFill/>
+          </a:ln>
+          <a:effectLst/>
+        </p:spPr>
+        <p:style>
+          <a:lnRef idx="1">
+            <a:schemeClr val="accent1"/>
+          </a:lnRef>
+          <a:fillRef idx="3">
+            <a:schemeClr val="accent1"/>
+          </a:fillRef>
+          <a:effectRef idx="2">
+            <a:schemeClr val="accent1"/>
+          </a:effectRef>
+          <a:fontRef idx="minor">
+            <a:schemeClr val="lt1"/>
+          </a:fontRef>
+        </p:style>
+        <p:txBody>
+          <a:bodyPr rtlCol="0" anchor="ctr"/>
+          <a:lstStyle/>
+          <a:p/>
+        </p:txBody>
+      </p:sp>
+      <p:sp>
+        <p:nvSpPr>
+          <p:cNvPr id="18" name="TextBox 17"/>
+          <p:cNvSpPr txBox="1"/>
+          <p:nvPr/>
+        </p:nvSpPr>
+        <p:spPr>
+          <a:xfrm>
+            <a:off x="6301587" y="4183380"/>
+            <a:ext cx="2396413" cy="960119"/>
+          </a:xfrm>
+          <a:prstGeom prst="rect">
+            <a:avLst/>
+          </a:prstGeom>
+          <a:noFill/>
+        </p:spPr>
+        <p:txBody>
+          <a:bodyPr wrap="square" anchor="t" lIns="0" rIns="0" tIns="0" bIns="0"/>
+          <a:lstStyle/>
+          <a:p>
             <a:pPr algn="l"/>
             <a:r>
               <a:rPr sz="1800" b="0" i="0">
                 <a:solidFill>
-                  <a:srgbClr val="54595D"/>
-                </a:solidFill>
-                <a:latin typeface="Calibri"/>
-              </a:rPr>
-              <a:t>Give one factor when selecting a video asset.</a:t>
-            </a:r>
-          </a:p>
-          <a:p>
-            <a:r>
-              <a:rPr sz="1800" b="1">
-                <a:solidFill>
-                  <a:srgbClr val="03306E"/>
-                </a:solidFill>
-                <a:latin typeface="Calibri"/>
-              </a:rPr>
-              <a:t>E.g. file size, compression, bandwidth, quality.</a:t>
-            </a:r>
-          </a:p>
-        </p:txBody>
-      </p:sp>
-      <p:sp>
-        <p:nvSpPr>
-          <p:cNvPr id="12" name="Oval 11"/>
+                  <a:srgbClr val="202122"/>
+                </a:solidFill>
+                <a:latin typeface="Calibri"/>
+              </a:rPr>
+              <a:t>Entities and relationships.</a:t>
+            </a:r>
+          </a:p>
+        </p:txBody>
+      </p:sp>
+      <p:sp>
+        <p:nvSpPr>
+          <p:cNvPr id="19" name="Oval 18"/>
           <p:cNvSpPr/>
           <p:nvPr/>
         </p:nvSpPr>
         <p:spPr>
           <a:xfrm>
-            <a:off x="548640" y="5205221"/>
-            <a:ext cx="411480" cy="411480"/>
+            <a:off x="9987648" y="2491740"/>
+            <a:ext cx="640080" cy="640080"/>
           </a:xfrm>
           <a:prstGeom prst="ellipse">
             <a:avLst/>
@@ -8925,7 +11962,7 @@
           <a:p>
             <a:pPr algn="ctr"/>
             <a:r>
-              <a:rPr sz="1400" b="1">
+              <a:rPr sz="2000" b="1">
                 <a:solidFill>
                   <a:srgbClr val="202122"/>
                 </a:solidFill>
@@ -8938,14 +11975,14 @@
       </p:sp>
       <p:sp>
         <p:nvSpPr>
-          <p:cNvPr id="13" name="TextBox 12"/>
-          <p:cNvSpPr txBox="1"/>
-          <p:nvPr/>
-        </p:nvSpPr>
-        <p:spPr>
-          <a:xfrm>
-            <a:off x="1234440" y="5186933"/>
-            <a:ext cx="10408615" cy="1030986"/>
+          <p:cNvPr id="20" name="TextBox 19"/>
+          <p:cNvSpPr txBox="1"/>
+          <p:nvPr/>
+        </p:nvSpPr>
+        <p:spPr>
+          <a:xfrm>
+            <a:off x="8972321" y="3268979"/>
+            <a:ext cx="2670733" cy="731520"/>
           </a:xfrm>
           <a:prstGeom prst="rect">
             <a:avLst/>
@@ -8956,26 +11993,92 @@
           <a:bodyPr wrap="square" anchor="t" lIns="0" rIns="0" tIns="0" bIns="0"/>
           <a:lstStyle/>
           <a:p>
+            <a:pPr algn="ctr"/>
+            <a:r>
+              <a:rPr sz="1700" b="1" i="0">
+                <a:solidFill>
+                  <a:srgbClr val="03306E"/>
+                </a:solidFill>
+                <a:latin typeface="Calibri"/>
+              </a:rPr>
+              <a:t>Normalise</a:t>
+            </a:r>
+          </a:p>
+        </p:txBody>
+      </p:sp>
+      <p:sp>
+        <p:nvSpPr>
+          <p:cNvPr id="21" name="Rounded Rectangle 20"/>
+          <p:cNvSpPr/>
+          <p:nvPr/>
+        </p:nvSpPr>
+        <p:spPr>
+          <a:xfrm>
+            <a:off x="8972321" y="4046220"/>
+            <a:ext cx="2670733" cy="1234439"/>
+          </a:xfrm>
+          <a:prstGeom prst="roundRect">
+            <a:avLst>
+              <a:gd name="adj" fmla="val 6000"/>
+            </a:avLst>
+          </a:prstGeom>
+          <a:solidFill>
+            <a:srgbClr val="EAF3FF"/>
+          </a:solidFill>
+          <a:ln>
+            <a:noFill/>
+          </a:ln>
+          <a:effectLst/>
+        </p:spPr>
+        <p:style>
+          <a:lnRef idx="1">
+            <a:schemeClr val="accent1"/>
+          </a:lnRef>
+          <a:fillRef idx="3">
+            <a:schemeClr val="accent1"/>
+          </a:fillRef>
+          <a:effectRef idx="2">
+            <a:schemeClr val="accent1"/>
+          </a:effectRef>
+          <a:fontRef idx="minor">
+            <a:schemeClr val="lt1"/>
+          </a:fontRef>
+        </p:style>
+        <p:txBody>
+          <a:bodyPr rtlCol="0" anchor="ctr"/>
+          <a:lstStyle/>
+          <a:p/>
+        </p:txBody>
+      </p:sp>
+      <p:sp>
+        <p:nvSpPr>
+          <p:cNvPr id="22" name="TextBox 21"/>
+          <p:cNvSpPr txBox="1"/>
+          <p:nvPr/>
+        </p:nvSpPr>
+        <p:spPr>
+          <a:xfrm>
+            <a:off x="9109481" y="4183380"/>
+            <a:ext cx="2396413" cy="960119"/>
+          </a:xfrm>
+          <a:prstGeom prst="rect">
+            <a:avLst/>
+          </a:prstGeom>
+          <a:noFill/>
+        </p:spPr>
+        <p:txBody>
+          <a:bodyPr wrap="square" anchor="t" lIns="0" rIns="0" tIns="0" bIns="0"/>
+          <a:lstStyle/>
+          <a:p>
             <a:pPr algn="l"/>
             <a:r>
               <a:rPr sz="1800" b="0" i="0">
                 <a:solidFill>
-                  <a:srgbClr val="54595D"/>
-                </a:solidFill>
-                <a:latin typeface="Calibri"/>
-              </a:rPr>
-              <a:t>What is a system boundary?</a:t>
-            </a:r>
-          </a:p>
-          <a:p>
-            <a:r>
-              <a:rPr sz="1800" b="1">
-                <a:solidFill>
-                  <a:srgbClr val="03306E"/>
-                </a:solidFill>
-                <a:latin typeface="Calibri"/>
-              </a:rPr>
-              <a:t>Where your system ends and external systems begin.</a:t>
+                  <a:srgbClr val="202122"/>
+                </a:solidFill>
+                <a:latin typeface="Calibri"/>
+              </a:rPr>
+              <a:t>To third normal form.</a:t>
             </a:r>
           </a:p>
         </p:txBody>
@@ -9067,7 +12170,7 @@
                 </a:solidFill>
                 <a:latin typeface="Cambria"/>
               </a:rPr>
-              <a:t>Activity: Design a shop database</a:t>
+              <a:t>Quick check: Designing a database</a:t>
             </a:r>
           </a:p>
         </p:txBody>
@@ -9140,19 +12243,17 @@
       </p:sp>
       <p:sp>
         <p:nvSpPr>
-          <p:cNvPr id="6" name="Rounded Rectangle 5"/>
+          <p:cNvPr id="6" name="Oval 5"/>
           <p:cNvSpPr/>
           <p:nvPr/>
         </p:nvSpPr>
         <p:spPr>
           <a:xfrm>
-            <a:off x="548640" y="1508760"/>
-            <a:ext cx="2011680" cy="457200"/>
-          </a:xfrm>
-          <a:prstGeom prst="roundRect">
-            <a:avLst>
-              <a:gd name="adj" fmla="val 50000"/>
-            </a:avLst>
+            <a:off x="548640" y="1691640"/>
+            <a:ext cx="502920" cy="502920"/>
+          </a:xfrm>
+          <a:prstGeom prst="ellipse">
+            <a:avLst/>
           </a:prstGeom>
           <a:solidFill>
             <a:srgbClr val="33C17A"/>
@@ -9177,9 +12278,20 @@
           </a:fontRef>
         </p:style>
         <p:txBody>
-          <a:bodyPr rtlCol="0" anchor="ctr"/>
-          <a:lstStyle/>
-          <a:p/>
+          <a:bodyPr rtlCol="0" anchor="ctr" lIns="0" rIns="0" tIns="0" bIns="0"/>
+          <a:lstStyle/>
+          <a:p>
+            <a:pPr algn="ctr"/>
+            <a:r>
+              <a:rPr sz="1600" b="1">
+                <a:solidFill>
+                  <a:srgbClr val="202122"/>
+                </a:solidFill>
+                <a:latin typeface="Calibri"/>
+              </a:rPr>
+              <a:t>1</a:t>
+            </a:r>
+          </a:p>
         </p:txBody>
       </p:sp>
       <p:sp>
@@ -9190,80 +12302,47 @@
         </p:nvSpPr>
         <p:spPr>
           <a:xfrm>
-            <a:off x="548640" y="1508760"/>
-            <a:ext cx="2011680" cy="457200"/>
-          </a:xfrm>
-          <a:prstGeom prst="rect">
-            <a:avLst/>
-          </a:prstGeom>
-          <a:noFill/>
-        </p:spPr>
-        <p:txBody>
-          <a:bodyPr wrap="square" anchor="ctr" lIns="0" rIns="0" tIns="0" bIns="0"/>
-          <a:lstStyle/>
-          <a:p>
-            <a:pPr algn="ctr"/>
-            <a:r>
-              <a:rPr sz="1400" b="1" i="0">
+            <a:off x="1371600" y="1645920"/>
+            <a:ext cx="10271455" cy="1188720"/>
+          </a:xfrm>
+          <a:prstGeom prst="rect">
+            <a:avLst/>
+          </a:prstGeom>
+          <a:noFill/>
+        </p:spPr>
+        <p:txBody>
+          <a:bodyPr wrap="square" anchor="t" lIns="0" rIns="0" tIns="0" bIns="0"/>
+          <a:lstStyle/>
+          <a:p>
+            <a:pPr algn="l"/>
+            <a:r>
+              <a:rPr sz="2400" b="0" i="0">
                 <a:solidFill>
                   <a:srgbClr val="202122"/>
                 </a:solidFill>
                 <a:latin typeface="Calibri"/>
               </a:rPr>
-              <a:t>35 minutes</a:t>
-            </a:r>
-          </a:p>
-        </p:txBody>
-      </p:sp>
-      <p:sp>
-        <p:nvSpPr>
-          <p:cNvPr id="8" name="TextBox 7"/>
-          <p:cNvSpPr txBox="1"/>
-          <p:nvPr/>
-        </p:nvSpPr>
-        <p:spPr>
-          <a:xfrm>
-            <a:off x="2743200" y="1508760"/>
-            <a:ext cx="4754880" cy="457200"/>
-          </a:xfrm>
-          <a:prstGeom prst="rect">
-            <a:avLst/>
-          </a:prstGeom>
-          <a:noFill/>
-        </p:spPr>
-        <p:txBody>
-          <a:bodyPr wrap="square" anchor="ctr" lIns="0" rIns="0" tIns="0" bIns="0"/>
-          <a:lstStyle/>
-          <a:p>
-            <a:pPr algn="l"/>
-            <a:r>
-              <a:rPr sz="1400" b="0" i="1">
-                <a:solidFill>
-                  <a:srgbClr val="54595D"/>
-                </a:solidFill>
-                <a:latin typeface="Calibri"/>
-              </a:rPr>
-              <a:t>Pairs</a:t>
-            </a:r>
-          </a:p>
-        </p:txBody>
-      </p:sp>
-      <p:sp>
-        <p:nvSpPr>
-          <p:cNvPr id="9" name="Oval 8"/>
+              <a:t>What is a data dictionary?</a:t>
+            </a:r>
+          </a:p>
+        </p:txBody>
+      </p:sp>
+      <p:sp>
+        <p:nvSpPr>
+          <p:cNvPr id="8" name="Oval 7"/>
           <p:cNvSpPr/>
           <p:nvPr/>
         </p:nvSpPr>
         <p:spPr>
           <a:xfrm>
-            <a:off x="548640" y="2482596"/>
-            <a:ext cx="384048" cy="384048"/>
+            <a:off x="548640" y="3108960"/>
+            <a:ext cx="502920" cy="502920"/>
           </a:xfrm>
           <a:prstGeom prst="ellipse">
             <a:avLst/>
           </a:prstGeom>
           <a:solidFill>
-            <a:srgbClr val="0645AD"/>
+            <a:srgbClr val="33C17A"/>
           </a:solidFill>
           <a:ln>
             <a:noFill/>
@@ -9290,66 +12369,66 @@
           <a:p>
             <a:pPr algn="ctr"/>
             <a:r>
-              <a:rPr sz="1300" b="1">
-                <a:solidFill>
-                  <a:srgbClr val="FFFFFF"/>
-                </a:solidFill>
-                <a:latin typeface="Calibri"/>
-              </a:rPr>
-              <a:t>1</a:t>
-            </a:r>
-          </a:p>
-        </p:txBody>
-      </p:sp>
-      <p:sp>
-        <p:nvSpPr>
-          <p:cNvPr id="10" name="TextBox 9"/>
-          <p:cNvSpPr txBox="1"/>
-          <p:nvPr/>
-        </p:nvSpPr>
-        <p:spPr>
-          <a:xfrm>
-            <a:off x="1143000" y="2240280"/>
-            <a:ext cx="5943600" cy="868680"/>
-          </a:xfrm>
-          <a:prstGeom prst="rect">
-            <a:avLst/>
-          </a:prstGeom>
-          <a:noFill/>
-        </p:spPr>
-        <p:txBody>
-          <a:bodyPr wrap="square" anchor="ctr" lIns="0" rIns="0" tIns="0" bIns="0"/>
+              <a:rPr sz="1600" b="1">
+                <a:solidFill>
+                  <a:srgbClr val="202122"/>
+                </a:solidFill>
+                <a:latin typeface="Calibri"/>
+              </a:rPr>
+              <a:t>2</a:t>
+            </a:r>
+          </a:p>
+        </p:txBody>
+      </p:sp>
+      <p:sp>
+        <p:nvSpPr>
+          <p:cNvPr id="9" name="TextBox 8"/>
+          <p:cNvSpPr txBox="1"/>
+          <p:nvPr/>
+        </p:nvSpPr>
+        <p:spPr>
+          <a:xfrm>
+            <a:off x="1371600" y="3063240"/>
+            <a:ext cx="10271455" cy="1188720"/>
+          </a:xfrm>
+          <a:prstGeom prst="rect">
+            <a:avLst/>
+          </a:prstGeom>
+          <a:noFill/>
+        </p:spPr>
+        <p:txBody>
+          <a:bodyPr wrap="square" anchor="t" lIns="0" rIns="0" tIns="0" bIns="0"/>
           <a:lstStyle/>
           <a:p>
             <a:pPr algn="l"/>
             <a:r>
-              <a:rPr sz="1700" b="0" i="0">
+              <a:rPr sz="2400" b="0" i="0">
                 <a:solidFill>
                   <a:srgbClr val="202122"/>
                 </a:solidFill>
                 <a:latin typeface="Calibri"/>
               </a:rPr>
-              <a:t>A small online shop sells products to customers who place orders.</a:t>
-            </a:r>
-          </a:p>
-        </p:txBody>
-      </p:sp>
-      <p:sp>
-        <p:nvSpPr>
-          <p:cNvPr id="11" name="Oval 10"/>
+              <a:t>What does normalisation remove?</a:t>
+            </a:r>
+          </a:p>
+        </p:txBody>
+      </p:sp>
+      <p:sp>
+        <p:nvSpPr>
+          <p:cNvPr id="10" name="Oval 9"/>
           <p:cNvSpPr/>
           <p:nvPr/>
         </p:nvSpPr>
         <p:spPr>
           <a:xfrm>
-            <a:off x="548640" y="3461004"/>
-            <a:ext cx="384048" cy="384048"/>
+            <a:off x="548640" y="4526280"/>
+            <a:ext cx="502920" cy="502920"/>
           </a:xfrm>
           <a:prstGeom prst="ellipse">
             <a:avLst/>
           </a:prstGeom>
           <a:solidFill>
-            <a:srgbClr val="0645AD"/>
+            <a:srgbClr val="33C17A"/>
           </a:solidFill>
           <a:ln>
             <a:noFill/>
@@ -9376,13 +12455,46 @@
           <a:p>
             <a:pPr algn="ctr"/>
             <a:r>
-              <a:rPr sz="1300" b="1">
-                <a:solidFill>
-                  <a:srgbClr val="FFFFFF"/>
-                </a:solidFill>
-                <a:latin typeface="Calibri"/>
-              </a:rPr>
-              <a:t>2</a:t>
+              <a:rPr sz="1600" b="1">
+                <a:solidFill>
+                  <a:srgbClr val="202122"/>
+                </a:solidFill>
+                <a:latin typeface="Calibri"/>
+              </a:rPr>
+              <a:t>3</a:t>
+            </a:r>
+          </a:p>
+        </p:txBody>
+      </p:sp>
+      <p:sp>
+        <p:nvSpPr>
+          <p:cNvPr id="11" name="TextBox 10"/>
+          <p:cNvSpPr txBox="1"/>
+          <p:nvPr/>
+        </p:nvSpPr>
+        <p:spPr>
+          <a:xfrm>
+            <a:off x="1371600" y="4480560"/>
+            <a:ext cx="10271455" cy="1188720"/>
+          </a:xfrm>
+          <a:prstGeom prst="rect">
+            <a:avLst/>
+          </a:prstGeom>
+          <a:noFill/>
+        </p:spPr>
+        <p:txBody>
+          <a:bodyPr wrap="square" anchor="t" lIns="0" rIns="0" tIns="0" bIns="0"/>
+          <a:lstStyle/>
+          <a:p>
+            <a:pPr algn="l"/>
+            <a:r>
+              <a:rPr sz="2400" b="0" i="0">
+                <a:solidFill>
+                  <a:srgbClr val="202122"/>
+                </a:solidFill>
+                <a:latin typeface="Calibri"/>
+              </a:rPr>
+              <a:t>What is a foreign key?</a:t>
             </a:r>
           </a:p>
         </p:txBody>
@@ -9395,362 +12507,27 @@
         </p:nvSpPr>
         <p:spPr>
           <a:xfrm>
-            <a:off x="1143000" y="3218688"/>
-            <a:ext cx="5943600" cy="868680"/>
-          </a:xfrm>
-          <a:prstGeom prst="rect">
-            <a:avLst/>
-          </a:prstGeom>
-          <a:noFill/>
-        </p:spPr>
-        <p:txBody>
-          <a:bodyPr wrap="square" anchor="ctr" lIns="0" rIns="0" tIns="0" bIns="0"/>
+            <a:off x="548640" y="5852160"/>
+            <a:ext cx="11094415" cy="365760"/>
+          </a:xfrm>
+          <a:prstGeom prst="rect">
+            <a:avLst/>
+          </a:prstGeom>
+          <a:noFill/>
+        </p:spPr>
+        <p:txBody>
+          <a:bodyPr wrap="square" anchor="t" lIns="0" rIns="0" tIns="0" bIns="0"/>
           <a:lstStyle/>
           <a:p>
             <a:pPr algn="l"/>
             <a:r>
-              <a:rPr sz="1700" b="0" i="0">
-                <a:solidFill>
-                  <a:srgbClr val="202122"/>
-                </a:solidFill>
-                <a:latin typeface="Calibri"/>
-              </a:rPr>
-              <a:t>Write a data dictionary for three tables.</a:t>
-            </a:r>
-          </a:p>
-        </p:txBody>
-      </p:sp>
-      <p:sp>
-        <p:nvSpPr>
-          <p:cNvPr id="13" name="Oval 12"/>
-          <p:cNvSpPr/>
-          <p:nvPr/>
-        </p:nvSpPr>
-        <p:spPr>
-          <a:xfrm>
-            <a:off x="548640" y="4439412"/>
-            <a:ext cx="384048" cy="384048"/>
-          </a:xfrm>
-          <a:prstGeom prst="ellipse">
-            <a:avLst/>
-          </a:prstGeom>
-          <a:solidFill>
-            <a:srgbClr val="0645AD"/>
-          </a:solidFill>
-          <a:ln>
-            <a:noFill/>
-          </a:ln>
-          <a:effectLst/>
-        </p:spPr>
-        <p:style>
-          <a:lnRef idx="1">
-            <a:schemeClr val="accent1"/>
-          </a:lnRef>
-          <a:fillRef idx="3">
-            <a:schemeClr val="accent1"/>
-          </a:fillRef>
-          <a:effectRef idx="2">
-            <a:schemeClr val="accent1"/>
-          </a:effectRef>
-          <a:fontRef idx="minor">
-            <a:schemeClr val="lt1"/>
-          </a:fontRef>
-        </p:style>
-        <p:txBody>
-          <a:bodyPr rtlCol="0" anchor="ctr" lIns="0" rIns="0" tIns="0" bIns="0"/>
-          <a:lstStyle/>
-          <a:p>
-            <a:pPr algn="ctr"/>
-            <a:r>
-              <a:rPr sz="1300" b="1">
-                <a:solidFill>
-                  <a:srgbClr val="FFFFFF"/>
-                </a:solidFill>
-                <a:latin typeface="Calibri"/>
-              </a:rPr>
-              <a:t>3</a:t>
-            </a:r>
-          </a:p>
-        </p:txBody>
-      </p:sp>
-      <p:sp>
-        <p:nvSpPr>
-          <p:cNvPr id="14" name="TextBox 13"/>
-          <p:cNvSpPr txBox="1"/>
-          <p:nvPr/>
-        </p:nvSpPr>
-        <p:spPr>
-          <a:xfrm>
-            <a:off x="1143000" y="4197096"/>
-            <a:ext cx="5943600" cy="868680"/>
-          </a:xfrm>
-          <a:prstGeom prst="rect">
-            <a:avLst/>
-          </a:prstGeom>
-          <a:noFill/>
-        </p:spPr>
-        <p:txBody>
-          <a:bodyPr wrap="square" anchor="ctr" lIns="0" rIns="0" tIns="0" bIns="0"/>
-          <a:lstStyle/>
-          <a:p>
-            <a:pPr algn="l"/>
-            <a:r>
-              <a:rPr sz="1700" b="0" i="0">
-                <a:solidFill>
-                  <a:srgbClr val="202122"/>
-                </a:solidFill>
-                <a:latin typeface="Calibri"/>
-              </a:rPr>
-              <a:t>Draw the ERD.</a:t>
-            </a:r>
-          </a:p>
-        </p:txBody>
-      </p:sp>
-      <p:sp>
-        <p:nvSpPr>
-          <p:cNvPr id="15" name="Oval 14"/>
-          <p:cNvSpPr/>
-          <p:nvPr/>
-        </p:nvSpPr>
-        <p:spPr>
-          <a:xfrm>
-            <a:off x="548640" y="5417820"/>
-            <a:ext cx="384048" cy="384048"/>
-          </a:xfrm>
-          <a:prstGeom prst="ellipse">
-            <a:avLst/>
-          </a:prstGeom>
-          <a:solidFill>
-            <a:srgbClr val="0645AD"/>
-          </a:solidFill>
-          <a:ln>
-            <a:noFill/>
-          </a:ln>
-          <a:effectLst/>
-        </p:spPr>
-        <p:style>
-          <a:lnRef idx="1">
-            <a:schemeClr val="accent1"/>
-          </a:lnRef>
-          <a:fillRef idx="3">
-            <a:schemeClr val="accent1"/>
-          </a:fillRef>
-          <a:effectRef idx="2">
-            <a:schemeClr val="accent1"/>
-          </a:effectRef>
-          <a:fontRef idx="minor">
-            <a:schemeClr val="lt1"/>
-          </a:fontRef>
-        </p:style>
-        <p:txBody>
-          <a:bodyPr rtlCol="0" anchor="ctr" lIns="0" rIns="0" tIns="0" bIns="0"/>
-          <a:lstStyle/>
-          <a:p>
-            <a:pPr algn="ctr"/>
-            <a:r>
-              <a:rPr sz="1300" b="1">
-                <a:solidFill>
-                  <a:srgbClr val="FFFFFF"/>
-                </a:solidFill>
-                <a:latin typeface="Calibri"/>
-              </a:rPr>
-              <a:t>4</a:t>
-            </a:r>
-          </a:p>
-        </p:txBody>
-      </p:sp>
-      <p:sp>
-        <p:nvSpPr>
-          <p:cNvPr id="16" name="TextBox 15"/>
-          <p:cNvSpPr txBox="1"/>
-          <p:nvPr/>
-        </p:nvSpPr>
-        <p:spPr>
-          <a:xfrm>
-            <a:off x="1143000" y="5175504"/>
-            <a:ext cx="5943600" cy="868680"/>
-          </a:xfrm>
-          <a:prstGeom prst="rect">
-            <a:avLst/>
-          </a:prstGeom>
-          <a:noFill/>
-        </p:spPr>
-        <p:txBody>
-          <a:bodyPr wrap="square" anchor="ctr" lIns="0" rIns="0" tIns="0" bIns="0"/>
-          <a:lstStyle/>
-          <a:p>
-            <a:pPr algn="l"/>
-            <a:r>
-              <a:rPr sz="1700" b="0" i="0">
-                <a:solidFill>
-                  <a:srgbClr val="202122"/>
-                </a:solidFill>
-                <a:latin typeface="Calibri"/>
-              </a:rPr>
-              <a:t>Check it is in third normal form and explain why.</a:t>
-            </a:r>
-          </a:p>
-        </p:txBody>
-      </p:sp>
-      <p:sp>
-        <p:nvSpPr>
-          <p:cNvPr id="17" name="Rounded Rectangle 16"/>
-          <p:cNvSpPr/>
-          <p:nvPr/>
-        </p:nvSpPr>
-        <p:spPr>
-          <a:xfrm>
-            <a:off x="7772400" y="1508760"/>
-            <a:ext cx="3867912" cy="4572000"/>
-          </a:xfrm>
-          <a:prstGeom prst="roundRect">
-            <a:avLst>
-              <a:gd name="adj" fmla="val 8000"/>
-            </a:avLst>
-          </a:prstGeom>
-          <a:solidFill>
-            <a:srgbClr val="EAF3FF"/>
-          </a:solidFill>
-          <a:ln>
-            <a:noFill/>
-          </a:ln>
-          <a:effectLst/>
-        </p:spPr>
-        <p:style>
-          <a:lnRef idx="1">
-            <a:schemeClr val="accent1"/>
-          </a:lnRef>
-          <a:fillRef idx="3">
-            <a:schemeClr val="accent1"/>
-          </a:fillRef>
-          <a:effectRef idx="2">
-            <a:schemeClr val="accent1"/>
-          </a:effectRef>
-          <a:fontRef idx="minor">
-            <a:schemeClr val="lt1"/>
-          </a:fontRef>
-        </p:style>
-        <p:txBody>
-          <a:bodyPr rtlCol="0" anchor="ctr"/>
-          <a:lstStyle/>
-          <a:p/>
-        </p:txBody>
-      </p:sp>
-      <p:sp>
-        <p:nvSpPr>
-          <p:cNvPr id="18" name="TextBox 17"/>
-          <p:cNvSpPr txBox="1"/>
-          <p:nvPr/>
-        </p:nvSpPr>
-        <p:spPr>
-          <a:xfrm>
-            <a:off x="8046720" y="1737360"/>
-            <a:ext cx="3291840" cy="365760"/>
-          </a:xfrm>
-          <a:prstGeom prst="rect">
-            <a:avLst/>
-          </a:prstGeom>
-          <a:noFill/>
-        </p:spPr>
-        <p:txBody>
-          <a:bodyPr wrap="square" anchor="t" lIns="0" rIns="0" tIns="0" bIns="0"/>
-          <a:lstStyle/>
-          <a:p>
-            <a:pPr algn="l"/>
-            <a:r>
-              <a:rPr sz="1300" b="1" i="0">
-                <a:solidFill>
-                  <a:srgbClr val="0645AD"/>
-                </a:solidFill>
-                <a:latin typeface="Calibri"/>
-              </a:rPr>
-              <a:t>SUCCESS CRITERIA</a:t>
-            </a:r>
-          </a:p>
-        </p:txBody>
-      </p:sp>
-      <p:sp>
-        <p:nvSpPr>
-          <p:cNvPr id="19" name="TextBox 18"/>
-          <p:cNvSpPr txBox="1"/>
-          <p:nvPr/>
-        </p:nvSpPr>
-        <p:spPr>
-          <a:xfrm>
-            <a:off x="8046720" y="2240280"/>
-            <a:ext cx="3337560" cy="3657600"/>
-          </a:xfrm>
-          <a:prstGeom prst="rect">
-            <a:avLst/>
-          </a:prstGeom>
-          <a:noFill/>
-        </p:spPr>
-        <p:txBody>
-          <a:bodyPr wrap="square" lIns="0" rIns="0" tIns="0" bIns="0">
-            <a:spAutoFit/>
-          </a:bodyPr>
-          <a:lstStyle/>
-          <a:p>
-            <a:pPr marL="274320" indent="-274320">
-              <a:spcAft>
-                <a:spcPts val="810"/>
-              </a:spcAft>
-              <a:buClr>
-                <a:srgbClr val="0645AD"/>
-              </a:buClr>
-              <a:buFont typeface="Arial"/>
-              <a:buChar char="•"/>
-            </a:pPr>
-            <a:r>
-              <a:rPr sz="1800" b="0">
-                <a:solidFill>
-                  <a:srgbClr val="202122"/>
-                </a:solidFill>
-                <a:latin typeface="Calibri"/>
-              </a:rPr>
-              <a:t>Primary and foreign keys shown</a:t>
-            </a:r>
-          </a:p>
-          <a:p>
-            <a:pPr marL="274320" indent="-274320">
-              <a:spcAft>
-                <a:spcPts val="810"/>
-              </a:spcAft>
-              <a:buClr>
-                <a:srgbClr val="0645AD"/>
-              </a:buClr>
-              <a:buFont typeface="Arial"/>
-              <a:buChar char="•"/>
-            </a:pPr>
-            <a:r>
-              <a:rPr sz="1800" b="0">
-                <a:solidFill>
-                  <a:srgbClr val="202122"/>
-                </a:solidFill>
-                <a:latin typeface="Calibri"/>
-              </a:rPr>
-              <a:t>Relationships correct</a:t>
-            </a:r>
-          </a:p>
-          <a:p>
-            <a:pPr marL="274320" indent="-274320">
-              <a:spcAft>
-                <a:spcPts val="810"/>
-              </a:spcAft>
-              <a:buClr>
-                <a:srgbClr val="0645AD"/>
-              </a:buClr>
-              <a:buFont typeface="Arial"/>
-              <a:buChar char="•"/>
-            </a:pPr>
-            <a:r>
-              <a:rPr sz="1800" b="0">
-                <a:solidFill>
-                  <a:srgbClr val="202122"/>
-                </a:solidFill>
-                <a:latin typeface="Calibri"/>
-              </a:rPr>
-              <a:t>No repeated data</a:t>
+              <a:rPr sz="1300" b="0" i="1">
+                <a:solidFill>
+                  <a:srgbClr val="54595D"/>
+                </a:solidFill>
+                <a:latin typeface="Calibri"/>
+              </a:rPr>
+              <a:t>Answer on mini whiteboards or in your book. Answers are in the speaker notes.</a:t>
             </a:r>
           </a:p>
         </p:txBody>
